--- a/APT_Detection_MidEval.pptx
+++ b/APT_Detection_MidEval.pptx
@@ -29,9 +29,10 @@
     <p:sldId id="277" r:id="rId23"/>
     <p:sldId id="278" r:id="rId24"/>
     <p:sldId id="279" r:id="rId25"/>
+    <p:sldId id="280" r:id="rId26"/>
   </p:sldIdLst>
   <p:notesMasterIdLst>
-    <p:notesMasterId r:id="rId26"/>
+    <p:notesMasterId r:id="rId27"/>
   </p:notesMasterIdLst>
   <p:sldSz cx="12192000" cy="6858000"/>
   <p:notesSz cx="6858000" cy="12192000"/>
@@ -528,7 +529,7 @@
               <a:t>[ 0:40 on this slide  |  clock 0:00 -&gt; 0:40 of 20:00 ]
 Good morning. We are presenting Project 16: anomaly detection using machine learning for Advanced Persistent Threats, or APTs.
 Our reference paper is Saini and colleagues, published in 2023 in Concurrency and Computation: Practice and Experience. It proposes a hybrid Random Forest plus XGBoost model for detecting APT attacks.
-In this mid-term evaluation we will show that we have implemented the complete method, moved it to a dataset that genuinely contains APT attacks, and tested whether the paper's claims hold up.
+In this mid-term evaluation we will show that we implemented the complete method, moved it to a dataset that genuinely contains APT attacks, and tested whether the paper's claims hold up.
 TRANSITION: Here is how the talk is organised.</a:t>
             </a:r>
             <a:endParaRPr lang="en-US" dirty="0"/>
@@ -617,15 +618,14 @@
           <a:p>
             <a:r>
               <a:rPr lang="en-US" dirty="0"/>
-              <a:t>[ 1:15 on this slide  |  clock 7:30 -&gt; 8:45 of 20:00 ]
+              <a:t>[ 1:10 on this slide  |  clock 7:05 -&gt; 8:15 of 20:00 ]
 We followed the paper's Section 3.2 and Algorithm 1 step by step.
-One, clean: drop identifiers such as IP addresses, ports and timestamps, because they identify machines rather than behaviour, and remove missing values, duplicates and constant columns.
-Two, balance the classes with SMOTETomek, which creates synthetic minority samples and removes borderline pairs. This step is highlighted in red; we will come back to it.
+One, clean: drop identifiers such as IP addresses, ports and timestamps, and remove missing values, duplicates and constant columns.
+Two, balance with SMOTETomek, which creates synthetic minority samples and removes borderline pairs. It is highlighted in red; we will come back to it.
 Three, split 70 percent training, 30 percent test.
-Four, select features: drop any feature more than 90 percent correlated with another, then keep the top 30 by mutual information.
-Five, train the hybrid and the 13 baselines.
-Six, evaluate with the paper's eight metrics.
-Interestingly, the most informative feature is destination port, exactly as in the paper.
+Four, select features: drop features more than 90 percent correlated with another, then keep the top 30 by mutual information.
+Five, train the hybrid and 13 baselines. Six, evaluate with the paper's eight metrics.
+The most informative feature is dst port, exactly as in the paper.
 TRANSITION: Now let's look inside the hybrid model.</a:t>
             </a:r>
             <a:endParaRPr lang="en-US" dirty="0"/>
@@ -714,11 +714,10 @@
           <a:p>
             <a:r>
               <a:rPr lang="en-US" dirty="0"/>
-              <a:t>[ 1:15 on this slide  |  clock 8:45 -&gt; 10:00 of 20:00 ]
-The hybrid combines two tree ensembles. Random Forest uses bagging: 100 independent trees that vote. XGBoost uses boosting: 100 trees built one after another, each correcting the previous one's errors, with learning rate 1.0 and depth 4, as in the paper.
-The paper combines them with the combo library's aggregator using the "average" method, and describes this as averaging the two models.
-But when we read the library's source code, we found that the prediction step averages the two models' 0-or-1 labels and outputs APT when the average is at least 0.5. With two models, that means a flow is flagged as APT if either model flags it: an OR rule. This catches more attacks, but raises more false alarms.
-We reproduce this exactly, and we also test a soft-vote version that averages probabilities.
+              <a:t>[ 1:10 on this slide  |  clock 8:15 -&gt; 9:25 of 20:00 ]
+Random Forest uses bagging: 100 independent trees that vote. XGBoost uses boosting: 100 trees built one after another, with learning rate 1.0 and depth 4, as in the paper. We apply the depth limit to XGBoost only, since Random Forest trees are normally grown fully.
+The paper combines them with combo's "average" aggregator. When we read the library's source code, we found that its prediction step averages the two models' 0-or-1 labels and outputs APT when the average is at least 0.5. With two models, that is an OR rule: a flow is flagged if either model flags it. More attacks caught, but more false alarms.
+We reproduce this exactly, and also test a soft-vote version that averages probabilities.
 TRANSITION: While reproducing the paper, we found a more serious issue in how it evaluates the model.</a:t>
             </a:r>
             <a:endParaRPr lang="en-US" dirty="0"/>
@@ -807,11 +806,10 @@
           <a:p>
             <a:r>
               <a:rPr lang="en-US" dirty="0"/>
-              <a:t>[ 1:30 on this slide  |  clock 10:00 -&gt; 11:30 of 20:00 ]
-The paper balances the data with SMOTETomek before splitting it into training and test sets. It states this explicitly in Section 3.2.
-The top row shows the consequence. SMOTE creates synthetic attack flows by interpolating between real ones, and only then is the data split. So the test set contains synthetic flows built from flows that are in the training set: the model is partly tested on near-copies of what it trained on.
-There is a second problem. After balancing, the test set is fifty-fifty, while real traffic here is 77 percent benign. A balanced test set hides how many false alarms a model raises, because there are artificially few benign flows to raise them on.
-Our fix, in the bottom row, changes only one thing: we split first, and balance the training data only. The test set is untouched real traffic. Because everything else is identical, any difference between the two is caused by the leak.
+              <a:t>[ 1:20 on this slide  |  clock 9:25 -&gt; 10:45 of 20:00 ]
+The paper balances the data with SMOTETomek before splitting it, and says so explicitly in Section 3.2.
+That causes two problems. First, SMOTE creates synthetic attack flows by interpolating between real ones, so after the split the test set contains synthetic flows built from flows the model trained on. Second, the test set becomes fifty-fifty, while real traffic here is 77 percent benign; a balanced test set makes false alarms look rarer than they are.
+Our fix changes only the order: split first, balance the training data only. The test set is untouched real traffic. Any difference between the two protocols comes from the order of these two steps, and in the results we will separate the two problems.
 TRANSITION: This gives us our experimental design.</a:t>
             </a:r>
             <a:endParaRPr lang="en-US" dirty="0"/>
@@ -900,9 +898,9 @@
           <a:p>
             <a:r>
               <a:rPr lang="en-US" dirty="0"/>
-              <a:t>[ 0:40 on this slide  |  clock 11:30 -&gt; 12:10 of 20:00 ]
-We ran three experiments. First, a replication using exactly the paper's protocol. Second, the correction: the same pipeline, leakage-free, repeated over five random seeds for the key models. Third, an extension the paper's datasets cannot support: predicting the APT stage of each flow, five classes.
-In total we compare fifteen models: the hybrid as published, a soft-vote variant, ten classical models, and three deep learning models trained on the GPU.
+              <a:t>[ 0:40 on this slide  |  clock 10:45 -&gt; 11:25 of 20:00 ]
+Three experiments. A replication with exactly the paper's protocol. A correction: the same pipeline, leakage-free, repeated over five random seeds for the key models. And an extension the paper's datasets cannot support: predicting the APT stage of each flow.
+Fifteen models in total: the hybrid as published, a soft-vote variant, ten classical models and three deep learning models.
 HAND-OFF POINT (next speaker): results.</a:t>
             </a:r>
             <a:endParaRPr lang="en-US" dirty="0"/>
@@ -991,7 +989,7 @@
           <a:p>
             <a:r>
               <a:rPr lang="en-US" dirty="0"/>
-              <a:t>[ 0:10 on this slide  |  clock 12:10 -&gt; 12:20 of 20:00 ]
+              <a:t>[ 0:10 on this slide  |  clock 11:25 -&gt; 11:35 of 20:00 ]
 Part three: the results.</a:t>
             </a:r>
             <a:endParaRPr lang="en-US" dirty="0"/>
@@ -1080,13 +1078,11 @@
           <a:p>
             <a:r>
               <a:rPr lang="en-US" dirty="0"/>
-              <a:t>[ 1:15 on this slide  |  clock 12:20 -&gt; 13:35 of 20:00 ]
-First: how does the paper's model do on real APT traffic?
-On the left, the paper's claim: 98.92 percent accuracy, F1 98.90, false positive rate 0.52 percent.
-In the middle, our replication on DAPT2020 with the paper's own protocol: accuracy drops to 96.43 percent and the false positive rate rises to 6.14 percent.
-On the right, the realistic leakage-free version: accuracy 94.68 percent, F1 89.46 percent, false positive rate 5.99 percent.
-So the hybrid still ranks APT flows very well, with an AUC of about 99 percent, but on APT traffic it raises roughly twelve times more false alarms than claimed, and F1 falls by seven points once the leak is removed. APT traffic is designed to look normal, so it is much harder than the DoS and brute-force attacks in the paper's datasets.
-TRANSITION: Is this specific to the hybrid? Here are all fifteen models.</a:t>
+              <a:t>[ 1:10 on this slide  |  clock 11:35 -&gt; 12:45 of 20:00 ]
+First, the paper's model on real APT traffic.
+On the left, the paper's claim: 98.92 percent accuracy, false positive rate 0.52 percent. In the middle, our replication with the paper's own protocol: accuracy 96.99 percent, false positive rate 5.44 percent. On the right, the realistic leakage-free version: accuracy 94.28, F1 88.85, false positive rate 6.78 percent.
+The hybrid still ranks APT flows very well, AUC 99.1 percent, but raises about 13 times more false alarms than claimed. APT traffic is designed to look normal, so it is much harder than the paper's DoS and brute-force attacks.
+TRANSITION: F1 is 8.2 points lower on the realistic test set. Where does that gap come from?</a:t>
             </a:r>
             <a:endParaRPr lang="en-US" dirty="0"/>
           </a:p>
@@ -1174,11 +1170,12 @@
           <a:p>
             <a:r>
               <a:rPr lang="en-US" dirty="0"/>
-              <a:t>[ 1:00 on this slide  |  clock 13:35 -&gt; 14:35 of 20:00 ]
-Grey bars are the paper's protocol, blue bars the leakage-free protocol, sorted by the realistic F1 score.
-Every single model drops, by between 7 and 20 F1 points, when the test set is real traffic. So the inflation is not specific to the hybrid; it comes from the evaluation protocol.
-The ranking is consistent. The tree ensembles lead: the hybrid, Random Forest and XGBoost are all around 89.5 percent. Deep learning does not help on these tabular features, which agrees with the paper's own table. And simple models collapse: Naive Bayes raises alarms on 32 percent of benign flows.
-TRANSITION: The paper claims the hybrid beats everything. Let's test that directly.</a:t>
+              <a:t>[ 1:05 on this slide  |  clock 12:45 -&gt; 13:50 of 20:00 ]
+We took the paper-protocol predictions and re-scored them at the real class ratio. That is exact: recall and false positive rate don't depend on the class mix, so precision and F1 can be recomputed.
+On the left, as the paper would report it: F1 97.06 percent. Same predictions at the real ratio: 91.49. So 5.6 of the 8.2 points come purely from testing on a fifty-fifty set: precision drops from 94.8 to 84.7 percent.
+The remaining 2.6 points are the leak: 70 percent of the APT flows in the paper's test set are synthetic, and the model misses only 0.34 percent of those, versus 1.12 percent of real ones.
+Both effects come from balancing before splitting; the misleading class ratio accounts for about 68 percent of the gap, leakage for the rest.
+TRANSITION: Is this specific to the hybrid? Here are all fifteen models.</a:t>
             </a:r>
             <a:endParaRPr lang="en-US" dirty="0"/>
           </a:p>
@@ -1266,12 +1263,11 @@
           <a:p>
             <a:r>
               <a:rPr lang="en-US" dirty="0"/>
-              <a:t>[ 1:15 on this slide  |  clock 14:35 -&gt; 15:50 of 20:00 ]
-Here we compare the hybrid with its own two components, over five random splits, showing mean and standard deviation.
-On F1, all four are between 89.1 and 89.5 percent, and the differences are within run-to-run noise. So the hybrid is statistically tied with Random Forest and with XGBoost alone.
-What the OR rule actually does is trade false alarms for recall: the hybrid catches the most APT flows, 96 percent versus about 93, but its false positive rate is 5.9 percent versus about 4.8.
-Where the hybrid does win is ranking: its AUC is consistently the highest, 99.04 percent. So combining the two models' probabilities is slightly better; it is the fixed OR decision rule that costs precision.
-TRANSITION: Because DAPT2020 labels stages, we can go further than the paper.</a:t>
+              <a:t>[ 0:55 on this slide  |  clock 13:50 -&gt; 14:45 of 20:00 ]
+Grey bars: the paper's protocol. Blue bars: leakage-free, sorted by the realistic F1.
+Every model scores lower on the realistic test set, by 8.0 to 21.2 F1 points. We measured the breakdown for the hybrid; the same two mechanisms apply to every model, so this is a property of the evaluation, not of the hybrid.
+The ranking is stable: the tree ensembles lead, and deep learning does not help on these tabular features, which matches the paper's own table. Simple models collapse: Naive Bayes raises alarms on 32 percent of benign flows.
+TRANSITION: The paper claims the hybrid beats everything. Let's test that directly.</a:t>
             </a:r>
             <a:endParaRPr lang="en-US" dirty="0"/>
           </a:p>
@@ -1359,12 +1355,11 @@
           <a:p>
             <a:r>
               <a:rPr lang="en-US" dirty="0"/>
-              <a:t>[ 1:00 on this slide  |  clock 15:50 -&gt; 16:50 of 20:00 ]
-In this extension, the model predicts which APT stage each flow belongs to. The confusion matrix shows actual stages as rows and predicted stages as columns.
-Reconnaissance is recognised 96.5 percent of the time, establishing a foothold 98.2 percent, and lateral movement 90 percent.
-Data exfiltration is the weak point: only 2 of the 5 test flows are recognised. With 15 exfiltration flows in the entire dataset, there is simply too little data to learn it.
-Overall, Random Forest has the best macro F1 at 78.9 percent, and 97 percent of APT flows are flagged as some APT stage.
-TRANSITION: Finally, we analysed where the errors come from.</a:t>
+              <a:t>[ 1:10 on this slide  |  clock 14:45 -&gt; 15:55 of 20:00 ]
+We compare the hybrid with its own components over five random splits: mean and standard deviation.
+The paper's OR hybrid scores F1 88.82, against 89.00 for Random Forest and 89.01 for XGBoost. So the published hybrid does not beat its own parts. The OR rule catches the most APT flows, recall 96.9 percent, but also raises the most false alarms, 6.5 percent.
+The soft vote, averaging probabilities instead, has the best mean F1, 89.21: ahead of XGBoost and the OR hybrid on 5 of 5 seeds and of Random Forest on 4 of 5. It's a small gain, about 0.2 points, so combining the models helps only a little, and only with the right combination rule.
+TRANSITION: Because DAPT2020 labels stages, we can go further than the paper.</a:t>
             </a:r>
             <a:endParaRPr lang="en-US" dirty="0"/>
           </a:p>
@@ -1452,11 +1447,11 @@
           <a:p>
             <a:r>
               <a:rPr lang="en-US" dirty="0"/>
-              <a:t>[ 1:00 on this slide  |  clock 16:50 -&gt; 17:50 of 20:00 ]
-Two findings.
-First, false alarms. 54.9 percent of the hybrid's false alarms are flows labelled benign that go to or from the attacker's own machines, mostly during the reconnaissance capture. That strongly suggests label noise in DAPT2020 itself. On benign traffic that does not involve an attacker host, the false positive rate is only 3.07 percent.
-Second, missed attacks, on the right. High-volume activities such as scans and brute force are almost always caught. The misses concentrate in rare, low-volume steps, in red: CSRF, command injection, privilege escalation and SQL injection. These quiet steps are exactly the APT-like behaviour, and they remain the hard part.
-HAND-OFF POINT (next speaker): conclusions.</a:t>
+              <a:t>[ 1:00 on this slide  |  clock 15:55 -&gt; 16:55 of 20:00 ]
+Here the model predicts which APT stage each flow belongs to; rows are actual stages, columns predicted ones.
+Reconnaissance is recognised 97.6 percent of the time, establishing a foothold 98.3 percent, and lateral movement 91.6 percent. Data exfiltration is the weak point: 2 of 5 test flows.
+With only 5 exfiltration flows in the test set, one flow shifts macro F1 by several points, so we don't rank models on it. Without exfiltration, Random Forest, XGBoost and the soft vote are within half a point of each other.
+TRANSITION: Finally, where do the errors come from?</a:t>
             </a:r>
             <a:endParaRPr lang="en-US" dirty="0"/>
           </a:p>
@@ -1545,11 +1540,7 @@
             <a:r>
               <a:rPr lang="en-US" dirty="0"/>
               <a:t>[ 0:40 on this slide  |  clock 0:40 -&gt; 1:20 of 20:00 ]
-The talk has four parts.
-First, background: the paper, what makes an APT different from ordinary attacks, and why the paper's datasets are a problem.
-Second, data and method: the DAPT2020 dataset, the pipeline, the hybrid model, and a flaw we found in the paper's evaluation.
-Third, five results.
-Fourth, our conclusions and the plan for the final evaluation.
+Four parts. First, background: the paper, what makes an APT different, and why the paper's datasets are a problem. Second, data and method: the DAPT2020 dataset, the pipeline, the hybrid model, and a flaw in the paper's evaluation. Third, six results. Fourth, conclusions and the plan for the final evaluation.
 One question runs through all of it: does the paper's hybrid model really detect APTs?</a:t>
             </a:r>
             <a:endParaRPr lang="en-US" dirty="0"/>
@@ -1638,8 +1629,10 @@
           <a:p>
             <a:r>
               <a:rPr lang="en-US" dirty="0"/>
-              <a:t>[ 0:10 on this slide  |  clock 17:50 -&gt; 18:00 of 20:00 ]
-Part four: conclusions.</a:t>
+              <a:t>[ 1:00 on this slide  |  clock 16:55 -&gt; 17:55 of 20:00 ]
+False alarms first. 50.6 percent of them are flows labelled benign that involve the attacker's own hosts. That may be label noise, but it's not proof: those hosts also appear on Monday, when no attacks are labelled. And 42.2 percent of false alarms fall on Monday itself, so they are genuine false alarms on normal traffic.
+Missed attacks, on the right. Rare, low-volume steps such as CSRF, command injection, privilege escalation and SQL injection have the highest miss rates. But by count, most misses are Account Discovery: 57 of 127. That is a clear target for improvement.
+HAND-OFF POINT (next speaker): conclusions.</a:t>
             </a:r>
             <a:endParaRPr lang="en-US" dirty="0"/>
           </a:p>
@@ -1727,14 +1720,8 @@
           <a:p>
             <a:r>
               <a:rPr lang="en-US" dirty="0"/>
-              <a:t>[ 1:00 on this slide  |  clock 18:00 -&gt; 19:00 of 20:00 ]
-To summarise what we have shown.
-One: the paper's method works on real APT data, but not as claimed: AUC around 99 percent, but a false positive rate of about 6 percent rather than 0.52.
-Two: the paper's protocol inflates its results. Balancing before splitting raises F1 from 89.5 to 96.5 percent and makes missed attacks look three times rarer than they are.
-Three: the hybrid is tied with its own components; its OR rule trades false alarms for recall.
-Four: tree ensembles beat deep learning on these features.
-Five: APT stages can be identified, except exfiltration.
-Six: rare, quiet attack steps remain the hard part, and the dataset has some label noise.</a:t>
+              <a:t>[ 0:10 on this slide  |  clock 17:55 -&gt; 18:05 of 20:00 ]
+Part four: conclusions.</a:t>
             </a:r>
             <a:endParaRPr lang="en-US" dirty="0"/>
           </a:p>
@@ -1822,13 +1809,13 @@
           <a:p>
             <a:r>
               <a:rPr lang="en-US" dirty="0"/>
-              <a:t>[ 0:40 on this slide  |  clock 19:00 -&gt; 19:40 of 20:00 ]
-For the final evaluation we propose four steps.
-Validate on a second APT dataset, such as Unraveled or SCVIC-APT-2021.
-Evaluate over time: train on earlier days and test on later ones, which simulates an unseen campaign and removes the remaining optimism of a random split.
-Improve the hybrid, for example by tuning its weights and decision threshold, and handling rare stages better.
-Add explainability with SHAP, as the paper does.
-All code, results and figures are already in place and fully reproducible.</a:t>
+              <a:t>[ 0:55 on this slide  |  clock 18:05 -&gt; 19:00 of 20:00 ]
+To summarise. One: the method works on real APT data, but not as claimed: AUC about 99 percent, but a false positive rate of about 7 percent rather than 0.52.
+Two: balancing before splitting inflates the reported scores: about two thirds through the fifty-fifty test set and one third through leakage.
+Three: the published OR hybrid does not beat its parts; a soft vote is slightly better on average.
+Four: tree ensembles beat deep learning here.
+Five: APT stages can be identified, except exfiltration, which has too little data.
+Six: the weak spots are account discovery and rare, quiet attack steps.</a:t>
             </a:r>
             <a:endParaRPr lang="en-US" dirty="0"/>
           </a:p>
@@ -1916,8 +1903,9 @@
           <a:p>
             <a:r>
               <a:rPr lang="en-US" dirty="0"/>
-              <a:t>[ 0:10 on this slide  |  clock 19:40 -&gt; 19:50 of 20:00 ]
-Our main references are listed here: the paper, the DAPT2020 dataset paper, and the core methods: SMOTE, SMOTETomek, Random Forest and XGBoost.</a:t>
+              <a:t>[ 0:40 on this slide  |  clock 19:00 -&gt; 19:40 of 20:00 ]
+For the final evaluation we propose four steps: validate on a second APT dataset such as Unraveled or SCVIC-APT-2021; a time-based evaluation, training on earlier days and testing on later ones; improving the hybrid, for example with soft voting and a tuned decision threshold; and SHAP explanations, as in the paper.
+All code, results and figures are already in place and reproducible.</a:t>
             </a:r>
             <a:endParaRPr lang="en-US" dirty="0"/>
           </a:p>
@@ -2005,21 +1993,8 @@
           <a:p>
             <a:r>
               <a:rPr lang="en-US" dirty="0"/>
-              <a:t>[ 0:10 on this slide  |  clock 19:50 -&gt; 20:00 of 20:00 ]
-Thank you for listening. We are happy to take questions.
------ LIKELY QUESTIONS (Q&amp;A, not part of the 20 minutes) -----
-Q: Why didn't you also use the paper's datasets?
-A: They are general intrusion datasets with no APT campaign. DAPT2020 uses the same CICFlowMeter features as CIC-IDS2017/2018, so the comparison is direct. We can add CSE-CIC-IDS2018 as a control in the final evaluation.
-Q: Are you sure the paper balances before splitting?
-A: Yes. Section 3.2 says the dataset was balanced with SMOTETomek and then divided into training and testing. Its confusion matrix has 15,583 test rows: 30 percent of the balanced total. We changed only the order of those two steps.
-Q: Why is the false positive rate so much higher than in the paper?
-A: APT traffic is built to look normal. Also, about half of the false alarms involve the attacker's own hosts but are labelled benign, which points to label noise. Excluding those, FPR is about 3 percent.
-Q: How do you know the hybrid is an OR rule?
-A: We read the combo library's source: SimpleClassifierAggregator.predict() averages the base models' predicted labels and applies a 0.5 threshold with "&gt;=". With two models, one vote is enough.
-Q: Why DAPT2020 and not a newer dataset?
-A: It is the most widely used APT network benchmark and has the same features as the paper's main datasets. SCVIC-APT-2021 is paywalled, Unraveled is semi-synthetic, and CICAPT-IIoT targets industrial IoT. We plan to add a second dataset for the final evaluation.
-Q: Is 15 exfiltration flows enough?
-A: No, and we say so: exfiltration results rest on 5 test flows and should not be over-interpreted.</a:t>
+              <a:t>[ 0:10 on this slide  |  clock 19:40 -&gt; 19:50 of 20:00 ]
+Our main references are listed here: the paper, the DAPT2020 dataset paper, and the core methods.</a:t>
             </a:r>
             <a:endParaRPr lang="en-US" dirty="0"/>
           </a:p>
@@ -2043,6 +2018,110 @@
             <a:fld id="{F7021451-1387-4CA6-816F-3879F97B5CBC}" type="slidenum">
               <a:rPr lang="en-US"/>
               <a:t>24</a:t>
+            </a:fld>
+            <a:endParaRPr lang="en-US"/>
+          </a:p>
+        </p:txBody>
+      </p:sp>
+    </p:spTree>
+    <p:extLst>
+      <p:ext uri="{BB962C8B-B14F-4D97-AF65-F5344CB8AC3E}">
+        <p14:creationId xmlns:p14="http://schemas.microsoft.com/office/powerpoint/2010/main" val="1024086991"/>
+      </p:ext>
+    </p:extLst>
+  </p:cSld>
+  <p:clrMapOvr>
+    <a:masterClrMapping/>
+  </p:clrMapOvr>
+</p:notes>
+</file>
+
+<file path=ppt/notesSlides/notesSlide25.xml><?xml version="1.0" encoding="utf-8"?>
+<p:notes xmlns:a="http://schemas.openxmlformats.org/drawingml/2006/main" xmlns:r="http://schemas.openxmlformats.org/officeDocument/2006/relationships" xmlns:p="http://schemas.openxmlformats.org/presentationml/2006/main">
+  <p:cSld>
+    <p:spTree>
+      <p:nvGrpSpPr>
+        <p:cNvPr id="1" name=""/>
+        <p:cNvGrpSpPr/>
+        <p:nvPr/>
+      </p:nvGrpSpPr>
+      <p:grpSpPr>
+        <a:xfrm>
+          <a:off x="0" y="0"/>
+          <a:ext cx="0" cy="0"/>
+          <a:chOff x="0" y="0"/>
+          <a:chExt cx="0" cy="0"/>
+        </a:xfrm>
+      </p:grpSpPr>
+      <p:sp>
+        <p:nvSpPr>
+          <p:cNvPr id="2" name="Slide Image Placeholder 1"/>
+          <p:cNvSpPr>
+            <a:spLocks noGrp="1" noRot="1" noChangeAspect="1"/>
+          </p:cNvSpPr>
+          <p:nvPr>
+            <p:ph type="sldImg"/>
+          </p:nvPr>
+        </p:nvSpPr>
+        <p:spPr/>
+      </p:sp>
+      <p:sp>
+        <p:nvSpPr>
+          <p:cNvPr id="3" name="Notes Placeholder 2"/>
+          <p:cNvSpPr>
+            <a:spLocks noGrp="1"/>
+          </p:cNvSpPr>
+          <p:nvPr>
+            <p:ph type="body" idx="1"/>
+          </p:nvPr>
+        </p:nvSpPr>
+        <p:spPr/>
+        <p:txBody>
+          <a:bodyPr/>
+          <a:lstStyle/>
+          <a:p>
+            <a:r>
+              <a:rPr lang="en-US" dirty="0"/>
+              <a:t>[ 0:10 on this slide  |  clock 19:50 -&gt; 20:00 of 20:00 ]
+Thank you for listening. We are happy to take questions.
+----- LIKELY QUESTIONS (Q&amp;A, not part of the 20 minutes) -----
+Q: Isn't most of the drop just the class ratio, not leakage?
+A: Yes, and we show it: about 5.6 of the 8.2 F1 points come from the fifty-fifty test set and about 2.6 from synthetic-flow leakage. Both are caused by balancing before splitting.
+Q: Are you sure the paper balances before splitting?
+A: Yes. Section 3.2: "After converting it into balanced dataset, the CSE-CIC-IDS2018 dataset has been divided into two parts: training and testing." Its Figure 11 has 15,583 test rows, 30 percent of the balanced total.
+Q: Why is your false positive rate so much higher?
+A: APT traffic is built to look normal. 42 percent of false alarms are on attack-free Monday traffic, so they are real errors. 51 percent involve attacker hosts labelled benign, which may be label noise.
+Q: How do you know the hybrid is an OR rule?
+A: We read combo's source: SimpleClassifierAggregator.predict() averages the base models' labels and applies "&gt;= 0.5". We also ran the library itself and it matched our implementation on every test flow.
+Q: Did you find other problems in the paper?
+A: The CNN, ANN and MLP rows are identical in Table 7 (CSE-CIC-IDS2018) and Table 9 (NSL-KDD), and the CNN row is internally inconsistent: with recall 98.21 and TNR 99.51 on a balanced test set, precision should be about 99.5, not 98.25. Also, Table 7's XGBoost has a higher false positive rate than the hybrid, which is impossible under an OR rule if it is the same model.
+Q: Why DAPT2020 and not a newer dataset?
+A: It is the most widely used APT network benchmark and has the same features as the paper's main datasets. We plan to add a second dataset for the final evaluation.
+Q: Implementation choices?
+A: Max depth 4 is applied to XGBoost only; SMOTETomek removes Tomek links from both classes, its default; CSV parsing uses exact float round-trip so results reproduce across machines.</a:t>
+            </a:r>
+            <a:endParaRPr lang="en-US" dirty="0"/>
+          </a:p>
+        </p:txBody>
+      </p:sp>
+      <p:sp>
+        <p:nvSpPr>
+          <p:cNvPr id="4" name="Slide Number Placeholder 3"/>
+          <p:cNvSpPr>
+            <a:spLocks noGrp="1"/>
+          </p:cNvSpPr>
+          <p:nvPr>
+            <p:ph type="sldNum" sz="quarter" idx="10"/>
+          </p:nvPr>
+        </p:nvSpPr>
+        <p:spPr/>
+        <p:txBody>
+          <a:bodyPr/>
+          <a:lstStyle/>
+          <a:p>
+            <a:fld id="{F7021451-1387-4CA6-816F-3879F97B5CBC}" type="slidenum">
+              <a:rPr lang="en-US"/>
+              <a:t>25</a:t>
             </a:fld>
             <a:endParaRPr lang="en-US"/>
           </a:p>
@@ -2196,11 +2275,11 @@
           <a:p>
             <a:r>
               <a:rPr lang="en-US" dirty="0"/>
-              <a:t>[ 1:15 on this slide  |  clock 1:30 -&gt; 2:45 of 20:00 ]
-The paper proposes a hybrid ensemble of two tree-based models, Random Forest and XGBoost, combined with a Python library called combo.
-It compares this hybrid against thirteen other models, from K-nearest neighbours and SVMs to deep learning models such as CNN and MLP, on four public intrusion-detection datasets: CSE-CIC-IDS2018, CIC-IDS2017, NSL-KDD and UNSW-NB15.
+              <a:t>[ 1:10 on this slide  |  clock 1:30 -&gt; 2:40 of 20:00 ]
+The paper combines two tree-based models, Random Forest and XGBoost, using a Python library called combo.
+It compares this hybrid against thirteen other models, from K-nearest neighbours and SVMs to CNN and MLP, on four public intrusion-detection datasets: CSE-CIC-IDS2018, CIC-IDS2017, NSL-KDD and UNSW-NB15.
 The headline claim: 98.92 percent accuracy with a false positive rate of only 0.52 percent on CSE-CIC-IDS2018, and the hybrid beats every other model.
-Our task had three parts: implement the method completely, test it on a genuine APT dataset, and check whether the claims hold. Keep the false positive rate in mind: in a real security operations centre, false alarms are what analysts drown in.
+Our task: implement the method completely, test it on a genuine APT dataset, and check whether the claims hold. Keep the false positive rate in mind; in a security operations centre, false alarms are what analysts drown in.
 TRANSITION: To see why the dataset matters, we first need to be clear about what an APT is.</a:t>
             </a:r>
             <a:endParaRPr lang="en-US" dirty="0"/>
@@ -2289,14 +2368,10 @@
           <a:p>
             <a:r>
               <a:rPr lang="en-US" dirty="0"/>
-              <a:t>[ 1:05 on this slide  |  clock 2:45 -&gt; 3:50 of 20:00 ]
-An Advanced Persistent Threat is not a single attack; it is a campaign that moves through stages.
-Reconnaissance: the attacker scans and maps the target.
-Establishing a foothold: exploiting a weakness, for example SQL injection, and planting a backdoor.
-Lateral movement: spreading inside the internal network and escalating privileges.
-Data exfiltration: quietly sending the stolen data out.
-Three properties make APTs hard to detect: they are low and slow, spread over days or months; they deliberately blend in with normal traffic; and they are persistent, aiming for long-term access.
-So if we want to claim we detect APTs, the data we test on must contain this kind of multi-stage campaign.
+              <a:t>[ 1:00 on this slide  |  clock 2:40 -&gt; 3:40 of 20:00 ]
+An Advanced Persistent Threat is a campaign, not a single attack. It moves through stages: reconnaissance, where the attacker maps the target; establishing a foothold, for example through SQL injection and a backdoor; lateral movement inside the network; and finally data exfiltration.
+APTs are hard to detect because they are low and slow, they deliberately blend in with normal traffic, and they aim for long-term access.
+So to claim we detect APTs, the test data must contain this kind of multi-stage campaign.
 TRANSITION: That is exactly where the paper falls short.</a:t>
             </a:r>
             <a:endParaRPr lang="en-US" dirty="0"/>
@@ -2385,11 +2460,11 @@
           <a:p>
             <a:r>
               <a:rPr lang="en-US" dirty="0"/>
-              <a:t>[ 1:30 on this slide  |  clock 3:50 -&gt; 5:20 of 20:00 ]
+              <a:t>[ 1:20 on this slide  |  clock 3:40 -&gt; 5:00 of 20:00 ]
 This table compares the paper's datasets, on the left, with the one we used, on the right.
-None of the paper's datasets was built around an APT campaign, and none labels flows with an APT stage. Their attacks are generic: DoS, brute force, botnets, web attacks, probes and exploits, recorded as isolated events. NSL-KDD is even based on traffic from 1998.
-DAPT2020 was published in 2020 by researchers at Arizona State University specifically for APT research. A red team ran a full APT campaign over five days, and every network flow is labelled with its stage: reconnaissance, foothold, lateral movement or exfiltration.
-Importantly, DAPT2020 uses the same 76 CICFlowMeter features as CIC-IDS2017 and 2018, the paper's main datasets. So the paper's method runs on it without any change, and our results are directly comparable to the paper's.
+None of the paper's datasets was built around an APT campaign, and none labels flows with an APT stage. Their attacks are generic and isolated: DoS, brute force, botnets, probes, exploits. NSL-KDD is even based on traffic from 1998.
+DAPT2020 was published in 2020 by researchers at Arizona State University specifically for APT research. A red team ran a full campaign over five days, and every flow is labelled with its stage.
+Crucially, it uses the same 76 CICFlowMeter features as CIC-IDS2017 and 2018, the paper's main datasets, so the paper's method runs on it unchanged and our results are directly comparable.
 HAND-OFF POINT (next speaker): data and method.</a:t>
             </a:r>
             <a:endParaRPr lang="en-US" dirty="0"/>
@@ -2478,7 +2553,7 @@
           <a:p>
             <a:r>
               <a:rPr lang="en-US" dirty="0"/>
-              <a:t>[ 0:10 on this slide  |  clock 5:20 -&gt; 5:30 of 20:00 ]
+              <a:t>[ 0:10 on this slide  |  clock 5:00 -&gt; 5:10 of 20:00 ]
 Part two: the data and our method.</a:t>
             </a:r>
             <a:endParaRPr lang="en-US" dirty="0"/>
@@ -2567,10 +2642,10 @@
           <a:p>
             <a:r>
               <a:rPr lang="en-US" dirty="0"/>
-              <a:t>[ 1:00 on this slide  |  clock 5:30 -&gt; 6:30 of 20:00 ]
-DAPT2020 contains 86,691 labelled network flows, each described by 76 flow features, captured over five days from a public web server and a private network.
-The chart shows how many flows belong to each stage after cleaning. Note that the axis is logarithmic. Benign traffic dominates with over 62,000 flows. Reconnaissance has about 10,000, foothold about 6,000, lateral movement about 2,000, and data exfiltration, in red, has only 15 flows in the entire dataset.
-This extreme imbalance matters later: the most damaging stage of an APT is also the one with the least data.
+              <a:t>[ 0:55 on this slide  |  clock 5:10 -&gt; 6:05 of 20:00 ]
+DAPT2020 contains 86,691 labelled network flows with 76 features each, captured over five days from a public web server and a private network.
+The chart shows the flows per stage after cleaning, on a logarithmic axis. Benign traffic dominates with 62,463 flows; reconnaissance has 10,651, foothold 6,166, lateral movement 2,148, and data exfiltration, in red, only 15.
+So the most damaging stage of an APT is also the one with the least data.
 TRANSITION: Before using the data, we had to fix several problems in it.</a:t>
             </a:r>
             <a:endParaRPr lang="en-US" dirty="0"/>
@@ -2659,11 +2734,11 @@
           <a:p>
             <a:r>
               <a:rPr lang="en-US" dirty="0"/>
-              <a:t>[ 1:00 on this slide  |  clock 6:30 -&gt; 7:30 of 20:00 ]
+              <a:t>[ 1:00 on this slide  |  clock 6:05 -&gt; 7:05 of 20:00 ]
 We found four problems.
-The most serious: one of the ten CSV files has no header row. A standard loader silently treats its first flow as the header and misaligns the file, which loses 2,314 flows: 94 percent of all Lateral Movement.
-Second, benign traffic is labelled in three different ways, which we unified. Third, 5,257 duplicate flows and 12 constant columns, which we removed, as the paper prescribes. Fourth, only 15 exfiltration flows.
-As a sanity check: after our fixes the benign count is 63,712 flows, exactly the figure reported for DAPT2020, which confirms the data is loaded correctly.
+The most serious: one of the ten CSV files has no header row. A standard loader treats its first flow as the header, which loses 2,314 flows: 94 percent of all Lateral Movement.
+Second, benign traffic is labelled in three different ways, which we unified. Third, 5,248 duplicate flows and 12 constant columns, removed as the paper prescribes. Fourth, only 15 exfiltration flows.
+Sanity check: after the fix we count 63,712 benign flows, which matches the figure other researchers report for DAPT2020.
 TRANSITION: With clean data, we implemented the paper's pipeline.</a:t>
             </a:r>
             <a:endParaRPr lang="en-US" dirty="0"/>
@@ -10143,7 +10218,7 @@
                 <a:ea typeface="Arial" pitchFamily="34" charset="-122"/>
                 <a:cs typeface="Arial" pitchFamily="34" charset="-120"/>
               </a:rPr>
-              <a:t>Real traffic here is 77% benign; a balanced test set hides how many false alarms a model raises.</a:t>
+              <a:t>Real traffic here is 77% benign; a balanced test set makes false alarms look rarer than they are.</a:t>
             </a:r>
             <a:endParaRPr lang="en-US" sz="1250" dirty="0"/>
           </a:p>
@@ -13668,7 +13743,7 @@
                 <a:ea typeface="Arial" pitchFamily="34" charset="-122"/>
                 <a:cs typeface="Arial" pitchFamily="34" charset="-120"/>
               </a:rPr>
-              <a:t>Five results on real APT traffic: 15 models, three experiments and five random seeds</a:t>
+              <a:t>Six results on real APT traffic: 15 models, three experiments and five random seeds</a:t>
             </a:r>
             <a:endParaRPr lang="en-US" sz="1600" dirty="0"/>
           </a:p>
@@ -14166,7 +14241,7 @@
                 <a:ea typeface="Georgia" pitchFamily="34" charset="-122"/>
                 <a:cs typeface="Georgia" pitchFamily="34" charset="-120"/>
               </a:rPr>
-              <a:t>On real APT traffic, false alarms rise twelvefold</a:t>
+              <a:t>On real APT traffic, false alarms rise about 13×</a:t>
             </a:r>
             <a:endParaRPr lang="en-US" sz="3000" dirty="0"/>
           </a:p>
@@ -14672,7 +14747,7 @@
                 <a:ea typeface="Georgia" pitchFamily="34" charset="-122"/>
                 <a:cs typeface="Georgia" pitchFamily="34" charset="-120"/>
               </a:rPr>
-              <a:t>96.43%</a:t>
+              <a:t>96.99%</a:t>
             </a:r>
             <a:endParaRPr lang="en-US" sz="5000" dirty="0"/>
           </a:p>
@@ -14812,7 +14887,7 @@
                 <a:ea typeface="Arial" pitchFamily="34" charset="-122"/>
                 <a:cs typeface="Arial" pitchFamily="34" charset="-120"/>
               </a:rPr>
-              <a:t>96.49%</a:t>
+              <a:t>97.06%</a:t>
             </a:r>
             <a:endParaRPr lang="en-US" sz="1600" dirty="0"/>
           </a:p>
@@ -14890,7 +14965,7 @@
                 <a:ea typeface="Arial" pitchFamily="34" charset="-122"/>
                 <a:cs typeface="Arial" pitchFamily="34" charset="-120"/>
               </a:rPr>
-              <a:t>6.14%</a:t>
+              <a:t>5.44%</a:t>
             </a:r>
             <a:endParaRPr lang="en-US" sz="1600" dirty="0"/>
           </a:p>
@@ -15034,7 +15109,7 @@
                 <a:ea typeface="Georgia" pitchFamily="34" charset="-122"/>
                 <a:cs typeface="Georgia" pitchFamily="34" charset="-120"/>
               </a:rPr>
-              <a:t>94.68%</a:t>
+              <a:t>94.28%</a:t>
             </a:r>
             <a:endParaRPr lang="en-US" sz="5000" dirty="0"/>
           </a:p>
@@ -15174,7 +15249,7 @@
                 <a:ea typeface="Arial" pitchFamily="34" charset="-122"/>
                 <a:cs typeface="Arial" pitchFamily="34" charset="-120"/>
               </a:rPr>
-              <a:t>89.46%</a:t>
+              <a:t>88.85%</a:t>
             </a:r>
             <a:endParaRPr lang="en-US" sz="1600" dirty="0"/>
           </a:p>
@@ -15252,7 +15327,7 @@
                 <a:ea typeface="Arial" pitchFamily="34" charset="-122"/>
                 <a:cs typeface="Arial" pitchFamily="34" charset="-120"/>
               </a:rPr>
-              <a:t>5.99%</a:t>
+              <a:t>6.78%</a:t>
             </a:r>
             <a:endParaRPr lang="en-US" sz="1600" dirty="0"/>
           </a:p>
@@ -15305,7 +15380,7 @@
                 <a:ea typeface="Arial" pitchFamily="34" charset="-122"/>
                 <a:cs typeface="Arial" pitchFamily="34" charset="-120"/>
               </a:rPr>
-              <a:t>the hybrid still ranks APT flows very well (AUC 99.09%), but raises about 12× more false alarms than claimed, and F1 falls by 7 points once the leak is removed.</a:t>
+              <a:t>the hybrid still ranks APT flows very well (AUC 99.08%), but raises about 13× more false alarms than claimed, and on a realistic test set its F1 is 8.2 points lower.</a:t>
             </a:r>
             <a:endParaRPr lang="en-US" sz="1400" dirty="0"/>
           </a:p>
@@ -15881,95 +15956,49 @@
                 <a:ea typeface="Georgia" pitchFamily="34" charset="-122"/>
                 <a:cs typeface="Georgia" pitchFamily="34" charset="-120"/>
               </a:rPr>
-              <a:t>Every model loses 7–20 F1 points on real test data</a:t>
+              <a:t>Most of the inflation comes from the 50/50 test set</a:t>
             </a:r>
             <a:endParaRPr lang="en-US" sz="3000" dirty="0"/>
           </a:p>
         </p:txBody>
       </p:sp>
-      <p:pic>
-        <p:nvPicPr>
-          <p:cNvPr id="20" name="Image 0" descr="/private/tmp/claude-501/-Users-ashishjain-Documents-RIS-Mid-Eval/4e14a31e-25f5-4016-81db-47057b986f0d/scratchpad/deck/charts/f1_protocols.png">    </p:cNvPr>
-          <p:cNvPicPr>
-            <a:picLocks noChangeAspect="1"/>
-          </p:cNvPicPr>
-          <p:nvPr/>
-        </p:nvPicPr>
-        <p:blipFill>
-          <a:blip r:embed="rId1"/>
-          <a:stretch>
-            <a:fillRect/>
-          </a:stretch>
-        </p:blipFill>
-        <p:spPr>
-          <a:xfrm>
-            <a:off x="685800" y="1691640"/>
-            <a:ext cx="7498080" cy="4526280"/>
-          </a:xfrm>
-          <a:prstGeom prst="rect">
-            <a:avLst/>
-          </a:prstGeom>
-        </p:spPr>
-      </p:pic>
-      <p:sp>
-        <p:nvSpPr>
-          <p:cNvPr id="21" name="Shape 18"/>
-          <p:cNvSpPr/>
-          <p:nvPr/>
-        </p:nvSpPr>
-        <p:spPr>
-          <a:xfrm>
-            <a:off x="8549640" y="1965960"/>
-            <a:ext cx="457200" cy="457200"/>
-          </a:xfrm>
-          <a:prstGeom prst="ellipse">
-            <a:avLst/>
-          </a:prstGeom>
-          <a:solidFill>
-            <a:srgbClr val="2A78D6"/>
-          </a:solidFill>
-          <a:ln w="12700">
-            <a:solidFill>
-              <a:srgbClr val="2A78D6"/>
-            </a:solidFill>
-            <a:prstDash val="solid"/>
-          </a:ln>
-        </p:spPr>
-      </p:sp>
-      <p:pic>
-        <p:nvPicPr>
-          <p:cNvPr id="22" name="Image 1" descr="preencoded.png">    </p:cNvPr>
-          <p:cNvPicPr>
-            <a:picLocks noChangeAspect="1"/>
-          </p:cNvPicPr>
-          <p:nvPr/>
-        </p:nvPicPr>
-        <p:blipFill>
-          <a:blip r:embed="rId2"/>
-          <a:stretch>
-            <a:fillRect/>
-          </a:stretch>
-        </p:blipFill>
-        <p:spPr>
-          <a:xfrm>
-            <a:off x="8673084" y="2089404"/>
-            <a:ext cx="210312" cy="210312"/>
-          </a:xfrm>
-          <a:prstGeom prst="rect">
-            <a:avLst/>
-          </a:prstGeom>
-        </p:spPr>
-      </p:pic>
-      <p:sp>
-        <p:nvSpPr>
-          <p:cNvPr id="23" name="Text 19"/>
+      <p:sp>
+        <p:nvSpPr>
+          <p:cNvPr id="20" name="Shape 18"/>
+          <p:cNvSpPr/>
+          <p:nvPr/>
+        </p:nvSpPr>
+        <p:spPr>
+          <a:xfrm>
+            <a:off x="685800" y="1828800"/>
+            <a:ext cx="2926080" cy="2286000"/>
+          </a:xfrm>
+          <a:prstGeom prst="roundRect">
+            <a:avLst>
+              <a:gd name="adj" fmla="val 2400"/>
+            </a:avLst>
+          </a:prstGeom>
+          <a:solidFill>
+            <a:srgbClr val="F4F6F9"/>
+          </a:solidFill>
+          <a:ln w="12700">
+            <a:solidFill>
+              <a:srgbClr val="F4F6F9"/>
+            </a:solidFill>
+            <a:prstDash val="solid"/>
+          </a:ln>
+        </p:spPr>
+      </p:sp>
+      <p:sp>
+        <p:nvSpPr>
+          <p:cNvPr id="21" name="Text 19"/>
           <p:cNvSpPr txBox="1"/>
           <p:nvPr/>
         </p:nvSpPr>
         <p:spPr>
           <a:xfrm>
-            <a:off x="9171432" y="2011680"/>
-            <a:ext cx="2334463" cy="365760"/>
+            <a:off x="960120" y="2029968"/>
+            <a:ext cx="2377440" cy="256032"/>
           </a:xfrm>
           <a:prstGeom prst="rect">
             <a:avLst/>
@@ -15985,30 +16014,108 @@
               <a:buNone/>
             </a:pPr>
             <a:r>
-              <a:rPr lang="en-US" sz="1400" b="1" dirty="0">
+              <a:rPr lang="en-US" sz="950" b="1" dirty="0">
                 <a:solidFill>
-                  <a:srgbClr val="0F1B2D"/>
+                  <a:srgbClr val="8A94A3"/>
                 </a:solidFill>
                 <a:latin typeface="Arial" pitchFamily="34" charset="0"/>
                 <a:ea typeface="Arial" pitchFamily="34" charset="-122"/>
                 <a:cs typeface="Arial" pitchFamily="34" charset="-120"/>
               </a:rPr>
-              <a:t>Tree ensembles lead</a:t>
+              <a:t>AS THE PAPER WOULD REPORT IT</a:t>
             </a:r>
-            <a:endParaRPr lang="en-US" sz="1400" dirty="0"/>
+            <a:endParaRPr lang="en-US" sz="950" dirty="0"/>
           </a:p>
         </p:txBody>
       </p:sp>
       <p:sp>
         <p:nvSpPr>
-          <p:cNvPr id="24" name="Text 20"/>
+          <p:cNvPr id="22" name="Text 20"/>
           <p:cNvSpPr txBox="1"/>
           <p:nvPr/>
         </p:nvSpPr>
         <p:spPr>
           <a:xfrm>
-            <a:off x="8549640" y="2532888"/>
-            <a:ext cx="2956255" cy="594360"/>
+            <a:off x="960120" y="2286000"/>
+            <a:ext cx="2377440" cy="274320"/>
+          </a:xfrm>
+          <a:prstGeom prst="rect">
+            <a:avLst/>
+          </a:prstGeom>
+          <a:noFill/>
+          <a:ln/>
+        </p:spPr>
+        <p:txBody>
+          <a:bodyPr wrap="square" lIns="0" tIns="0" rIns="0" bIns="0" rtlCol="0" anchor="t"/>
+          <a:lstStyle/>
+          <a:p>
+            <a:pPr indent="0" marL="0">
+              <a:buNone/>
+            </a:pPr>
+            <a:r>
+              <a:rPr lang="en-US" sz="1150" dirty="0">
+                <a:solidFill>
+                  <a:srgbClr val="55606E"/>
+                </a:solidFill>
+                <a:latin typeface="Arial" pitchFamily="34" charset="0"/>
+                <a:ea typeface="Arial" pitchFamily="34" charset="-122"/>
+                <a:cs typeface="Arial" pitchFamily="34" charset="-120"/>
+              </a:rPr>
+              <a:t>Balanced test set with synthetic flows</a:t>
+            </a:r>
+            <a:endParaRPr lang="en-US" sz="1150" dirty="0"/>
+          </a:p>
+        </p:txBody>
+      </p:sp>
+      <p:sp>
+        <p:nvSpPr>
+          <p:cNvPr id="23" name="Text 21"/>
+          <p:cNvSpPr txBox="1"/>
+          <p:nvPr/>
+        </p:nvSpPr>
+        <p:spPr>
+          <a:xfrm>
+            <a:off x="960120" y="2651760"/>
+            <a:ext cx="2377440" cy="777240"/>
+          </a:xfrm>
+          <a:prstGeom prst="rect">
+            <a:avLst/>
+          </a:prstGeom>
+          <a:noFill/>
+          <a:ln/>
+        </p:spPr>
+        <p:txBody>
+          <a:bodyPr wrap="square" lIns="0" tIns="0" rIns="0" bIns="0" rtlCol="0" anchor="t"/>
+          <a:lstStyle/>
+          <a:p>
+            <a:pPr indent="0" marL="0">
+              <a:buNone/>
+            </a:pPr>
+            <a:r>
+              <a:rPr lang="en-US" sz="4200" dirty="0">
+                <a:solidFill>
+                  <a:srgbClr val="0F1B2D"/>
+                </a:solidFill>
+                <a:latin typeface="Georgia" pitchFamily="34" charset="0"/>
+                <a:ea typeface="Georgia" pitchFamily="34" charset="-122"/>
+                <a:cs typeface="Georgia" pitchFamily="34" charset="-120"/>
+              </a:rPr>
+              <a:t>97.06%</a:t>
+            </a:r>
+            <a:endParaRPr lang="en-US" sz="4200" dirty="0"/>
+          </a:p>
+        </p:txBody>
+      </p:sp>
+      <p:sp>
+        <p:nvSpPr>
+          <p:cNvPr id="24" name="Text 22"/>
+          <p:cNvSpPr txBox="1"/>
+          <p:nvPr/>
+        </p:nvSpPr>
+        <p:spPr>
+          <a:xfrm>
+            <a:off x="960120" y="3474720"/>
+            <a:ext cx="2377440" cy="274320"/>
           </a:xfrm>
           <a:prstGeom prst="rect">
             <a:avLst/>
@@ -16032,7 +16139,7 @@
                 <a:ea typeface="Arial" pitchFamily="34" charset="-122"/>
                 <a:cs typeface="Arial" pitchFamily="34" charset="-120"/>
               </a:rPr>
-              <a:t>Hybrid, Random Forest and XGBoost all reach ≈ 89.5% F1</a:t>
+              <a:t>F1   ·   precision 94.8%</a:t>
             </a:r>
             <a:endParaRPr lang="en-US" sz="1200" dirty="0"/>
           </a:p>
@@ -16040,86 +16147,41 @@
       </p:sp>
       <p:sp>
         <p:nvSpPr>
-          <p:cNvPr id="25" name="Shape 21"/>
-          <p:cNvSpPr/>
-          <p:nvPr/>
-        </p:nvSpPr>
-        <p:spPr>
-          <a:xfrm>
-            <a:off x="8549640" y="3063240"/>
-            <a:ext cx="2956255" cy="914"/>
-          </a:xfrm>
-          <a:prstGeom prst="line">
-            <a:avLst/>
-          </a:prstGeom>
-          <a:noFill/>
-          <a:ln w="9525">
-            <a:solidFill>
-              <a:srgbClr val="E2E6EC"/>
-            </a:solidFill>
-            <a:prstDash val="solid"/>
-          </a:ln>
-        </p:spPr>
-      </p:sp>
-      <p:sp>
-        <p:nvSpPr>
-          <p:cNvPr id="26" name="Shape 22"/>
-          <p:cNvSpPr/>
-          <p:nvPr/>
-        </p:nvSpPr>
-        <p:spPr>
-          <a:xfrm>
-            <a:off x="8549640" y="3337560"/>
-            <a:ext cx="457200" cy="457200"/>
-          </a:xfrm>
-          <a:prstGeom prst="ellipse">
-            <a:avLst/>
-          </a:prstGeom>
-          <a:solidFill>
-            <a:srgbClr val="2A78D6"/>
-          </a:solidFill>
-          <a:ln w="12700">
-            <a:solidFill>
-              <a:srgbClr val="2A78D6"/>
-            </a:solidFill>
-            <a:prstDash val="solid"/>
-          </a:ln>
-        </p:spPr>
-      </p:sp>
-      <p:pic>
-        <p:nvPicPr>
-          <p:cNvPr id="27" name="Image 2" descr="preencoded.png">    </p:cNvPr>
-          <p:cNvPicPr>
-            <a:picLocks noChangeAspect="1"/>
-          </p:cNvPicPr>
-          <p:nvPr/>
-        </p:nvPicPr>
-        <p:blipFill>
-          <a:blip r:embed="rId3"/>
-          <a:stretch>
-            <a:fillRect/>
-          </a:stretch>
-        </p:blipFill>
-        <p:spPr>
-          <a:xfrm>
-            <a:off x="8673084" y="3461004"/>
-            <a:ext cx="210312" cy="210312"/>
-          </a:xfrm>
-          <a:prstGeom prst="rect">
-            <a:avLst/>
-          </a:prstGeom>
-        </p:spPr>
-      </p:pic>
-      <p:sp>
-        <p:nvSpPr>
-          <p:cNvPr id="28" name="Text 23"/>
+          <p:cNvPr id="25" name="Shape 23"/>
+          <p:cNvSpPr/>
+          <p:nvPr/>
+        </p:nvSpPr>
+        <p:spPr>
+          <a:xfrm>
+            <a:off x="4632808" y="1828800"/>
+            <a:ext cx="2926080" cy="2286000"/>
+          </a:xfrm>
+          <a:prstGeom prst="roundRect">
+            <a:avLst>
+              <a:gd name="adj" fmla="val 2400"/>
+            </a:avLst>
+          </a:prstGeom>
+          <a:solidFill>
+            <a:srgbClr val="F4F6F9"/>
+          </a:solidFill>
+          <a:ln w="12700">
+            <a:solidFill>
+              <a:srgbClr val="F4F6F9"/>
+            </a:solidFill>
+            <a:prstDash val="solid"/>
+          </a:ln>
+        </p:spPr>
+      </p:sp>
+      <p:sp>
+        <p:nvSpPr>
+          <p:cNvPr id="26" name="Text 24"/>
           <p:cNvSpPr txBox="1"/>
           <p:nvPr/>
         </p:nvSpPr>
         <p:spPr>
           <a:xfrm>
-            <a:off x="9171432" y="3383280"/>
-            <a:ext cx="2334463" cy="365760"/>
+            <a:off x="4907128" y="2029968"/>
+            <a:ext cx="2377440" cy="256032"/>
           </a:xfrm>
           <a:prstGeom prst="rect">
             <a:avLst/>
@@ -16135,30 +16197,108 @@
               <a:buNone/>
             </a:pPr>
             <a:r>
-              <a:rPr lang="en-US" sz="1400" b="1" dirty="0">
+              <a:rPr lang="en-US" sz="950" b="1" dirty="0">
                 <a:solidFill>
-                  <a:srgbClr val="0F1B2D"/>
+                  <a:srgbClr val="8A94A3"/>
                 </a:solidFill>
                 <a:latin typeface="Arial" pitchFamily="34" charset="0"/>
                 <a:ea typeface="Arial" pitchFamily="34" charset="-122"/>
                 <a:cs typeface="Arial" pitchFamily="34" charset="-120"/>
               </a:rPr>
-              <a:t>Deep learning doesn't help</a:t>
+              <a:t>SAME PREDICTIONS, REAL CLASS RATIO</a:t>
             </a:r>
-            <a:endParaRPr lang="en-US" sz="1400" dirty="0"/>
+            <a:endParaRPr lang="en-US" sz="950" dirty="0"/>
           </a:p>
         </p:txBody>
       </p:sp>
       <p:sp>
         <p:nvSpPr>
-          <p:cNvPr id="29" name="Text 24"/>
+          <p:cNvPr id="27" name="Text 25"/>
           <p:cNvSpPr txBox="1"/>
           <p:nvPr/>
         </p:nvSpPr>
         <p:spPr>
           <a:xfrm>
-            <a:off x="8549640" y="3904488"/>
-            <a:ext cx="2956255" cy="594360"/>
+            <a:off x="4907128" y="2286000"/>
+            <a:ext cx="2377440" cy="274320"/>
+          </a:xfrm>
+          <a:prstGeom prst="rect">
+            <a:avLst/>
+          </a:prstGeom>
+          <a:noFill/>
+          <a:ln/>
+        </p:spPr>
+        <p:txBody>
+          <a:bodyPr wrap="square" lIns="0" tIns="0" rIns="0" bIns="0" rtlCol="0" anchor="t"/>
+          <a:lstStyle/>
+          <a:p>
+            <a:pPr indent="0" marL="0">
+              <a:buNone/>
+            </a:pPr>
+            <a:r>
+              <a:rPr lang="en-US" sz="1150" dirty="0">
+                <a:solidFill>
+                  <a:srgbClr val="55606E"/>
+                </a:solidFill>
+                <a:latin typeface="Arial" pitchFamily="34" charset="0"/>
+                <a:ea typeface="Arial" pitchFamily="34" charset="-122"/>
+                <a:cs typeface="Arial" pitchFamily="34" charset="-120"/>
+              </a:rPr>
+              <a:t>Re-scored at 23% APT / 77% benign</a:t>
+            </a:r>
+            <a:endParaRPr lang="en-US" sz="1150" dirty="0"/>
+          </a:p>
+        </p:txBody>
+      </p:sp>
+      <p:sp>
+        <p:nvSpPr>
+          <p:cNvPr id="28" name="Text 26"/>
+          <p:cNvSpPr txBox="1"/>
+          <p:nvPr/>
+        </p:nvSpPr>
+        <p:spPr>
+          <a:xfrm>
+            <a:off x="4907128" y="2651760"/>
+            <a:ext cx="2377440" cy="777240"/>
+          </a:xfrm>
+          <a:prstGeom prst="rect">
+            <a:avLst/>
+          </a:prstGeom>
+          <a:noFill/>
+          <a:ln/>
+        </p:spPr>
+        <p:txBody>
+          <a:bodyPr wrap="square" lIns="0" tIns="0" rIns="0" bIns="0" rtlCol="0" anchor="t"/>
+          <a:lstStyle/>
+          <a:p>
+            <a:pPr indent="0" marL="0">
+              <a:buNone/>
+            </a:pPr>
+            <a:r>
+              <a:rPr lang="en-US" sz="4200" dirty="0">
+                <a:solidFill>
+                  <a:srgbClr val="0F1B2D"/>
+                </a:solidFill>
+                <a:latin typeface="Georgia" pitchFamily="34" charset="0"/>
+                <a:ea typeface="Georgia" pitchFamily="34" charset="-122"/>
+                <a:cs typeface="Georgia" pitchFamily="34" charset="-120"/>
+              </a:rPr>
+              <a:t>91.49%</a:t>
+            </a:r>
+            <a:endParaRPr lang="en-US" sz="4200" dirty="0"/>
+          </a:p>
+        </p:txBody>
+      </p:sp>
+      <p:sp>
+        <p:nvSpPr>
+          <p:cNvPr id="29" name="Text 27"/>
+          <p:cNvSpPr txBox="1"/>
+          <p:nvPr/>
+        </p:nvSpPr>
+        <p:spPr>
+          <a:xfrm>
+            <a:off x="4907128" y="3474720"/>
+            <a:ext cx="2377440" cy="274320"/>
           </a:xfrm>
           <a:prstGeom prst="rect">
             <a:avLst/>
@@ -16182,7 +16322,7 @@
                 <a:ea typeface="Arial" pitchFamily="34" charset="-122"/>
                 <a:cs typeface="Arial" pitchFamily="34" charset="-120"/>
               </a:rPr>
-              <a:t>CNN 88.2%, MLP 88.2%, consistent with the paper's own Table 7</a:t>
+              <a:t>F1   ·   precision 84.7%</a:t>
             </a:r>
             <a:endParaRPr lang="en-US" sz="1200" dirty="0"/>
           </a:p>
@@ -16190,86 +16330,41 @@
       </p:sp>
       <p:sp>
         <p:nvSpPr>
-          <p:cNvPr id="30" name="Shape 25"/>
-          <p:cNvSpPr/>
-          <p:nvPr/>
-        </p:nvSpPr>
-        <p:spPr>
-          <a:xfrm>
-            <a:off x="8549640" y="4434840"/>
-            <a:ext cx="2956255" cy="914"/>
-          </a:xfrm>
-          <a:prstGeom prst="line">
-            <a:avLst/>
-          </a:prstGeom>
-          <a:noFill/>
-          <a:ln w="9525">
-            <a:solidFill>
-              <a:srgbClr val="E2E6EC"/>
-            </a:solidFill>
-            <a:prstDash val="solid"/>
-          </a:ln>
-        </p:spPr>
-      </p:sp>
-      <p:sp>
-        <p:nvSpPr>
-          <p:cNvPr id="31" name="Shape 26"/>
-          <p:cNvSpPr/>
-          <p:nvPr/>
-        </p:nvSpPr>
-        <p:spPr>
-          <a:xfrm>
-            <a:off x="8549640" y="4709160"/>
-            <a:ext cx="457200" cy="457200"/>
-          </a:xfrm>
-          <a:prstGeom prst="ellipse">
-            <a:avLst/>
-          </a:prstGeom>
-          <a:solidFill>
-            <a:srgbClr val="E0533A"/>
-          </a:solidFill>
-          <a:ln w="12700">
-            <a:solidFill>
-              <a:srgbClr val="E0533A"/>
-            </a:solidFill>
-            <a:prstDash val="solid"/>
-          </a:ln>
-        </p:spPr>
-      </p:sp>
-      <p:pic>
-        <p:nvPicPr>
-          <p:cNvPr id="32" name="Image 3" descr="preencoded.png">    </p:cNvPr>
-          <p:cNvPicPr>
-            <a:picLocks noChangeAspect="1"/>
-          </p:cNvPicPr>
-          <p:nvPr/>
-        </p:nvPicPr>
-        <p:blipFill>
-          <a:blip r:embed="rId4"/>
-          <a:stretch>
-            <a:fillRect/>
-          </a:stretch>
-        </p:blipFill>
-        <p:spPr>
-          <a:xfrm>
-            <a:off x="8673084" y="4832604"/>
-            <a:ext cx="210312" cy="210312"/>
-          </a:xfrm>
-          <a:prstGeom prst="rect">
-            <a:avLst/>
-          </a:prstGeom>
-        </p:spPr>
-      </p:pic>
-      <p:sp>
-        <p:nvSpPr>
-          <p:cNvPr id="33" name="Text 27"/>
+          <p:cNvPr id="30" name="Shape 28"/>
+          <p:cNvSpPr/>
+          <p:nvPr/>
+        </p:nvSpPr>
+        <p:spPr>
+          <a:xfrm>
+            <a:off x="8579815" y="1828800"/>
+            <a:ext cx="2926080" cy="2286000"/>
+          </a:xfrm>
+          <a:prstGeom prst="roundRect">
+            <a:avLst>
+              <a:gd name="adj" fmla="val 2400"/>
+            </a:avLst>
+          </a:prstGeom>
+          <a:solidFill>
+            <a:srgbClr val="0B1526"/>
+          </a:solidFill>
+          <a:ln w="12700">
+            <a:solidFill>
+              <a:srgbClr val="0B1526"/>
+            </a:solidFill>
+            <a:prstDash val="solid"/>
+          </a:ln>
+        </p:spPr>
+      </p:sp>
+      <p:sp>
+        <p:nvSpPr>
+          <p:cNvPr id="31" name="Text 29"/>
           <p:cNvSpPr txBox="1"/>
           <p:nvPr/>
         </p:nvSpPr>
         <p:spPr>
           <a:xfrm>
-            <a:off x="9171432" y="4754880"/>
-            <a:ext cx="2334463" cy="365760"/>
+            <a:off x="8854135" y="2029968"/>
+            <a:ext cx="2377440" cy="256032"/>
           </a:xfrm>
           <a:prstGeom prst="rect">
             <a:avLst/>
@@ -16285,7 +16380,443 @@
               <a:buNone/>
             </a:pPr>
             <a:r>
+              <a:rPr lang="en-US" sz="950" b="1" dirty="0">
+                <a:solidFill>
+                  <a:srgbClr val="F08A6E"/>
+                </a:solidFill>
+                <a:latin typeface="Arial" pitchFamily="34" charset="0"/>
+                <a:ea typeface="Arial" pitchFamily="34" charset="-122"/>
+                <a:cs typeface="Arial" pitchFamily="34" charset="-120"/>
+              </a:rPr>
+              <a:t>LEAKAGE-FREE</a:t>
+            </a:r>
+            <a:endParaRPr lang="en-US" sz="950" dirty="0"/>
+          </a:p>
+        </p:txBody>
+      </p:sp>
+      <p:sp>
+        <p:nvSpPr>
+          <p:cNvPr id="32" name="Text 30"/>
+          <p:cNvSpPr txBox="1"/>
+          <p:nvPr/>
+        </p:nvSpPr>
+        <p:spPr>
+          <a:xfrm>
+            <a:off x="8854135" y="2286000"/>
+            <a:ext cx="2377440" cy="274320"/>
+          </a:xfrm>
+          <a:prstGeom prst="rect">
+            <a:avLst/>
+          </a:prstGeom>
+          <a:noFill/>
+          <a:ln/>
+        </p:spPr>
+        <p:txBody>
+          <a:bodyPr wrap="square" lIns="0" tIns="0" rIns="0" bIns="0" rtlCol="0" anchor="t"/>
+          <a:lstStyle/>
+          <a:p>
+            <a:pPr indent="0" marL="0">
+              <a:buNone/>
+            </a:pPr>
+            <a:r>
+              <a:rPr lang="en-US" sz="1150" dirty="0">
+                <a:solidFill>
+                  <a:srgbClr val="A9B6C8"/>
+                </a:solidFill>
+                <a:latin typeface="Arial" pitchFamily="34" charset="0"/>
+                <a:ea typeface="Arial" pitchFamily="34" charset="-122"/>
+                <a:cs typeface="Arial" pitchFamily="34" charset="-120"/>
+              </a:rPr>
+              <a:t>Real flows only, real class ratio</a:t>
+            </a:r>
+            <a:endParaRPr lang="en-US" sz="1150" dirty="0"/>
+          </a:p>
+        </p:txBody>
+      </p:sp>
+      <p:sp>
+        <p:nvSpPr>
+          <p:cNvPr id="33" name="Text 31"/>
+          <p:cNvSpPr txBox="1"/>
+          <p:nvPr/>
+        </p:nvSpPr>
+        <p:spPr>
+          <a:xfrm>
+            <a:off x="8854135" y="2651760"/>
+            <a:ext cx="2377440" cy="777240"/>
+          </a:xfrm>
+          <a:prstGeom prst="rect">
+            <a:avLst/>
+          </a:prstGeom>
+          <a:noFill/>
+          <a:ln/>
+        </p:spPr>
+        <p:txBody>
+          <a:bodyPr wrap="square" lIns="0" tIns="0" rIns="0" bIns="0" rtlCol="0" anchor="t"/>
+          <a:lstStyle/>
+          <a:p>
+            <a:pPr indent="0" marL="0">
+              <a:buNone/>
+            </a:pPr>
+            <a:r>
+              <a:rPr lang="en-US" sz="4200" dirty="0">
+                <a:solidFill>
+                  <a:srgbClr val="FFFFFF"/>
+                </a:solidFill>
+                <a:latin typeface="Georgia" pitchFamily="34" charset="0"/>
+                <a:ea typeface="Georgia" pitchFamily="34" charset="-122"/>
+                <a:cs typeface="Georgia" pitchFamily="34" charset="-120"/>
+              </a:rPr>
+              <a:t>88.85%</a:t>
+            </a:r>
+            <a:endParaRPr lang="en-US" sz="4200" dirty="0"/>
+          </a:p>
+        </p:txBody>
+      </p:sp>
+      <p:sp>
+        <p:nvSpPr>
+          <p:cNvPr id="34" name="Text 32"/>
+          <p:cNvSpPr txBox="1"/>
+          <p:nvPr/>
+        </p:nvSpPr>
+        <p:spPr>
+          <a:xfrm>
+            <a:off x="8854135" y="3474720"/>
+            <a:ext cx="2377440" cy="274320"/>
+          </a:xfrm>
+          <a:prstGeom prst="rect">
+            <a:avLst/>
+          </a:prstGeom>
+          <a:noFill/>
+          <a:ln/>
+        </p:spPr>
+        <p:txBody>
+          <a:bodyPr wrap="square" lIns="0" tIns="0" rIns="0" bIns="0" rtlCol="0" anchor="t"/>
+          <a:lstStyle/>
+          <a:p>
+            <a:pPr indent="0" marL="0">
+              <a:buNone/>
+            </a:pPr>
+            <a:r>
+              <a:rPr lang="en-US" sz="1200" dirty="0">
+                <a:solidFill>
+                  <a:srgbClr val="A9B6C8"/>
+                </a:solidFill>
+                <a:latin typeface="Arial" pitchFamily="34" charset="0"/>
+                <a:ea typeface="Arial" pitchFamily="34" charset="-122"/>
+                <a:cs typeface="Arial" pitchFamily="34" charset="-120"/>
+              </a:rPr>
+              <a:t>F1   ·   precision 81.4%</a:t>
+            </a:r>
+            <a:endParaRPr lang="en-US" sz="1200" dirty="0"/>
+          </a:p>
+        </p:txBody>
+      </p:sp>
+      <p:sp>
+        <p:nvSpPr>
+          <p:cNvPr id="35" name="Text 33"/>
+          <p:cNvSpPr txBox="1"/>
+          <p:nvPr/>
+        </p:nvSpPr>
+        <p:spPr>
+          <a:xfrm>
+            <a:off x="3611880" y="2542032"/>
+            <a:ext cx="1020928" cy="320040"/>
+          </a:xfrm>
+          <a:prstGeom prst="rect">
+            <a:avLst/>
+          </a:prstGeom>
+          <a:noFill/>
+          <a:ln/>
+        </p:spPr>
+        <p:txBody>
+          <a:bodyPr wrap="square" lIns="0" tIns="0" rIns="0" bIns="0" rtlCol="0" anchor="t"/>
+          <a:lstStyle/>
+          <a:p>
+            <a:pPr algn="ctr" indent="0" marL="0">
+              <a:buNone/>
+            </a:pPr>
+            <a:r>
               <a:rPr lang="en-US" sz="1400" b="1" dirty="0">
+                <a:solidFill>
+                  <a:srgbClr val="E0533A"/>
+                </a:solidFill>
+                <a:latin typeface="Arial" pitchFamily="34" charset="0"/>
+                <a:ea typeface="Arial" pitchFamily="34" charset="-122"/>
+                <a:cs typeface="Arial" pitchFamily="34" charset="-120"/>
+              </a:rPr>
+              <a:t>−5.6 pts</a:t>
+            </a:r>
+            <a:endParaRPr lang="en-US" sz="1400" dirty="0"/>
+          </a:p>
+        </p:txBody>
+      </p:sp>
+      <p:sp>
+        <p:nvSpPr>
+          <p:cNvPr id="36" name="Shape 34"/>
+          <p:cNvSpPr/>
+          <p:nvPr/>
+        </p:nvSpPr>
+        <p:spPr>
+          <a:xfrm>
+            <a:off x="3749040" y="2971800"/>
+            <a:ext cx="746608" cy="914"/>
+          </a:xfrm>
+          <a:prstGeom prst="line">
+            <a:avLst/>
+          </a:prstGeom>
+          <a:noFill/>
+          <a:ln w="19050">
+            <a:solidFill>
+              <a:srgbClr val="E0533A"/>
+            </a:solidFill>
+            <a:prstDash val="solid"/>
+            <a:tailEnd type="triangle"/>
+          </a:ln>
+        </p:spPr>
+      </p:sp>
+      <p:sp>
+        <p:nvSpPr>
+          <p:cNvPr id="37" name="Text 35"/>
+          <p:cNvSpPr txBox="1"/>
+          <p:nvPr/>
+        </p:nvSpPr>
+        <p:spPr>
+          <a:xfrm>
+            <a:off x="3611880" y="3090672"/>
+            <a:ext cx="1020928" cy="274320"/>
+          </a:xfrm>
+          <a:prstGeom prst="rect">
+            <a:avLst/>
+          </a:prstGeom>
+          <a:noFill/>
+          <a:ln/>
+        </p:spPr>
+        <p:txBody>
+          <a:bodyPr wrap="square" lIns="0" tIns="0" rIns="0" bIns="0" rtlCol="0" anchor="t"/>
+          <a:lstStyle/>
+          <a:p>
+            <a:pPr algn="ctr" indent="0" marL="0">
+              <a:buNone/>
+            </a:pPr>
+            <a:r>
+              <a:rPr lang="en-US" sz="1100" dirty="0">
+                <a:solidFill>
+                  <a:srgbClr val="55606E"/>
+                </a:solidFill>
+                <a:latin typeface="Arial" pitchFamily="34" charset="0"/>
+                <a:ea typeface="Arial" pitchFamily="34" charset="-122"/>
+                <a:cs typeface="Arial" pitchFamily="34" charset="-120"/>
+              </a:rPr>
+              <a:t>class ratio</a:t>
+            </a:r>
+            <a:endParaRPr lang="en-US" sz="1100" dirty="0"/>
+          </a:p>
+        </p:txBody>
+      </p:sp>
+      <p:sp>
+        <p:nvSpPr>
+          <p:cNvPr id="38" name="Text 36"/>
+          <p:cNvSpPr txBox="1"/>
+          <p:nvPr/>
+        </p:nvSpPr>
+        <p:spPr>
+          <a:xfrm>
+            <a:off x="7558888" y="2542032"/>
+            <a:ext cx="1020928" cy="320040"/>
+          </a:xfrm>
+          <a:prstGeom prst="rect">
+            <a:avLst/>
+          </a:prstGeom>
+          <a:noFill/>
+          <a:ln/>
+        </p:spPr>
+        <p:txBody>
+          <a:bodyPr wrap="square" lIns="0" tIns="0" rIns="0" bIns="0" rtlCol="0" anchor="t"/>
+          <a:lstStyle/>
+          <a:p>
+            <a:pPr algn="ctr" indent="0" marL="0">
+              <a:buNone/>
+            </a:pPr>
+            <a:r>
+              <a:rPr lang="en-US" sz="1400" b="1" dirty="0">
+                <a:solidFill>
+                  <a:srgbClr val="E0533A"/>
+                </a:solidFill>
+                <a:latin typeface="Arial" pitchFamily="34" charset="0"/>
+                <a:ea typeface="Arial" pitchFamily="34" charset="-122"/>
+                <a:cs typeface="Arial" pitchFamily="34" charset="-120"/>
+              </a:rPr>
+              <a:t>−2.6 pts</a:t>
+            </a:r>
+            <a:endParaRPr lang="en-US" sz="1400" dirty="0"/>
+          </a:p>
+        </p:txBody>
+      </p:sp>
+      <p:sp>
+        <p:nvSpPr>
+          <p:cNvPr id="39" name="Shape 37"/>
+          <p:cNvSpPr/>
+          <p:nvPr/>
+        </p:nvSpPr>
+        <p:spPr>
+          <a:xfrm>
+            <a:off x="7696048" y="2971800"/>
+            <a:ext cx="746608" cy="914"/>
+          </a:xfrm>
+          <a:prstGeom prst="line">
+            <a:avLst/>
+          </a:prstGeom>
+          <a:noFill/>
+          <a:ln w="19050">
+            <a:solidFill>
+              <a:srgbClr val="E0533A"/>
+            </a:solidFill>
+            <a:prstDash val="solid"/>
+            <a:tailEnd type="triangle"/>
+          </a:ln>
+        </p:spPr>
+      </p:sp>
+      <p:sp>
+        <p:nvSpPr>
+          <p:cNvPr id="40" name="Text 38"/>
+          <p:cNvSpPr txBox="1"/>
+          <p:nvPr/>
+        </p:nvSpPr>
+        <p:spPr>
+          <a:xfrm>
+            <a:off x="7558888" y="3090672"/>
+            <a:ext cx="1020928" cy="274320"/>
+          </a:xfrm>
+          <a:prstGeom prst="rect">
+            <a:avLst/>
+          </a:prstGeom>
+          <a:noFill/>
+          <a:ln/>
+        </p:spPr>
+        <p:txBody>
+          <a:bodyPr wrap="square" lIns="0" tIns="0" rIns="0" bIns="0" rtlCol="0" anchor="t"/>
+          <a:lstStyle/>
+          <a:p>
+            <a:pPr algn="ctr" indent="0" marL="0">
+              <a:buNone/>
+            </a:pPr>
+            <a:r>
+              <a:rPr lang="en-US" sz="1100" dirty="0">
+                <a:solidFill>
+                  <a:srgbClr val="55606E"/>
+                </a:solidFill>
+                <a:latin typeface="Arial" pitchFamily="34" charset="0"/>
+                <a:ea typeface="Arial" pitchFamily="34" charset="-122"/>
+                <a:cs typeface="Arial" pitchFamily="34" charset="-120"/>
+              </a:rPr>
+              <a:t>leakage</a:t>
+            </a:r>
+            <a:endParaRPr lang="en-US" sz="1100" dirty="0"/>
+          </a:p>
+        </p:txBody>
+      </p:sp>
+      <p:sp>
+        <p:nvSpPr>
+          <p:cNvPr id="41" name="Shape 39"/>
+          <p:cNvSpPr/>
+          <p:nvPr/>
+        </p:nvSpPr>
+        <p:spPr>
+          <a:xfrm>
+            <a:off x="685800" y="4434840"/>
+            <a:ext cx="5272888" cy="1691640"/>
+          </a:xfrm>
+          <a:prstGeom prst="roundRect">
+            <a:avLst>
+              <a:gd name="adj" fmla="val 3243"/>
+            </a:avLst>
+          </a:prstGeom>
+          <a:solidFill>
+            <a:srgbClr val="F4F6F9"/>
+          </a:solidFill>
+          <a:ln w="12700">
+            <a:solidFill>
+              <a:srgbClr val="F4F6F9"/>
+            </a:solidFill>
+            <a:prstDash val="solid"/>
+          </a:ln>
+        </p:spPr>
+      </p:sp>
+      <p:sp>
+        <p:nvSpPr>
+          <p:cNvPr id="42" name="Shape 40"/>
+          <p:cNvSpPr/>
+          <p:nvPr/>
+        </p:nvSpPr>
+        <p:spPr>
+          <a:xfrm>
+            <a:off x="960120" y="4663440"/>
+            <a:ext cx="502920" cy="502920"/>
+          </a:xfrm>
+          <a:prstGeom prst="ellipse">
+            <a:avLst/>
+          </a:prstGeom>
+          <a:solidFill>
+            <a:srgbClr val="E0533A"/>
+          </a:solidFill>
+          <a:ln w="12700">
+            <a:solidFill>
+              <a:srgbClr val="E0533A"/>
+            </a:solidFill>
+            <a:prstDash val="solid"/>
+          </a:ln>
+        </p:spPr>
+      </p:sp>
+      <p:pic>
+        <p:nvPicPr>
+          <p:cNvPr id="43" name="Image 0" descr="preencoded.png">    </p:cNvPr>
+          <p:cNvPicPr>
+            <a:picLocks noChangeAspect="1"/>
+          </p:cNvPicPr>
+          <p:nvPr/>
+        </p:nvPicPr>
+        <p:blipFill>
+          <a:blip r:embed="rId1"/>
+          <a:stretch>
+            <a:fillRect/>
+          </a:stretch>
+        </p:blipFill>
+        <p:spPr>
+          <a:xfrm>
+            <a:off x="1095908" y="4799228"/>
+            <a:ext cx="231343" cy="231343"/>
+          </a:xfrm>
+          <a:prstGeom prst="rect">
+            <a:avLst/>
+          </a:prstGeom>
+        </p:spPr>
+      </p:pic>
+      <p:sp>
+        <p:nvSpPr>
+          <p:cNvPr id="44" name="Text 41"/>
+          <p:cNvSpPr txBox="1"/>
+          <p:nvPr/>
+        </p:nvSpPr>
+        <p:spPr>
+          <a:xfrm>
+            <a:off x="1645920" y="4681728"/>
+            <a:ext cx="4084168" cy="320040"/>
+          </a:xfrm>
+          <a:prstGeom prst="rect">
+            <a:avLst/>
+          </a:prstGeom>
+          <a:noFill/>
+          <a:ln/>
+        </p:spPr>
+        <p:txBody>
+          <a:bodyPr wrap="square" lIns="0" tIns="0" rIns="0" bIns="0" rtlCol="0" anchor="t"/>
+          <a:lstStyle/>
+          <a:p>
+            <a:pPr indent="0" marL="0">
+              <a:buNone/>
+            </a:pPr>
+            <a:r>
+              <a:rPr lang="en-US" sz="1450" b="1" dirty="0">
                 <a:solidFill>
                   <a:srgbClr val="0F1B2D"/>
                 </a:solidFill>
@@ -16293,22 +16824,22 @@
                 <a:ea typeface="Arial" pitchFamily="34" charset="-122"/>
                 <a:cs typeface="Arial" pitchFamily="34" charset="-120"/>
               </a:rPr>
-              <a:t>Simple models collapse</a:t>
+              <a:t>The 50/50 test set: 5.6 points</a:t>
             </a:r>
-            <a:endParaRPr lang="en-US" sz="1400" dirty="0"/>
+            <a:endParaRPr lang="en-US" sz="1450" dirty="0"/>
           </a:p>
         </p:txBody>
       </p:sp>
       <p:sp>
         <p:nvSpPr>
-          <p:cNvPr id="34" name="Text 28"/>
+          <p:cNvPr id="45" name="Text 42"/>
           <p:cNvSpPr txBox="1"/>
           <p:nvPr/>
         </p:nvSpPr>
         <p:spPr>
           <a:xfrm>
-            <a:off x="8549640" y="5276088"/>
-            <a:ext cx="2956255" cy="594360"/>
+            <a:off x="1645920" y="5047488"/>
+            <a:ext cx="4084168" cy="1005840"/>
           </a:xfrm>
           <a:prstGeom prst="rect">
             <a:avLst/>
@@ -16332,7 +16863,7 @@
                 <a:ea typeface="Arial" pitchFamily="34" charset="-122"/>
                 <a:cs typeface="Arial" pitchFamily="34" charset="-120"/>
               </a:rPr>
-              <a:t>Naive Bayes raises alarms on 32% of benign flows</a:t>
+              <a:t>Real traffic here is 77% benign. On a balanced test set there are far fewer benign flows to raise false alarms on, so precision looks higher: 94.8% vs 84.7% for the same predictions.</a:t>
             </a:r>
             <a:endParaRPr lang="en-US" sz="1200" dirty="0"/>
           </a:p>
@@ -16340,7 +16871,161 @@
       </p:sp>
       <p:sp>
         <p:nvSpPr>
-          <p:cNvPr id="35" name="Text 29"/>
+          <p:cNvPr id="46" name="Shape 43"/>
+          <p:cNvSpPr/>
+          <p:nvPr/>
+        </p:nvSpPr>
+        <p:spPr>
+          <a:xfrm>
+            <a:off x="6233008" y="4434840"/>
+            <a:ext cx="5272888" cy="1691640"/>
+          </a:xfrm>
+          <a:prstGeom prst="roundRect">
+            <a:avLst>
+              <a:gd name="adj" fmla="val 3243"/>
+            </a:avLst>
+          </a:prstGeom>
+          <a:solidFill>
+            <a:srgbClr val="F4F6F9"/>
+          </a:solidFill>
+          <a:ln w="12700">
+            <a:solidFill>
+              <a:srgbClr val="F4F6F9"/>
+            </a:solidFill>
+            <a:prstDash val="solid"/>
+          </a:ln>
+        </p:spPr>
+      </p:sp>
+      <p:sp>
+        <p:nvSpPr>
+          <p:cNvPr id="47" name="Shape 44"/>
+          <p:cNvSpPr/>
+          <p:nvPr/>
+        </p:nvSpPr>
+        <p:spPr>
+          <a:xfrm>
+            <a:off x="6507328" y="4663440"/>
+            <a:ext cx="502920" cy="502920"/>
+          </a:xfrm>
+          <a:prstGeom prst="ellipse">
+            <a:avLst/>
+          </a:prstGeom>
+          <a:solidFill>
+            <a:srgbClr val="E0533A"/>
+          </a:solidFill>
+          <a:ln w="12700">
+            <a:solidFill>
+              <a:srgbClr val="E0533A"/>
+            </a:solidFill>
+            <a:prstDash val="solid"/>
+          </a:ln>
+        </p:spPr>
+      </p:sp>
+      <p:pic>
+        <p:nvPicPr>
+          <p:cNvPr id="48" name="Image 1" descr="preencoded.png">    </p:cNvPr>
+          <p:cNvPicPr>
+            <a:picLocks noChangeAspect="1"/>
+          </p:cNvPicPr>
+          <p:nvPr/>
+        </p:nvPicPr>
+        <p:blipFill>
+          <a:blip r:embed="rId2"/>
+          <a:stretch>
+            <a:fillRect/>
+          </a:stretch>
+        </p:blipFill>
+        <p:spPr>
+          <a:xfrm>
+            <a:off x="6643116" y="4799228"/>
+            <a:ext cx="231343" cy="231343"/>
+          </a:xfrm>
+          <a:prstGeom prst="rect">
+            <a:avLst/>
+          </a:prstGeom>
+        </p:spPr>
+      </p:pic>
+      <p:sp>
+        <p:nvSpPr>
+          <p:cNvPr id="49" name="Text 45"/>
+          <p:cNvSpPr txBox="1"/>
+          <p:nvPr/>
+        </p:nvSpPr>
+        <p:spPr>
+          <a:xfrm>
+            <a:off x="7193128" y="4681728"/>
+            <a:ext cx="4084168" cy="320040"/>
+          </a:xfrm>
+          <a:prstGeom prst="rect">
+            <a:avLst/>
+          </a:prstGeom>
+          <a:noFill/>
+          <a:ln/>
+        </p:spPr>
+        <p:txBody>
+          <a:bodyPr wrap="square" lIns="0" tIns="0" rIns="0" bIns="0" rtlCol="0" anchor="t"/>
+          <a:lstStyle/>
+          <a:p>
+            <a:pPr indent="0" marL="0">
+              <a:buNone/>
+            </a:pPr>
+            <a:r>
+              <a:rPr lang="en-US" sz="1450" b="1" dirty="0">
+                <a:solidFill>
+                  <a:srgbClr val="0F1B2D"/>
+                </a:solidFill>
+                <a:latin typeface="Arial" pitchFamily="34" charset="0"/>
+                <a:ea typeface="Arial" pitchFamily="34" charset="-122"/>
+                <a:cs typeface="Arial" pitchFamily="34" charset="-120"/>
+              </a:rPr>
+              <a:t>Synthetic-flow leakage: 2.6 points</a:t>
+            </a:r>
+            <a:endParaRPr lang="en-US" sz="1450" dirty="0"/>
+          </a:p>
+        </p:txBody>
+      </p:sp>
+      <p:sp>
+        <p:nvSpPr>
+          <p:cNvPr id="50" name="Text 46"/>
+          <p:cNvSpPr txBox="1"/>
+          <p:nvPr/>
+        </p:nvSpPr>
+        <p:spPr>
+          <a:xfrm>
+            <a:off x="7193128" y="5047488"/>
+            <a:ext cx="4084168" cy="1005840"/>
+          </a:xfrm>
+          <a:prstGeom prst="rect">
+            <a:avLst/>
+          </a:prstGeom>
+          <a:noFill/>
+          <a:ln/>
+        </p:spPr>
+        <p:txBody>
+          <a:bodyPr wrap="square" lIns="0" tIns="0" rIns="0" bIns="0" rtlCol="0" anchor="t"/>
+          <a:lstStyle/>
+          <a:p>
+            <a:pPr indent="0" marL="0">
+              <a:buNone/>
+            </a:pPr>
+            <a:r>
+              <a:rPr lang="en-US" sz="1200" dirty="0">
+                <a:solidFill>
+                  <a:srgbClr val="55606E"/>
+                </a:solidFill>
+                <a:latin typeface="Arial" pitchFamily="34" charset="0"/>
+                <a:ea typeface="Arial" pitchFamily="34" charset="-122"/>
+                <a:cs typeface="Arial" pitchFamily="34" charset="-120"/>
+              </a:rPr>
+              <a:t>70% of the APT flows in the paper-protocol test set are synthetic. The model misses 0.34% of them, but 1.12% of real APT flows.</a:t>
+            </a:r>
+            <a:endParaRPr lang="en-US" sz="1200" dirty="0"/>
+          </a:p>
+        </p:txBody>
+      </p:sp>
+      <p:sp>
+        <p:nvSpPr>
+          <p:cNvPr id="51" name="Text 47"/>
           <p:cNvSpPr txBox="1"/>
           <p:nvPr/>
         </p:nvSpPr>
@@ -16379,7 +17064,7 @@
       </p:sp>
       <p:sp>
         <p:nvSpPr>
-          <p:cNvPr id="36" name="Text 30"/>
+          <p:cNvPr id="52" name="Text 48"/>
           <p:cNvSpPr txBox="1"/>
           <p:nvPr/>
         </p:nvSpPr>
@@ -16908,15 +17593,1042 @@
                 <a:ea typeface="Georgia" pitchFamily="34" charset="-122"/>
                 <a:cs typeface="Georgia" pitchFamily="34" charset="-120"/>
               </a:rPr>
-              <a:t>The hybrid ties its own components on F1</a:t>
+              <a:t>All 15 models look worse on a realistic test set</a:t>
             </a:r>
             <a:endParaRPr lang="en-US" sz="3000" dirty="0"/>
           </a:p>
         </p:txBody>
       </p:sp>
+      <p:pic>
+        <p:nvPicPr>
+          <p:cNvPr id="20" name="Image 0" descr="/private/tmp/claude-501/-Users-ashishjain-Documents-RIS-Mid-Eval/4e14a31e-25f5-4016-81db-47057b986f0d/scratchpad/deck/charts/f1_protocols.png">    </p:cNvPr>
+          <p:cNvPicPr>
+            <a:picLocks noChangeAspect="1"/>
+          </p:cNvPicPr>
+          <p:nvPr/>
+        </p:nvPicPr>
+        <p:blipFill>
+          <a:blip r:embed="rId1"/>
+          <a:stretch>
+            <a:fillRect/>
+          </a:stretch>
+        </p:blipFill>
+        <p:spPr>
+          <a:xfrm>
+            <a:off x="685800" y="1691640"/>
+            <a:ext cx="7498080" cy="4526280"/>
+          </a:xfrm>
+          <a:prstGeom prst="rect">
+            <a:avLst/>
+          </a:prstGeom>
+        </p:spPr>
+      </p:pic>
+      <p:sp>
+        <p:nvSpPr>
+          <p:cNvPr id="21" name="Shape 18"/>
+          <p:cNvSpPr/>
+          <p:nvPr/>
+        </p:nvSpPr>
+        <p:spPr>
+          <a:xfrm>
+            <a:off x="8549640" y="1965960"/>
+            <a:ext cx="457200" cy="457200"/>
+          </a:xfrm>
+          <a:prstGeom prst="ellipse">
+            <a:avLst/>
+          </a:prstGeom>
+          <a:solidFill>
+            <a:srgbClr val="E0533A"/>
+          </a:solidFill>
+          <a:ln w="12700">
+            <a:solidFill>
+              <a:srgbClr val="E0533A"/>
+            </a:solidFill>
+            <a:prstDash val="solid"/>
+          </a:ln>
+        </p:spPr>
+      </p:sp>
+      <p:pic>
+        <p:nvPicPr>
+          <p:cNvPr id="22" name="Image 1" descr="preencoded.png">    </p:cNvPr>
+          <p:cNvPicPr>
+            <a:picLocks noChangeAspect="1"/>
+          </p:cNvPicPr>
+          <p:nvPr/>
+        </p:nvPicPr>
+        <p:blipFill>
+          <a:blip r:embed="rId2"/>
+          <a:stretch>
+            <a:fillRect/>
+          </a:stretch>
+        </p:blipFill>
+        <p:spPr>
+          <a:xfrm>
+            <a:off x="8673084" y="2089404"/>
+            <a:ext cx="210312" cy="210312"/>
+          </a:xfrm>
+          <a:prstGeom prst="rect">
+            <a:avLst/>
+          </a:prstGeom>
+        </p:spPr>
+      </p:pic>
+      <p:sp>
+        <p:nvSpPr>
+          <p:cNvPr id="23" name="Text 19"/>
+          <p:cNvSpPr txBox="1"/>
+          <p:nvPr/>
+        </p:nvSpPr>
+        <p:spPr>
+          <a:xfrm>
+            <a:off x="9171432" y="2011680"/>
+            <a:ext cx="2334463" cy="365760"/>
+          </a:xfrm>
+          <a:prstGeom prst="rect">
+            <a:avLst/>
+          </a:prstGeom>
+          <a:noFill/>
+          <a:ln/>
+        </p:spPr>
+        <p:txBody>
+          <a:bodyPr wrap="square" lIns="0" tIns="0" rIns="0" bIns="0" rtlCol="0" anchor="t"/>
+          <a:lstStyle/>
+          <a:p>
+            <a:pPr indent="0" marL="0">
+              <a:buNone/>
+            </a:pPr>
+            <a:r>
+              <a:rPr lang="en-US" sz="1400" b="1" dirty="0">
+                <a:solidFill>
+                  <a:srgbClr val="0F1B2D"/>
+                </a:solidFill>
+                <a:latin typeface="Arial" pitchFamily="34" charset="0"/>
+                <a:ea typeface="Arial" pitchFamily="34" charset="-122"/>
+                <a:cs typeface="Arial" pitchFamily="34" charset="-120"/>
+              </a:rPr>
+              <a:t>Every model drops</a:t>
+            </a:r>
+            <a:endParaRPr lang="en-US" sz="1400" dirty="0"/>
+          </a:p>
+        </p:txBody>
+      </p:sp>
+      <p:sp>
+        <p:nvSpPr>
+          <p:cNvPr id="24" name="Text 20"/>
+          <p:cNvSpPr txBox="1"/>
+          <p:nvPr/>
+        </p:nvSpPr>
+        <p:spPr>
+          <a:xfrm>
+            <a:off x="8549640" y="2532888"/>
+            <a:ext cx="2956255" cy="594360"/>
+          </a:xfrm>
+          <a:prstGeom prst="rect">
+            <a:avLst/>
+          </a:prstGeom>
+          <a:noFill/>
+          <a:ln/>
+        </p:spPr>
+        <p:txBody>
+          <a:bodyPr wrap="square" lIns="0" tIns="0" rIns="0" bIns="0" rtlCol="0" anchor="t"/>
+          <a:lstStyle/>
+          <a:p>
+            <a:pPr indent="0" marL="0">
+              <a:buNone/>
+            </a:pPr>
+            <a:r>
+              <a:rPr lang="en-US" sz="1200" dirty="0">
+                <a:solidFill>
+                  <a:srgbClr val="55606E"/>
+                </a:solidFill>
+                <a:latin typeface="Arial" pitchFamily="34" charset="0"/>
+                <a:ea typeface="Arial" pitchFamily="34" charset="-122"/>
+                <a:cs typeface="Arial" pitchFamily="34" charset="-120"/>
+              </a:rPr>
+              <a:t>F1 falls 8.0–21.2 points; for the hybrid, 5.6 of 8.2 come from the class ratio</a:t>
+            </a:r>
+            <a:endParaRPr lang="en-US" sz="1200" dirty="0"/>
+          </a:p>
+        </p:txBody>
+      </p:sp>
+      <p:sp>
+        <p:nvSpPr>
+          <p:cNvPr id="25" name="Shape 21"/>
+          <p:cNvSpPr/>
+          <p:nvPr/>
+        </p:nvSpPr>
+        <p:spPr>
+          <a:xfrm>
+            <a:off x="8549640" y="3063240"/>
+            <a:ext cx="2956255" cy="914"/>
+          </a:xfrm>
+          <a:prstGeom prst="line">
+            <a:avLst/>
+          </a:prstGeom>
+          <a:noFill/>
+          <a:ln w="9525">
+            <a:solidFill>
+              <a:srgbClr val="E2E6EC"/>
+            </a:solidFill>
+            <a:prstDash val="solid"/>
+          </a:ln>
+        </p:spPr>
+      </p:sp>
+      <p:sp>
+        <p:nvSpPr>
+          <p:cNvPr id="26" name="Shape 22"/>
+          <p:cNvSpPr/>
+          <p:nvPr/>
+        </p:nvSpPr>
+        <p:spPr>
+          <a:xfrm>
+            <a:off x="8549640" y="3337560"/>
+            <a:ext cx="457200" cy="457200"/>
+          </a:xfrm>
+          <a:prstGeom prst="ellipse">
+            <a:avLst/>
+          </a:prstGeom>
+          <a:solidFill>
+            <a:srgbClr val="2A78D6"/>
+          </a:solidFill>
+          <a:ln w="12700">
+            <a:solidFill>
+              <a:srgbClr val="2A78D6"/>
+            </a:solidFill>
+            <a:prstDash val="solid"/>
+          </a:ln>
+        </p:spPr>
+      </p:sp>
+      <p:pic>
+        <p:nvPicPr>
+          <p:cNvPr id="27" name="Image 2" descr="preencoded.png">    </p:cNvPr>
+          <p:cNvPicPr>
+            <a:picLocks noChangeAspect="1"/>
+          </p:cNvPicPr>
+          <p:nvPr/>
+        </p:nvPicPr>
+        <p:blipFill>
+          <a:blip r:embed="rId3"/>
+          <a:stretch>
+            <a:fillRect/>
+          </a:stretch>
+        </p:blipFill>
+        <p:spPr>
+          <a:xfrm>
+            <a:off x="8673084" y="3461004"/>
+            <a:ext cx="210312" cy="210312"/>
+          </a:xfrm>
+          <a:prstGeom prst="rect">
+            <a:avLst/>
+          </a:prstGeom>
+        </p:spPr>
+      </p:pic>
+      <p:sp>
+        <p:nvSpPr>
+          <p:cNvPr id="28" name="Text 23"/>
+          <p:cNvSpPr txBox="1"/>
+          <p:nvPr/>
+        </p:nvSpPr>
+        <p:spPr>
+          <a:xfrm>
+            <a:off x="9171432" y="3383280"/>
+            <a:ext cx="2334463" cy="365760"/>
+          </a:xfrm>
+          <a:prstGeom prst="rect">
+            <a:avLst/>
+          </a:prstGeom>
+          <a:noFill/>
+          <a:ln/>
+        </p:spPr>
+        <p:txBody>
+          <a:bodyPr wrap="square" lIns="0" tIns="0" rIns="0" bIns="0" rtlCol="0" anchor="t"/>
+          <a:lstStyle/>
+          <a:p>
+            <a:pPr indent="0" marL="0">
+              <a:buNone/>
+            </a:pPr>
+            <a:r>
+              <a:rPr lang="en-US" sz="1400" b="1" dirty="0">
+                <a:solidFill>
+                  <a:srgbClr val="0F1B2D"/>
+                </a:solidFill>
+                <a:latin typeface="Arial" pitchFamily="34" charset="0"/>
+                <a:ea typeface="Arial" pitchFamily="34" charset="-122"/>
+                <a:cs typeface="Arial" pitchFamily="34" charset="-120"/>
+              </a:rPr>
+              <a:t>Tree ensembles lead</a:t>
+            </a:r>
+            <a:endParaRPr lang="en-US" sz="1400" dirty="0"/>
+          </a:p>
+        </p:txBody>
+      </p:sp>
+      <p:sp>
+        <p:nvSpPr>
+          <p:cNvPr id="29" name="Text 24"/>
+          <p:cNvSpPr txBox="1"/>
+          <p:nvPr/>
+        </p:nvSpPr>
+        <p:spPr>
+          <a:xfrm>
+            <a:off x="8549640" y="3904488"/>
+            <a:ext cx="2956255" cy="594360"/>
+          </a:xfrm>
+          <a:prstGeom prst="rect">
+            <a:avLst/>
+          </a:prstGeom>
+          <a:noFill/>
+          <a:ln/>
+        </p:spPr>
+        <p:txBody>
+          <a:bodyPr wrap="square" lIns="0" tIns="0" rIns="0" bIns="0" rtlCol="0" anchor="t"/>
+          <a:lstStyle/>
+          <a:p>
+            <a:pPr indent="0" marL="0">
+              <a:buNone/>
+            </a:pPr>
+            <a:r>
+              <a:rPr lang="en-US" sz="1200" dirty="0">
+                <a:solidFill>
+                  <a:srgbClr val="55606E"/>
+                </a:solidFill>
+                <a:latin typeface="Arial" pitchFamily="34" charset="0"/>
+                <a:ea typeface="Arial" pitchFamily="34" charset="-122"/>
+                <a:cs typeface="Arial" pitchFamily="34" charset="-120"/>
+              </a:rPr>
+              <a:t>Soft vote 89.3%, Random Forest 89.1%, XGBoost 88.9%, OR hybrid 88.9%</a:t>
+            </a:r>
+            <a:endParaRPr lang="en-US" sz="1200" dirty="0"/>
+          </a:p>
+        </p:txBody>
+      </p:sp>
+      <p:sp>
+        <p:nvSpPr>
+          <p:cNvPr id="30" name="Shape 25"/>
+          <p:cNvSpPr/>
+          <p:nvPr/>
+        </p:nvSpPr>
+        <p:spPr>
+          <a:xfrm>
+            <a:off x="8549640" y="4434840"/>
+            <a:ext cx="2956255" cy="914"/>
+          </a:xfrm>
+          <a:prstGeom prst="line">
+            <a:avLst/>
+          </a:prstGeom>
+          <a:noFill/>
+          <a:ln w="9525">
+            <a:solidFill>
+              <a:srgbClr val="E2E6EC"/>
+            </a:solidFill>
+            <a:prstDash val="solid"/>
+          </a:ln>
+        </p:spPr>
+      </p:sp>
+      <p:sp>
+        <p:nvSpPr>
+          <p:cNvPr id="31" name="Shape 26"/>
+          <p:cNvSpPr/>
+          <p:nvPr/>
+        </p:nvSpPr>
+        <p:spPr>
+          <a:xfrm>
+            <a:off x="8549640" y="4709160"/>
+            <a:ext cx="457200" cy="457200"/>
+          </a:xfrm>
+          <a:prstGeom prst="ellipse">
+            <a:avLst/>
+          </a:prstGeom>
+          <a:solidFill>
+            <a:srgbClr val="2A78D6"/>
+          </a:solidFill>
+          <a:ln w="12700">
+            <a:solidFill>
+              <a:srgbClr val="2A78D6"/>
+            </a:solidFill>
+            <a:prstDash val="solid"/>
+          </a:ln>
+        </p:spPr>
+      </p:sp>
+      <p:pic>
+        <p:nvPicPr>
+          <p:cNvPr id="32" name="Image 3" descr="preencoded.png">    </p:cNvPr>
+          <p:cNvPicPr>
+            <a:picLocks noChangeAspect="1"/>
+          </p:cNvPicPr>
+          <p:nvPr/>
+        </p:nvPicPr>
+        <p:blipFill>
+          <a:blip r:embed="rId4"/>
+          <a:stretch>
+            <a:fillRect/>
+          </a:stretch>
+        </p:blipFill>
+        <p:spPr>
+          <a:xfrm>
+            <a:off x="8673084" y="4832604"/>
+            <a:ext cx="210312" cy="210312"/>
+          </a:xfrm>
+          <a:prstGeom prst="rect">
+            <a:avLst/>
+          </a:prstGeom>
+        </p:spPr>
+      </p:pic>
+      <p:sp>
+        <p:nvSpPr>
+          <p:cNvPr id="33" name="Text 27"/>
+          <p:cNvSpPr txBox="1"/>
+          <p:nvPr/>
+        </p:nvSpPr>
+        <p:spPr>
+          <a:xfrm>
+            <a:off x="9171432" y="4754880"/>
+            <a:ext cx="2334463" cy="365760"/>
+          </a:xfrm>
+          <a:prstGeom prst="rect">
+            <a:avLst/>
+          </a:prstGeom>
+          <a:noFill/>
+          <a:ln/>
+        </p:spPr>
+        <p:txBody>
+          <a:bodyPr wrap="square" lIns="0" tIns="0" rIns="0" bIns="0" rtlCol="0" anchor="t"/>
+          <a:lstStyle/>
+          <a:p>
+            <a:pPr indent="0" marL="0">
+              <a:buNone/>
+            </a:pPr>
+            <a:r>
+              <a:rPr lang="en-US" sz="1400" b="1" dirty="0">
+                <a:solidFill>
+                  <a:srgbClr val="0F1B2D"/>
+                </a:solidFill>
+                <a:latin typeface="Arial" pitchFamily="34" charset="0"/>
+                <a:ea typeface="Arial" pitchFamily="34" charset="-122"/>
+                <a:cs typeface="Arial" pitchFamily="34" charset="-120"/>
+              </a:rPr>
+              <a:t>Deep learning doesn't help</a:t>
+            </a:r>
+            <a:endParaRPr lang="en-US" sz="1400" dirty="0"/>
+          </a:p>
+        </p:txBody>
+      </p:sp>
+      <p:sp>
+        <p:nvSpPr>
+          <p:cNvPr id="34" name="Text 28"/>
+          <p:cNvSpPr txBox="1"/>
+          <p:nvPr/>
+        </p:nvSpPr>
+        <p:spPr>
+          <a:xfrm>
+            <a:off x="8549640" y="5276088"/>
+            <a:ext cx="2956255" cy="594360"/>
+          </a:xfrm>
+          <a:prstGeom prst="rect">
+            <a:avLst/>
+          </a:prstGeom>
+          <a:noFill/>
+          <a:ln/>
+        </p:spPr>
+        <p:txBody>
+          <a:bodyPr wrap="square" lIns="0" tIns="0" rIns="0" bIns="0" rtlCol="0" anchor="t"/>
+          <a:lstStyle/>
+          <a:p>
+            <a:pPr indent="0" marL="0">
+              <a:buNone/>
+            </a:pPr>
+            <a:r>
+              <a:rPr lang="en-US" sz="1200" dirty="0">
+                <a:solidFill>
+                  <a:srgbClr val="55606E"/>
+                </a:solidFill>
+                <a:latin typeface="Arial" pitchFamily="34" charset="0"/>
+                <a:ea typeface="Arial" pitchFamily="34" charset="-122"/>
+                <a:cs typeface="Arial" pitchFamily="34" charset="-120"/>
+              </a:rPr>
+              <a:t>CNN 87.1%, MLP 87.0%, consistent with the paper's own Table 7</a:t>
+            </a:r>
+            <a:endParaRPr lang="en-US" sz="1200" dirty="0"/>
+          </a:p>
+        </p:txBody>
+      </p:sp>
+      <p:sp>
+        <p:nvSpPr>
+          <p:cNvPr id="35" name="Text 29"/>
+          <p:cNvSpPr txBox="1"/>
+          <p:nvPr/>
+        </p:nvSpPr>
+        <p:spPr>
+          <a:xfrm>
+            <a:off x="685800" y="6400800"/>
+            <a:ext cx="7315200" cy="228600"/>
+          </a:xfrm>
+          <a:prstGeom prst="rect">
+            <a:avLst/>
+          </a:prstGeom>
+          <a:noFill/>
+          <a:ln/>
+        </p:spPr>
+        <p:txBody>
+          <a:bodyPr wrap="square" lIns="0" tIns="0" rIns="0" bIns="0" rtlCol="0" anchor="t"/>
+          <a:lstStyle/>
+          <a:p>
+            <a:pPr indent="0" marL="0">
+              <a:buNone/>
+            </a:pPr>
+            <a:r>
+              <a:rPr lang="en-US" sz="900" dirty="0">
+                <a:solidFill>
+                  <a:srgbClr val="8A94A3"/>
+                </a:solidFill>
+                <a:latin typeface="Arial" pitchFamily="34" charset="0"/>
+                <a:ea typeface="Arial" pitchFamily="34" charset="-122"/>
+                <a:cs typeface="Arial" pitchFamily="34" charset="-120"/>
+              </a:rPr>
+              <a:t>Anomaly detection for Advanced Persistent Threats   |   Mid-term evaluation</a:t>
+            </a:r>
+            <a:endParaRPr lang="en-US" sz="900" dirty="0"/>
+          </a:p>
+        </p:txBody>
+      </p:sp>
+      <p:sp>
+        <p:nvSpPr>
+          <p:cNvPr id="36" name="Text 30"/>
+          <p:cNvSpPr txBox="1"/>
+          <p:nvPr/>
+        </p:nvSpPr>
+        <p:spPr>
+          <a:xfrm>
+            <a:off x="10591495" y="6400800"/>
+            <a:ext cx="914400" cy="228600"/>
+          </a:xfrm>
+          <a:prstGeom prst="rect">
+            <a:avLst/>
+          </a:prstGeom>
+          <a:noFill/>
+          <a:ln/>
+        </p:spPr>
+        <p:txBody>
+          <a:bodyPr wrap="square" lIns="0" tIns="0" rIns="0" bIns="0" rtlCol="0" anchor="t"/>
+          <a:lstStyle/>
+          <a:p>
+            <a:pPr algn="r" indent="0" marL="0">
+              <a:buNone/>
+            </a:pPr>
+            <a:r>
+              <a:rPr lang="en-US" sz="900" dirty="0">
+                <a:solidFill>
+                  <a:srgbClr val="8A94A3"/>
+                </a:solidFill>
+                <a:latin typeface="Arial" pitchFamily="34" charset="0"/>
+                <a:ea typeface="Arial" pitchFamily="34" charset="-122"/>
+                <a:cs typeface="Arial" pitchFamily="34" charset="-120"/>
+              </a:rPr>
+              <a:t>17</a:t>
+            </a:r>
+            <a:endParaRPr lang="en-US" sz="900" dirty="0"/>
+          </a:p>
+        </p:txBody>
+      </p:sp>
+    </p:spTree>
+  </p:cSld>
+  <p:clrMapOvr>
+    <a:masterClrMapping/>
+  </p:clrMapOvr>
+</p:sld>
+</file>
+
+<file path=ppt/slides/slide18.xml><?xml version="1.0" encoding="utf-8"?>
+<p:sld xmlns:a="http://schemas.openxmlformats.org/drawingml/2006/main" xmlns:r="http://schemas.openxmlformats.org/officeDocument/2006/relationships" xmlns:p="http://schemas.openxmlformats.org/presentationml/2006/main">
+  <p:cSld name="Slide 18">
+    <p:bg>
+      <p:bgPr>
+        <a:solidFill>
+          <a:srgbClr val="FFFFFF"/>
+        </a:solidFill>
+      </p:bgPr>
+    </p:bg>
+    <p:spTree>
+      <p:nvGrpSpPr>
+        <p:cNvPr id="1" name=""/>
+        <p:cNvGrpSpPr/>
+        <p:nvPr/>
+      </p:nvGrpSpPr>
+      <p:grpSpPr>
+        <a:xfrm>
+          <a:off x="0" y="0"/>
+          <a:ext cx="0" cy="0"/>
+          <a:chOff x="0" y="0"/>
+          <a:chExt cx="0" cy="0"/>
+        </a:xfrm>
+      </p:grpSpPr>
+      <p:sp>
+        <p:nvSpPr>
+          <p:cNvPr id="2" name="Shape 0"/>
+          <p:cNvSpPr/>
+          <p:nvPr/>
+        </p:nvSpPr>
+        <p:spPr>
+          <a:xfrm flipV="1">
+            <a:off x="10087295" y="470002"/>
+            <a:ext cx="288950" cy="416966"/>
+          </a:xfrm>
+          <a:prstGeom prst="line">
+            <a:avLst/>
+          </a:prstGeom>
+          <a:noFill/>
+          <a:ln w="9525">
+            <a:solidFill>
+              <a:srgbClr val="DCE2EA"/>
+            </a:solidFill>
+            <a:prstDash val="solid"/>
+          </a:ln>
+        </p:spPr>
+      </p:sp>
+      <p:sp>
+        <p:nvSpPr>
+          <p:cNvPr id="3" name="Shape 1"/>
+          <p:cNvSpPr/>
+          <p:nvPr/>
+        </p:nvSpPr>
+        <p:spPr>
+          <a:xfrm>
+            <a:off x="10087295" y="886968"/>
+            <a:ext cx="549006" cy="69494"/>
+          </a:xfrm>
+          <a:prstGeom prst="line">
+            <a:avLst/>
+          </a:prstGeom>
+          <a:noFill/>
+          <a:ln w="9525">
+            <a:solidFill>
+              <a:srgbClr val="DCE2EA"/>
+            </a:solidFill>
+            <a:prstDash val="solid"/>
+          </a:ln>
+        </p:spPr>
+      </p:sp>
+      <p:sp>
+        <p:nvSpPr>
+          <p:cNvPr id="4" name="Shape 2"/>
+          <p:cNvSpPr/>
+          <p:nvPr/>
+        </p:nvSpPr>
+        <p:spPr>
+          <a:xfrm>
+            <a:off x="10376245" y="470002"/>
+            <a:ext cx="549006" cy="156362"/>
+          </a:xfrm>
+          <a:prstGeom prst="line">
+            <a:avLst/>
+          </a:prstGeom>
+          <a:noFill/>
+          <a:ln w="9525">
+            <a:solidFill>
+              <a:srgbClr val="F2B7A8"/>
+            </a:solidFill>
+            <a:prstDash val="solid"/>
+          </a:ln>
+        </p:spPr>
+      </p:sp>
+      <p:sp>
+        <p:nvSpPr>
+          <p:cNvPr id="5" name="Shape 3"/>
+          <p:cNvSpPr/>
+          <p:nvPr/>
+        </p:nvSpPr>
+        <p:spPr>
+          <a:xfrm flipV="1">
+            <a:off x="10636301" y="626364"/>
+            <a:ext cx="288950" cy="330098"/>
+          </a:xfrm>
+          <a:prstGeom prst="line">
+            <a:avLst/>
+          </a:prstGeom>
+          <a:noFill/>
+          <a:ln w="9525">
+            <a:solidFill>
+              <a:srgbClr val="F2B7A8"/>
+            </a:solidFill>
+            <a:prstDash val="solid"/>
+          </a:ln>
+        </p:spPr>
+      </p:sp>
+      <p:sp>
+        <p:nvSpPr>
+          <p:cNvPr id="6" name="Shape 4"/>
+          <p:cNvSpPr/>
+          <p:nvPr/>
+        </p:nvSpPr>
+        <p:spPr>
+          <a:xfrm flipV="1">
+            <a:off x="10925251" y="522122"/>
+            <a:ext cx="534558" cy="104242"/>
+          </a:xfrm>
+          <a:prstGeom prst="line">
+            <a:avLst/>
+          </a:prstGeom>
+          <a:noFill/>
+          <a:ln w="9525">
+            <a:solidFill>
+              <a:srgbClr val="F2B7A8"/>
+            </a:solidFill>
+            <a:prstDash val="solid"/>
+          </a:ln>
+        </p:spPr>
+      </p:sp>
+      <p:sp>
+        <p:nvSpPr>
+          <p:cNvPr id="7" name="Shape 5"/>
+          <p:cNvSpPr/>
+          <p:nvPr/>
+        </p:nvSpPr>
+        <p:spPr>
+          <a:xfrm>
+            <a:off x="10636301" y="956462"/>
+            <a:ext cx="549006" cy="121615"/>
+          </a:xfrm>
+          <a:prstGeom prst="line">
+            <a:avLst/>
+          </a:prstGeom>
+          <a:noFill/>
+          <a:ln w="9525">
+            <a:solidFill>
+              <a:srgbClr val="DCE2EA"/>
+            </a:solidFill>
+            <a:prstDash val="solid"/>
+          </a:ln>
+        </p:spPr>
+      </p:sp>
+      <p:sp>
+        <p:nvSpPr>
+          <p:cNvPr id="8" name="Shape 6"/>
+          <p:cNvSpPr/>
+          <p:nvPr/>
+        </p:nvSpPr>
+        <p:spPr>
+          <a:xfrm flipV="1">
+            <a:off x="11185307" y="843534"/>
+            <a:ext cx="173370" cy="234544"/>
+          </a:xfrm>
+          <a:prstGeom prst="line">
+            <a:avLst/>
+          </a:prstGeom>
+          <a:noFill/>
+          <a:ln w="9525">
+            <a:solidFill>
+              <a:srgbClr val="DCE2EA"/>
+            </a:solidFill>
+            <a:prstDash val="solid"/>
+          </a:ln>
+        </p:spPr>
+      </p:sp>
+      <p:sp>
+        <p:nvSpPr>
+          <p:cNvPr id="9" name="Shape 7"/>
+          <p:cNvSpPr/>
+          <p:nvPr/>
+        </p:nvSpPr>
+        <p:spPr>
+          <a:xfrm flipH="1">
+            <a:off x="11358677" y="522122"/>
+            <a:ext cx="101133" cy="321412"/>
+          </a:xfrm>
+          <a:prstGeom prst="line">
+            <a:avLst/>
+          </a:prstGeom>
+          <a:noFill/>
+          <a:ln w="9525">
+            <a:solidFill>
+              <a:srgbClr val="DCE2EA"/>
+            </a:solidFill>
+            <a:prstDash val="solid"/>
+          </a:ln>
+        </p:spPr>
+      </p:sp>
+      <p:sp>
+        <p:nvSpPr>
+          <p:cNvPr id="10" name="Shape 8"/>
+          <p:cNvSpPr/>
+          <p:nvPr/>
+        </p:nvSpPr>
+        <p:spPr>
+          <a:xfrm>
+            <a:off x="10055291" y="854964"/>
+            <a:ext cx="64008" cy="64008"/>
+          </a:xfrm>
+          <a:prstGeom prst="ellipse">
+            <a:avLst/>
+          </a:prstGeom>
+          <a:solidFill>
+            <a:srgbClr val="C3CCD9"/>
+          </a:solidFill>
+          <a:ln w="12700">
+            <a:solidFill>
+              <a:srgbClr val="C3CCD9"/>
+            </a:solidFill>
+            <a:prstDash val="solid"/>
+          </a:ln>
+        </p:spPr>
+      </p:sp>
+      <p:sp>
+        <p:nvSpPr>
+          <p:cNvPr id="11" name="Shape 9"/>
+          <p:cNvSpPr/>
+          <p:nvPr/>
+        </p:nvSpPr>
+        <p:spPr>
+          <a:xfrm>
+            <a:off x="10335097" y="428854"/>
+            <a:ext cx="82296" cy="82296"/>
+          </a:xfrm>
+          <a:prstGeom prst="ellipse">
+            <a:avLst/>
+          </a:prstGeom>
+          <a:solidFill>
+            <a:srgbClr val="C3CCD9"/>
+          </a:solidFill>
+          <a:ln w="12700">
+            <a:solidFill>
+              <a:srgbClr val="C3CCD9"/>
+            </a:solidFill>
+            <a:prstDash val="solid"/>
+          </a:ln>
+        </p:spPr>
+      </p:sp>
+      <p:sp>
+        <p:nvSpPr>
+          <p:cNvPr id="12" name="Shape 10"/>
+          <p:cNvSpPr/>
+          <p:nvPr/>
+        </p:nvSpPr>
+        <p:spPr>
+          <a:xfrm>
+            <a:off x="10599725" y="919886"/>
+            <a:ext cx="73152" cy="73152"/>
+          </a:xfrm>
+          <a:prstGeom prst="ellipse">
+            <a:avLst/>
+          </a:prstGeom>
+          <a:solidFill>
+            <a:srgbClr val="C3CCD9"/>
+          </a:solidFill>
+          <a:ln w="12700">
+            <a:solidFill>
+              <a:srgbClr val="C3CCD9"/>
+            </a:solidFill>
+            <a:prstDash val="solid"/>
+          </a:ln>
+        </p:spPr>
+      </p:sp>
+      <p:sp>
+        <p:nvSpPr>
+          <p:cNvPr id="13" name="Shape 11"/>
+          <p:cNvSpPr/>
+          <p:nvPr/>
+        </p:nvSpPr>
+        <p:spPr>
+          <a:xfrm>
+            <a:off x="10806379" y="507492"/>
+            <a:ext cx="237744" cy="237744"/>
+          </a:xfrm>
+          <a:prstGeom prst="ellipse">
+            <a:avLst/>
+          </a:prstGeom>
+          <a:solidFill>
+            <a:srgbClr val="E0533A">
+              <a:alpha val="18000"/>
+            </a:srgbClr>
+          </a:solidFill>
+          <a:ln w="12700">
+            <a:solidFill>
+              <a:srgbClr val="E0533A">
+                <a:alpha val="18000"/>
+              </a:srgbClr>
+            </a:solidFill>
+            <a:prstDash val="solid"/>
+          </a:ln>
+        </p:spPr>
+      </p:sp>
+      <p:sp>
+        <p:nvSpPr>
+          <p:cNvPr id="14" name="Shape 12"/>
+          <p:cNvSpPr/>
+          <p:nvPr/>
+        </p:nvSpPr>
+        <p:spPr>
+          <a:xfrm>
+            <a:off x="10874959" y="576072"/>
+            <a:ext cx="100584" cy="100584"/>
+          </a:xfrm>
+          <a:prstGeom prst="ellipse">
+            <a:avLst/>
+          </a:prstGeom>
+          <a:solidFill>
+            <a:srgbClr val="E0533A"/>
+          </a:solidFill>
+          <a:ln w="12700">
+            <a:solidFill>
+              <a:srgbClr val="E0533A"/>
+            </a:solidFill>
+            <a:prstDash val="solid"/>
+          </a:ln>
+        </p:spPr>
+      </p:sp>
+      <p:sp>
+        <p:nvSpPr>
+          <p:cNvPr id="15" name="Shape 13"/>
+          <p:cNvSpPr/>
+          <p:nvPr/>
+        </p:nvSpPr>
+        <p:spPr>
+          <a:xfrm>
+            <a:off x="11144159" y="1036930"/>
+            <a:ext cx="82296" cy="82296"/>
+          </a:xfrm>
+          <a:prstGeom prst="ellipse">
+            <a:avLst/>
+          </a:prstGeom>
+          <a:solidFill>
+            <a:srgbClr val="C3CCD9"/>
+          </a:solidFill>
+          <a:ln w="12700">
+            <a:solidFill>
+              <a:srgbClr val="C3CCD9"/>
+            </a:solidFill>
+            <a:prstDash val="solid"/>
+          </a:ln>
+        </p:spPr>
+      </p:sp>
+      <p:sp>
+        <p:nvSpPr>
+          <p:cNvPr id="16" name="Shape 14"/>
+          <p:cNvSpPr/>
+          <p:nvPr/>
+        </p:nvSpPr>
+        <p:spPr>
+          <a:xfrm>
+            <a:off x="11427805" y="490118"/>
+            <a:ext cx="64008" cy="64008"/>
+          </a:xfrm>
+          <a:prstGeom prst="ellipse">
+            <a:avLst/>
+          </a:prstGeom>
+          <a:solidFill>
+            <a:srgbClr val="C3CCD9"/>
+          </a:solidFill>
+          <a:ln w="12700">
+            <a:solidFill>
+              <a:srgbClr val="C3CCD9"/>
+            </a:solidFill>
+            <a:prstDash val="solid"/>
+          </a:ln>
+        </p:spPr>
+      </p:sp>
+      <p:sp>
+        <p:nvSpPr>
+          <p:cNvPr id="17" name="Shape 15"/>
+          <p:cNvSpPr/>
+          <p:nvPr/>
+        </p:nvSpPr>
+        <p:spPr>
+          <a:xfrm>
+            <a:off x="11331245" y="816102"/>
+            <a:ext cx="54864" cy="54864"/>
+          </a:xfrm>
+          <a:prstGeom prst="ellipse">
+            <a:avLst/>
+          </a:prstGeom>
+          <a:solidFill>
+            <a:srgbClr val="C3CCD9"/>
+          </a:solidFill>
+          <a:ln w="12700">
+            <a:solidFill>
+              <a:srgbClr val="C3CCD9"/>
+            </a:solidFill>
+            <a:prstDash val="solid"/>
+          </a:ln>
+        </p:spPr>
+      </p:sp>
+      <p:sp>
+        <p:nvSpPr>
+          <p:cNvPr id="18" name="Text 16"/>
+          <p:cNvSpPr txBox="1"/>
+          <p:nvPr/>
+        </p:nvSpPr>
+        <p:spPr>
+          <a:xfrm>
+            <a:off x="685800" y="475488"/>
+            <a:ext cx="10820095" cy="256032"/>
+          </a:xfrm>
+          <a:prstGeom prst="rect">
+            <a:avLst/>
+          </a:prstGeom>
+          <a:noFill/>
+          <a:ln/>
+        </p:spPr>
+        <p:txBody>
+          <a:bodyPr wrap="square" lIns="0" tIns="0" rIns="0" bIns="0" rtlCol="0" anchor="t"/>
+          <a:lstStyle/>
+          <a:p>
+            <a:pPr indent="0" marL="0">
+              <a:buNone/>
+            </a:pPr>
+            <a:r>
+              <a:rPr lang="en-US" sz="1100" b="1" dirty="0">
+                <a:solidFill>
+                  <a:srgbClr val="E0533A"/>
+                </a:solidFill>
+                <a:latin typeface="Arial" pitchFamily="34" charset="0"/>
+                <a:ea typeface="Arial" pitchFamily="34" charset="-122"/>
+                <a:cs typeface="Arial" pitchFamily="34" charset="-120"/>
+              </a:rPr>
+              <a:t>03 · RESULTS</a:t>
+            </a:r>
+            <a:endParaRPr lang="en-US" sz="1100" dirty="0"/>
+          </a:p>
+        </p:txBody>
+      </p:sp>
+      <p:sp>
+        <p:nvSpPr>
+          <p:cNvPr id="19" name="Text 17"/>
+          <p:cNvSpPr txBox="1"/>
+          <p:nvPr/>
+        </p:nvSpPr>
+        <p:spPr>
+          <a:xfrm>
+            <a:off x="685800" y="768096"/>
+            <a:ext cx="10820095" cy="822960"/>
+          </a:xfrm>
+          <a:prstGeom prst="rect">
+            <a:avLst/>
+          </a:prstGeom>
+          <a:noFill/>
+          <a:ln/>
+        </p:spPr>
+        <p:txBody>
+          <a:bodyPr wrap="square" lIns="0" tIns="0" rIns="0" bIns="0" rtlCol="0" anchor="t"/>
+          <a:lstStyle/>
+          <a:p>
+            <a:pPr indent="0" marL="0">
+              <a:buNone/>
+            </a:pPr>
+            <a:r>
+              <a:rPr lang="en-US" sz="3000" dirty="0">
+                <a:solidFill>
+                  <a:srgbClr val="0F1B2D"/>
+                </a:solidFill>
+                <a:latin typeface="Georgia" pitchFamily="34" charset="0"/>
+                <a:ea typeface="Georgia" pitchFamily="34" charset="-122"/>
+                <a:cs typeface="Georgia" pitchFamily="34" charset="-120"/>
+              </a:rPr>
+              <a:t>The published hybrid doesn't beat its parts</a:t>
+            </a:r>
+            <a:endParaRPr lang="en-US" sz="3000" dirty="0"/>
+          </a:p>
+        </p:txBody>
+      </p:sp>
       <p:graphicFrame>
         <p:nvGraphicFramePr>
-          <p:cNvPr id="18" name="Table 0"/>
+          <p:cNvPr id="19" name="Table 0"/>
           <p:cNvGraphicFramePr>
             <a:graphicFrameLocks noGrp="1"/>
           </p:cNvGraphicFramePr>
@@ -17295,348 +19007,6 @@
                         <a:buNone/>
                       </a:pPr>
                       <a:r>
-                        <a:rPr lang="en-US" sz="1400" b="1" dirty="0">
-                          <a:solidFill>
-                            <a:srgbClr val="0F1B2D"/>
-                          </a:solidFill>
-                          <a:latin typeface="Arial" pitchFamily="34" charset="0"/>
-                          <a:ea typeface="Arial" pitchFamily="34" charset="-122"/>
-                          <a:cs typeface="Arial" pitchFamily="34" charset="-120"/>
-                        </a:rPr>
-                        <a:t>Proposed hybrid (OR rule)</a:t>
-                      </a:r>
-                      <a:endParaRPr lang="en-US" sz="1400" dirty="0">
-                        <a:latin typeface="Arial" charset="0"/>
-                        <a:ea typeface="Arial" charset="0"/>
-                        <a:cs typeface="Arial" charset="0"/>
-                      </a:endParaRPr>
-                    </a:p>
-                  </a:txBody>
-                  <a:tcPr marL="73152" marR="73152" marT="73152" marB="73152" anchor="ctr">
-                    <a:lnL w="9525" cap="flat" cmpd="sng" algn="ctr">
-                      <a:solidFill>
-                        <a:srgbClr val="E2E6EC"/>
-                      </a:solidFill>
-                      <a:prstDash val="solid"/>
-                      <a:round/>
-                      <a:headEnd type="none" w="med" len="med"/>
-                      <a:tailEnd type="none" w="med" len="med"/>
-                    </a:lnL>
-                    <a:lnR w="9525" cap="flat" cmpd="sng" algn="ctr">
-                      <a:solidFill>
-                        <a:srgbClr val="E2E6EC"/>
-                      </a:solidFill>
-                      <a:prstDash val="solid"/>
-                      <a:round/>
-                      <a:headEnd type="none" w="med" len="med"/>
-                      <a:tailEnd type="none" w="med" len="med"/>
-                    </a:lnR>
-                    <a:lnT w="9525" cap="flat" cmpd="sng" algn="ctr">
-                      <a:solidFill>
-                        <a:srgbClr val="E2E6EC"/>
-                      </a:solidFill>
-                      <a:prstDash val="solid"/>
-                      <a:round/>
-                      <a:headEnd type="none" w="med" len="med"/>
-                      <a:tailEnd type="none" w="med" len="med"/>
-                    </a:lnT>
-                    <a:lnB w="9525" cap="flat" cmpd="sng" algn="ctr">
-                      <a:solidFill>
-                        <a:srgbClr val="E2E6EC"/>
-                      </a:solidFill>
-                      <a:prstDash val="solid"/>
-                      <a:round/>
-                      <a:headEnd type="none" w="med" len="med"/>
-                      <a:tailEnd type="none" w="med" len="med"/>
-                    </a:lnB>
-                    <a:solidFill>
-                      <a:srgbClr val="EAF1FB"/>
-                    </a:solidFill>
-                  </a:tcPr>
-                </a:tc>
-                <a:tc>
-                  <a:txBody>
-                    <a:bodyPr/>
-                    <a:lstStyle/>
-                    <a:p>
-                      <a:pPr indent="0" marL="0">
-                        <a:buNone/>
-                      </a:pPr>
-                      <a:r>
-                        <a:rPr lang="en-US" sz="1400" b="1" dirty="0">
-                          <a:solidFill>
-                            <a:srgbClr val="0F1B2D"/>
-                          </a:solidFill>
-                          <a:latin typeface="Arial" pitchFamily="34" charset="0"/>
-                          <a:ea typeface="Arial" pitchFamily="34" charset="-122"/>
-                          <a:cs typeface="Arial" pitchFamily="34" charset="-120"/>
-                        </a:rPr>
-                        <a:t>89.13 ± 0.22</a:t>
-                      </a:r>
-                      <a:endParaRPr lang="en-US" sz="1400" dirty="0">
-                        <a:latin typeface="Arial" charset="0"/>
-                        <a:ea typeface="Arial" charset="0"/>
-                        <a:cs typeface="Arial" charset="0"/>
-                      </a:endParaRPr>
-                    </a:p>
-                  </a:txBody>
-                  <a:tcPr marL="73152" marR="73152" marT="73152" marB="73152" anchor="ctr">
-                    <a:lnL w="9525" cap="flat" cmpd="sng" algn="ctr">
-                      <a:solidFill>
-                        <a:srgbClr val="E2E6EC"/>
-                      </a:solidFill>
-                      <a:prstDash val="solid"/>
-                      <a:round/>
-                      <a:headEnd type="none" w="med" len="med"/>
-                      <a:tailEnd type="none" w="med" len="med"/>
-                    </a:lnL>
-                    <a:lnR w="9525" cap="flat" cmpd="sng" algn="ctr">
-                      <a:solidFill>
-                        <a:srgbClr val="E2E6EC"/>
-                      </a:solidFill>
-                      <a:prstDash val="solid"/>
-                      <a:round/>
-                      <a:headEnd type="none" w="med" len="med"/>
-                      <a:tailEnd type="none" w="med" len="med"/>
-                    </a:lnR>
-                    <a:lnT w="9525" cap="flat" cmpd="sng" algn="ctr">
-                      <a:solidFill>
-                        <a:srgbClr val="E2E6EC"/>
-                      </a:solidFill>
-                      <a:prstDash val="solid"/>
-                      <a:round/>
-                      <a:headEnd type="none" w="med" len="med"/>
-                      <a:tailEnd type="none" w="med" len="med"/>
-                    </a:lnT>
-                    <a:lnB w="9525" cap="flat" cmpd="sng" algn="ctr">
-                      <a:solidFill>
-                        <a:srgbClr val="E2E6EC"/>
-                      </a:solidFill>
-                      <a:prstDash val="solid"/>
-                      <a:round/>
-                      <a:headEnd type="none" w="med" len="med"/>
-                      <a:tailEnd type="none" w="med" len="med"/>
-                    </a:lnB>
-                    <a:solidFill>
-                      <a:srgbClr val="EAF1FB"/>
-                    </a:solidFill>
-                  </a:tcPr>
-                </a:tc>
-                <a:tc>
-                  <a:txBody>
-                    <a:bodyPr/>
-                    <a:lstStyle/>
-                    <a:p>
-                      <a:pPr indent="0" marL="0">
-                        <a:buNone/>
-                      </a:pPr>
-                      <a:r>
-                        <a:rPr lang="en-US" sz="1400" b="1" dirty="0">
-                          <a:solidFill>
-                            <a:srgbClr val="0F1B2D"/>
-                          </a:solidFill>
-                          <a:latin typeface="Arial" pitchFamily="34" charset="0"/>
-                          <a:ea typeface="Arial" pitchFamily="34" charset="-122"/>
-                          <a:cs typeface="Arial" pitchFamily="34" charset="-120"/>
-                        </a:rPr>
-                        <a:t>95.99 ± 0.29</a:t>
-                      </a:r>
-                      <a:endParaRPr lang="en-US" sz="1400" dirty="0">
-                        <a:latin typeface="Arial" charset="0"/>
-                        <a:ea typeface="Arial" charset="0"/>
-                        <a:cs typeface="Arial" charset="0"/>
-                      </a:endParaRPr>
-                    </a:p>
-                  </a:txBody>
-                  <a:tcPr marL="73152" marR="73152" marT="73152" marB="73152" anchor="ctr">
-                    <a:lnL w="9525" cap="flat" cmpd="sng" algn="ctr">
-                      <a:solidFill>
-                        <a:srgbClr val="E2E6EC"/>
-                      </a:solidFill>
-                      <a:prstDash val="solid"/>
-                      <a:round/>
-                      <a:headEnd type="none" w="med" len="med"/>
-                      <a:tailEnd type="none" w="med" len="med"/>
-                    </a:lnL>
-                    <a:lnR w="9525" cap="flat" cmpd="sng" algn="ctr">
-                      <a:solidFill>
-                        <a:srgbClr val="E2E6EC"/>
-                      </a:solidFill>
-                      <a:prstDash val="solid"/>
-                      <a:round/>
-                      <a:headEnd type="none" w="med" len="med"/>
-                      <a:tailEnd type="none" w="med" len="med"/>
-                    </a:lnR>
-                    <a:lnT w="9525" cap="flat" cmpd="sng" algn="ctr">
-                      <a:solidFill>
-                        <a:srgbClr val="E2E6EC"/>
-                      </a:solidFill>
-                      <a:prstDash val="solid"/>
-                      <a:round/>
-                      <a:headEnd type="none" w="med" len="med"/>
-                      <a:tailEnd type="none" w="med" len="med"/>
-                    </a:lnT>
-                    <a:lnB w="9525" cap="flat" cmpd="sng" algn="ctr">
-                      <a:solidFill>
-                        <a:srgbClr val="E2E6EC"/>
-                      </a:solidFill>
-                      <a:prstDash val="solid"/>
-                      <a:round/>
-                      <a:headEnd type="none" w="med" len="med"/>
-                      <a:tailEnd type="none" w="med" len="med"/>
-                    </a:lnB>
-                    <a:solidFill>
-                      <a:srgbClr val="EAF1FB"/>
-                    </a:solidFill>
-                  </a:tcPr>
-                </a:tc>
-                <a:tc>
-                  <a:txBody>
-                    <a:bodyPr/>
-                    <a:lstStyle/>
-                    <a:p>
-                      <a:pPr indent="0" marL="0">
-                        <a:buNone/>
-                      </a:pPr>
-                      <a:r>
-                        <a:rPr lang="en-US" sz="1400" b="1" dirty="0">
-                          <a:solidFill>
-                            <a:srgbClr val="0F1B2D"/>
-                          </a:solidFill>
-                          <a:latin typeface="Arial" pitchFamily="34" charset="0"/>
-                          <a:ea typeface="Arial" pitchFamily="34" charset="-122"/>
-                          <a:cs typeface="Arial" pitchFamily="34" charset="-120"/>
-                        </a:rPr>
-                        <a:t>5.90 ± 0.17</a:t>
-                      </a:r>
-                      <a:endParaRPr lang="en-US" sz="1400" dirty="0">
-                        <a:latin typeface="Arial" charset="0"/>
-                        <a:ea typeface="Arial" charset="0"/>
-                        <a:cs typeface="Arial" charset="0"/>
-                      </a:endParaRPr>
-                    </a:p>
-                  </a:txBody>
-                  <a:tcPr marL="73152" marR="73152" marT="73152" marB="73152" anchor="ctr">
-                    <a:lnL w="9525" cap="flat" cmpd="sng" algn="ctr">
-                      <a:solidFill>
-                        <a:srgbClr val="E2E6EC"/>
-                      </a:solidFill>
-                      <a:prstDash val="solid"/>
-                      <a:round/>
-                      <a:headEnd type="none" w="med" len="med"/>
-                      <a:tailEnd type="none" w="med" len="med"/>
-                    </a:lnL>
-                    <a:lnR w="9525" cap="flat" cmpd="sng" algn="ctr">
-                      <a:solidFill>
-                        <a:srgbClr val="E2E6EC"/>
-                      </a:solidFill>
-                      <a:prstDash val="solid"/>
-                      <a:round/>
-                      <a:headEnd type="none" w="med" len="med"/>
-                      <a:tailEnd type="none" w="med" len="med"/>
-                    </a:lnR>
-                    <a:lnT w="9525" cap="flat" cmpd="sng" algn="ctr">
-                      <a:solidFill>
-                        <a:srgbClr val="E2E6EC"/>
-                      </a:solidFill>
-                      <a:prstDash val="solid"/>
-                      <a:round/>
-                      <a:headEnd type="none" w="med" len="med"/>
-                      <a:tailEnd type="none" w="med" len="med"/>
-                    </a:lnT>
-                    <a:lnB w="9525" cap="flat" cmpd="sng" algn="ctr">
-                      <a:solidFill>
-                        <a:srgbClr val="E2E6EC"/>
-                      </a:solidFill>
-                      <a:prstDash val="solid"/>
-                      <a:round/>
-                      <a:headEnd type="none" w="med" len="med"/>
-                      <a:tailEnd type="none" w="med" len="med"/>
-                    </a:lnB>
-                    <a:solidFill>
-                      <a:srgbClr val="EAF1FB"/>
-                    </a:solidFill>
-                  </a:tcPr>
-                </a:tc>
-                <a:tc>
-                  <a:txBody>
-                    <a:bodyPr/>
-                    <a:lstStyle/>
-                    <a:p>
-                      <a:pPr indent="0" marL="0">
-                        <a:buNone/>
-                      </a:pPr>
-                      <a:r>
-                        <a:rPr lang="en-US" sz="1400" b="1" dirty="0">
-                          <a:solidFill>
-                            <a:srgbClr val="0F1B2D"/>
-                          </a:solidFill>
-                          <a:latin typeface="Arial" pitchFamily="34" charset="0"/>
-                          <a:ea typeface="Arial" pitchFamily="34" charset="-122"/>
-                          <a:cs typeface="Arial" pitchFamily="34" charset="-120"/>
-                        </a:rPr>
-                        <a:t>99.04 ± 0.02</a:t>
-                      </a:r>
-                      <a:endParaRPr lang="en-US" sz="1400" dirty="0">
-                        <a:latin typeface="Arial" charset="0"/>
-                        <a:ea typeface="Arial" charset="0"/>
-                        <a:cs typeface="Arial" charset="0"/>
-                      </a:endParaRPr>
-                    </a:p>
-                  </a:txBody>
-                  <a:tcPr marL="73152" marR="73152" marT="73152" marB="73152" anchor="ctr">
-                    <a:lnL w="9525" cap="flat" cmpd="sng" algn="ctr">
-                      <a:solidFill>
-                        <a:srgbClr val="E2E6EC"/>
-                      </a:solidFill>
-                      <a:prstDash val="solid"/>
-                      <a:round/>
-                      <a:headEnd type="none" w="med" len="med"/>
-                      <a:tailEnd type="none" w="med" len="med"/>
-                    </a:lnL>
-                    <a:lnR w="9525" cap="flat" cmpd="sng" algn="ctr">
-                      <a:solidFill>
-                        <a:srgbClr val="E2E6EC"/>
-                      </a:solidFill>
-                      <a:prstDash val="solid"/>
-                      <a:round/>
-                      <a:headEnd type="none" w="med" len="med"/>
-                      <a:tailEnd type="none" w="med" len="med"/>
-                    </a:lnR>
-                    <a:lnT w="9525" cap="flat" cmpd="sng" algn="ctr">
-                      <a:solidFill>
-                        <a:srgbClr val="E2E6EC"/>
-                      </a:solidFill>
-                      <a:prstDash val="solid"/>
-                      <a:round/>
-                      <a:headEnd type="none" w="med" len="med"/>
-                      <a:tailEnd type="none" w="med" len="med"/>
-                    </a:lnT>
-                    <a:lnB w="9525" cap="flat" cmpd="sng" algn="ctr">
-                      <a:solidFill>
-                        <a:srgbClr val="E2E6EC"/>
-                      </a:solidFill>
-                      <a:prstDash val="solid"/>
-                      <a:round/>
-                      <a:headEnd type="none" w="med" len="med"/>
-                      <a:tailEnd type="none" w="med" len="med"/>
-                    </a:lnB>
-                    <a:solidFill>
-                      <a:srgbClr val="EAF1FB"/>
-                    </a:solidFill>
-                  </a:tcPr>
-                </a:tc>
-              </a:tr>
-              <a:tr h="475488">
-                <a:tc>
-                  <a:txBody>
-                    <a:bodyPr/>
-                    <a:lstStyle/>
-                    <a:p>
-                      <a:pPr indent="0" marL="0">
-                        <a:buNone/>
-                      </a:pPr>
-                      <a:r>
                         <a:rPr lang="en-US" sz="1400" dirty="0">
                           <a:solidFill>
                             <a:srgbClr val="0F1B2D"/>
@@ -17645,7 +19015,7 @@
                           <a:ea typeface="Arial" pitchFamily="34" charset="-122"/>
                           <a:cs typeface="Arial" pitchFamily="34" charset="-120"/>
                         </a:rPr>
-                        <a:t>Hybrid, soft vote</a:t>
+                        <a:t>Proposed hybrid (OR rule, as published)</a:t>
                       </a:r>
                       <a:endParaRPr lang="en-US" sz="1400" dirty="0">
                         <a:latin typeface="Arial" charset="0"/>
@@ -17713,7 +19083,7 @@
                           <a:ea typeface="Arial" pitchFamily="34" charset="-122"/>
                           <a:cs typeface="Arial" pitchFamily="34" charset="-120"/>
                         </a:rPr>
-                        <a:t>89.48 ± 0.14</a:t>
+                        <a:t>88.82 ± 0.18</a:t>
                       </a:r>
                       <a:endParaRPr lang="en-US" sz="1400" dirty="0">
                         <a:latin typeface="Arial" charset="0"/>
@@ -17781,7 +19151,7 @@
                           <a:ea typeface="Arial" pitchFamily="34" charset="-122"/>
                           <a:cs typeface="Arial" pitchFamily="34" charset="-120"/>
                         </a:rPr>
-                        <a:t>93.81 ± 0.38</a:t>
+                        <a:t>96.93 ± 0.38</a:t>
                       </a:r>
                       <a:endParaRPr lang="en-US" sz="1400" dirty="0">
                         <a:latin typeface="Arial" charset="0"/>
@@ -17849,7 +19219,7 @@
                           <a:ea typeface="Arial" pitchFamily="34" charset="-122"/>
                           <a:cs typeface="Arial" pitchFamily="34" charset="-120"/>
                         </a:rPr>
-                        <a:t>4.82 ± 0.14</a:t>
+                        <a:t>6.48 ± 0.14</a:t>
                       </a:r>
                       <a:endParaRPr lang="en-US" sz="1400" dirty="0">
                         <a:latin typeface="Arial" charset="0"/>
@@ -17917,7 +19287,7 @@
                           <a:ea typeface="Arial" pitchFamily="34" charset="-122"/>
                           <a:cs typeface="Arial" pitchFamily="34" charset="-120"/>
                         </a:rPr>
-                        <a:t>99.04 ± 0.02</a:t>
+                        <a:t>99.02 ± 0.03</a:t>
                       </a:r>
                       <a:endParaRPr lang="en-US" sz="1400" dirty="0">
                         <a:latin typeface="Arial" charset="0"/>
@@ -17965,6 +19335,348 @@
                     </a:lnB>
                     <a:solidFill>
                       <a:srgbClr val="FFFFFF"/>
+                    </a:solidFill>
+                  </a:tcPr>
+                </a:tc>
+              </a:tr>
+              <a:tr h="475488">
+                <a:tc>
+                  <a:txBody>
+                    <a:bodyPr/>
+                    <a:lstStyle/>
+                    <a:p>
+                      <a:pPr indent="0" marL="0">
+                        <a:buNone/>
+                      </a:pPr>
+                      <a:r>
+                        <a:rPr lang="en-US" sz="1400" b="1" dirty="0">
+                          <a:solidFill>
+                            <a:srgbClr val="0F1B2D"/>
+                          </a:solidFill>
+                          <a:latin typeface="Arial" pitchFamily="34" charset="0"/>
+                          <a:ea typeface="Arial" pitchFamily="34" charset="-122"/>
+                          <a:cs typeface="Arial" pitchFamily="34" charset="-120"/>
+                        </a:rPr>
+                        <a:t>Hybrid, soft vote</a:t>
+                      </a:r>
+                      <a:endParaRPr lang="en-US" sz="1400" dirty="0">
+                        <a:latin typeface="Arial" charset="0"/>
+                        <a:ea typeface="Arial" charset="0"/>
+                        <a:cs typeface="Arial" charset="0"/>
+                      </a:endParaRPr>
+                    </a:p>
+                  </a:txBody>
+                  <a:tcPr marL="73152" marR="73152" marT="73152" marB="73152" anchor="ctr">
+                    <a:lnL w="9525" cap="flat" cmpd="sng" algn="ctr">
+                      <a:solidFill>
+                        <a:srgbClr val="E2E6EC"/>
+                      </a:solidFill>
+                      <a:prstDash val="solid"/>
+                      <a:round/>
+                      <a:headEnd type="none" w="med" len="med"/>
+                      <a:tailEnd type="none" w="med" len="med"/>
+                    </a:lnL>
+                    <a:lnR w="9525" cap="flat" cmpd="sng" algn="ctr">
+                      <a:solidFill>
+                        <a:srgbClr val="E2E6EC"/>
+                      </a:solidFill>
+                      <a:prstDash val="solid"/>
+                      <a:round/>
+                      <a:headEnd type="none" w="med" len="med"/>
+                      <a:tailEnd type="none" w="med" len="med"/>
+                    </a:lnR>
+                    <a:lnT w="9525" cap="flat" cmpd="sng" algn="ctr">
+                      <a:solidFill>
+                        <a:srgbClr val="E2E6EC"/>
+                      </a:solidFill>
+                      <a:prstDash val="solid"/>
+                      <a:round/>
+                      <a:headEnd type="none" w="med" len="med"/>
+                      <a:tailEnd type="none" w="med" len="med"/>
+                    </a:lnT>
+                    <a:lnB w="9525" cap="flat" cmpd="sng" algn="ctr">
+                      <a:solidFill>
+                        <a:srgbClr val="E2E6EC"/>
+                      </a:solidFill>
+                      <a:prstDash val="solid"/>
+                      <a:round/>
+                      <a:headEnd type="none" w="med" len="med"/>
+                      <a:tailEnd type="none" w="med" len="med"/>
+                    </a:lnB>
+                    <a:solidFill>
+                      <a:srgbClr val="E7F4ED"/>
+                    </a:solidFill>
+                  </a:tcPr>
+                </a:tc>
+                <a:tc>
+                  <a:txBody>
+                    <a:bodyPr/>
+                    <a:lstStyle/>
+                    <a:p>
+                      <a:pPr indent="0" marL="0">
+                        <a:buNone/>
+                      </a:pPr>
+                      <a:r>
+                        <a:rPr lang="en-US" sz="1400" b="1" dirty="0">
+                          <a:solidFill>
+                            <a:srgbClr val="0F1B2D"/>
+                          </a:solidFill>
+                          <a:latin typeface="Arial" pitchFamily="34" charset="0"/>
+                          <a:ea typeface="Arial" pitchFamily="34" charset="-122"/>
+                          <a:cs typeface="Arial" pitchFamily="34" charset="-120"/>
+                        </a:rPr>
+                        <a:t>89.21 ± 0.24</a:t>
+                      </a:r>
+                      <a:endParaRPr lang="en-US" sz="1400" dirty="0">
+                        <a:latin typeface="Arial" charset="0"/>
+                        <a:ea typeface="Arial" charset="0"/>
+                        <a:cs typeface="Arial" charset="0"/>
+                      </a:endParaRPr>
+                    </a:p>
+                  </a:txBody>
+                  <a:tcPr marL="73152" marR="73152" marT="73152" marB="73152" anchor="ctr">
+                    <a:lnL w="9525" cap="flat" cmpd="sng" algn="ctr">
+                      <a:solidFill>
+                        <a:srgbClr val="E2E6EC"/>
+                      </a:solidFill>
+                      <a:prstDash val="solid"/>
+                      <a:round/>
+                      <a:headEnd type="none" w="med" len="med"/>
+                      <a:tailEnd type="none" w="med" len="med"/>
+                    </a:lnL>
+                    <a:lnR w="9525" cap="flat" cmpd="sng" algn="ctr">
+                      <a:solidFill>
+                        <a:srgbClr val="E2E6EC"/>
+                      </a:solidFill>
+                      <a:prstDash val="solid"/>
+                      <a:round/>
+                      <a:headEnd type="none" w="med" len="med"/>
+                      <a:tailEnd type="none" w="med" len="med"/>
+                    </a:lnR>
+                    <a:lnT w="9525" cap="flat" cmpd="sng" algn="ctr">
+                      <a:solidFill>
+                        <a:srgbClr val="E2E6EC"/>
+                      </a:solidFill>
+                      <a:prstDash val="solid"/>
+                      <a:round/>
+                      <a:headEnd type="none" w="med" len="med"/>
+                      <a:tailEnd type="none" w="med" len="med"/>
+                    </a:lnT>
+                    <a:lnB w="9525" cap="flat" cmpd="sng" algn="ctr">
+                      <a:solidFill>
+                        <a:srgbClr val="E2E6EC"/>
+                      </a:solidFill>
+                      <a:prstDash val="solid"/>
+                      <a:round/>
+                      <a:headEnd type="none" w="med" len="med"/>
+                      <a:tailEnd type="none" w="med" len="med"/>
+                    </a:lnB>
+                    <a:solidFill>
+                      <a:srgbClr val="E7F4ED"/>
+                    </a:solidFill>
+                  </a:tcPr>
+                </a:tc>
+                <a:tc>
+                  <a:txBody>
+                    <a:bodyPr/>
+                    <a:lstStyle/>
+                    <a:p>
+                      <a:pPr indent="0" marL="0">
+                        <a:buNone/>
+                      </a:pPr>
+                      <a:r>
+                        <a:rPr lang="en-US" sz="1400" b="1" dirty="0">
+                          <a:solidFill>
+                            <a:srgbClr val="0F1B2D"/>
+                          </a:solidFill>
+                          <a:latin typeface="Arial" pitchFamily="34" charset="0"/>
+                          <a:ea typeface="Arial" pitchFamily="34" charset="-122"/>
+                          <a:cs typeface="Arial" pitchFamily="34" charset="-120"/>
+                        </a:rPr>
+                        <a:t>95.09 ± 0.47</a:t>
+                      </a:r>
+                      <a:endParaRPr lang="en-US" sz="1400" dirty="0">
+                        <a:latin typeface="Arial" charset="0"/>
+                        <a:ea typeface="Arial" charset="0"/>
+                        <a:cs typeface="Arial" charset="0"/>
+                      </a:endParaRPr>
+                    </a:p>
+                  </a:txBody>
+                  <a:tcPr marL="73152" marR="73152" marT="73152" marB="73152" anchor="ctr">
+                    <a:lnL w="9525" cap="flat" cmpd="sng" algn="ctr">
+                      <a:solidFill>
+                        <a:srgbClr val="E2E6EC"/>
+                      </a:solidFill>
+                      <a:prstDash val="solid"/>
+                      <a:round/>
+                      <a:headEnd type="none" w="med" len="med"/>
+                      <a:tailEnd type="none" w="med" len="med"/>
+                    </a:lnL>
+                    <a:lnR w="9525" cap="flat" cmpd="sng" algn="ctr">
+                      <a:solidFill>
+                        <a:srgbClr val="E2E6EC"/>
+                      </a:solidFill>
+                      <a:prstDash val="solid"/>
+                      <a:round/>
+                      <a:headEnd type="none" w="med" len="med"/>
+                      <a:tailEnd type="none" w="med" len="med"/>
+                    </a:lnR>
+                    <a:lnT w="9525" cap="flat" cmpd="sng" algn="ctr">
+                      <a:solidFill>
+                        <a:srgbClr val="E2E6EC"/>
+                      </a:solidFill>
+                      <a:prstDash val="solid"/>
+                      <a:round/>
+                      <a:headEnd type="none" w="med" len="med"/>
+                      <a:tailEnd type="none" w="med" len="med"/>
+                    </a:lnT>
+                    <a:lnB w="9525" cap="flat" cmpd="sng" algn="ctr">
+                      <a:solidFill>
+                        <a:srgbClr val="E2E6EC"/>
+                      </a:solidFill>
+                      <a:prstDash val="solid"/>
+                      <a:round/>
+                      <a:headEnd type="none" w="med" len="med"/>
+                      <a:tailEnd type="none" w="med" len="med"/>
+                    </a:lnB>
+                    <a:solidFill>
+                      <a:srgbClr val="E7F4ED"/>
+                    </a:solidFill>
+                  </a:tcPr>
+                </a:tc>
+                <a:tc>
+                  <a:txBody>
+                    <a:bodyPr/>
+                    <a:lstStyle/>
+                    <a:p>
+                      <a:pPr indent="0" marL="0">
+                        <a:buNone/>
+                      </a:pPr>
+                      <a:r>
+                        <a:rPr lang="en-US" sz="1400" b="1" dirty="0">
+                          <a:solidFill>
+                            <a:srgbClr val="0F1B2D"/>
+                          </a:solidFill>
+                          <a:latin typeface="Arial" pitchFamily="34" charset="0"/>
+                          <a:ea typeface="Arial" pitchFamily="34" charset="-122"/>
+                          <a:cs typeface="Arial" pitchFamily="34" charset="-120"/>
+                        </a:rPr>
+                        <a:t>5.50 ± 0.16</a:t>
+                      </a:r>
+                      <a:endParaRPr lang="en-US" sz="1400" dirty="0">
+                        <a:latin typeface="Arial" charset="0"/>
+                        <a:ea typeface="Arial" charset="0"/>
+                        <a:cs typeface="Arial" charset="0"/>
+                      </a:endParaRPr>
+                    </a:p>
+                  </a:txBody>
+                  <a:tcPr marL="73152" marR="73152" marT="73152" marB="73152" anchor="ctr">
+                    <a:lnL w="9525" cap="flat" cmpd="sng" algn="ctr">
+                      <a:solidFill>
+                        <a:srgbClr val="E2E6EC"/>
+                      </a:solidFill>
+                      <a:prstDash val="solid"/>
+                      <a:round/>
+                      <a:headEnd type="none" w="med" len="med"/>
+                      <a:tailEnd type="none" w="med" len="med"/>
+                    </a:lnL>
+                    <a:lnR w="9525" cap="flat" cmpd="sng" algn="ctr">
+                      <a:solidFill>
+                        <a:srgbClr val="E2E6EC"/>
+                      </a:solidFill>
+                      <a:prstDash val="solid"/>
+                      <a:round/>
+                      <a:headEnd type="none" w="med" len="med"/>
+                      <a:tailEnd type="none" w="med" len="med"/>
+                    </a:lnR>
+                    <a:lnT w="9525" cap="flat" cmpd="sng" algn="ctr">
+                      <a:solidFill>
+                        <a:srgbClr val="E2E6EC"/>
+                      </a:solidFill>
+                      <a:prstDash val="solid"/>
+                      <a:round/>
+                      <a:headEnd type="none" w="med" len="med"/>
+                      <a:tailEnd type="none" w="med" len="med"/>
+                    </a:lnT>
+                    <a:lnB w="9525" cap="flat" cmpd="sng" algn="ctr">
+                      <a:solidFill>
+                        <a:srgbClr val="E2E6EC"/>
+                      </a:solidFill>
+                      <a:prstDash val="solid"/>
+                      <a:round/>
+                      <a:headEnd type="none" w="med" len="med"/>
+                      <a:tailEnd type="none" w="med" len="med"/>
+                    </a:lnB>
+                    <a:solidFill>
+                      <a:srgbClr val="E7F4ED"/>
+                    </a:solidFill>
+                  </a:tcPr>
+                </a:tc>
+                <a:tc>
+                  <a:txBody>
+                    <a:bodyPr/>
+                    <a:lstStyle/>
+                    <a:p>
+                      <a:pPr indent="0" marL="0">
+                        <a:buNone/>
+                      </a:pPr>
+                      <a:r>
+                        <a:rPr lang="en-US" sz="1400" b="1" dirty="0">
+                          <a:solidFill>
+                            <a:srgbClr val="0F1B2D"/>
+                          </a:solidFill>
+                          <a:latin typeface="Arial" pitchFamily="34" charset="0"/>
+                          <a:ea typeface="Arial" pitchFamily="34" charset="-122"/>
+                          <a:cs typeface="Arial" pitchFamily="34" charset="-120"/>
+                        </a:rPr>
+                        <a:t>99.02 ± 0.03</a:t>
+                      </a:r>
+                      <a:endParaRPr lang="en-US" sz="1400" dirty="0">
+                        <a:latin typeface="Arial" charset="0"/>
+                        <a:ea typeface="Arial" charset="0"/>
+                        <a:cs typeface="Arial" charset="0"/>
+                      </a:endParaRPr>
+                    </a:p>
+                  </a:txBody>
+                  <a:tcPr marL="73152" marR="73152" marT="73152" marB="73152" anchor="ctr">
+                    <a:lnL w="9525" cap="flat" cmpd="sng" algn="ctr">
+                      <a:solidFill>
+                        <a:srgbClr val="E2E6EC"/>
+                      </a:solidFill>
+                      <a:prstDash val="solid"/>
+                      <a:round/>
+                      <a:headEnd type="none" w="med" len="med"/>
+                      <a:tailEnd type="none" w="med" len="med"/>
+                    </a:lnL>
+                    <a:lnR w="9525" cap="flat" cmpd="sng" algn="ctr">
+                      <a:solidFill>
+                        <a:srgbClr val="E2E6EC"/>
+                      </a:solidFill>
+                      <a:prstDash val="solid"/>
+                      <a:round/>
+                      <a:headEnd type="none" w="med" len="med"/>
+                      <a:tailEnd type="none" w="med" len="med"/>
+                    </a:lnR>
+                    <a:lnT w="9525" cap="flat" cmpd="sng" algn="ctr">
+                      <a:solidFill>
+                        <a:srgbClr val="E2E6EC"/>
+                      </a:solidFill>
+                      <a:prstDash val="solid"/>
+                      <a:round/>
+                      <a:headEnd type="none" w="med" len="med"/>
+                      <a:tailEnd type="none" w="med" len="med"/>
+                    </a:lnT>
+                    <a:lnB w="9525" cap="flat" cmpd="sng" algn="ctr">
+                      <a:solidFill>
+                        <a:srgbClr val="E2E6EC"/>
+                      </a:solidFill>
+                      <a:prstDash val="solid"/>
+                      <a:round/>
+                      <a:headEnd type="none" w="med" len="med"/>
+                      <a:tailEnd type="none" w="med" len="med"/>
+                    </a:lnB>
+                    <a:solidFill>
+                      <a:srgbClr val="E7F4ED"/>
                     </a:solidFill>
                   </a:tcPr>
                 </a:tc>
@@ -18055,7 +19767,7 @@
                           <a:ea typeface="Arial" pitchFamily="34" charset="-122"/>
                           <a:cs typeface="Arial" pitchFamily="34" charset="-120"/>
                         </a:rPr>
-                        <a:t>89.11 ± 0.12</a:t>
+                        <a:t>89.00 ± 0.21</a:t>
                       </a:r>
                       <a:endParaRPr lang="en-US" sz="1400" dirty="0">
                         <a:latin typeface="Arial" charset="0"/>
@@ -18123,7 +19835,7 @@
                           <a:ea typeface="Arial" pitchFamily="34" charset="-122"/>
                           <a:cs typeface="Arial" pitchFamily="34" charset="-120"/>
                         </a:rPr>
-                        <a:t>92.94 ± 0.24</a:t>
+                        <a:t>94.63 ± 0.22</a:t>
                       </a:r>
                       <a:endParaRPr lang="en-US" sz="1400" dirty="0">
                         <a:latin typeface="Arial" charset="0"/>
@@ -18191,7 +19903,7 @@
                           <a:ea typeface="Arial" pitchFamily="34" charset="-122"/>
                           <a:cs typeface="Arial" pitchFamily="34" charset="-120"/>
                         </a:rPr>
-                        <a:t>4.76 ± 0.09</a:t>
+                        <a:t>5.47 ± 0.12</a:t>
                       </a:r>
                       <a:endParaRPr lang="en-US" sz="1400" dirty="0">
                         <a:latin typeface="Arial" charset="0"/>
@@ -18259,7 +19971,7 @@
                           <a:ea typeface="Arial" pitchFamily="34" charset="-122"/>
                           <a:cs typeface="Arial" pitchFamily="34" charset="-120"/>
                         </a:rPr>
-                        <a:t>98.86 ± 0.05</a:t>
+                        <a:t>98.83 ± 0.02</a:t>
                       </a:r>
                       <a:endParaRPr lang="en-US" sz="1400" dirty="0">
                         <a:latin typeface="Arial" charset="0"/>
@@ -18397,7 +20109,7 @@
                           <a:ea typeface="Arial" pitchFamily="34" charset="-122"/>
                           <a:cs typeface="Arial" pitchFamily="34" charset="-120"/>
                         </a:rPr>
-                        <a:t>89.25 ± 0.23</a:t>
+                        <a:t>89.01 ± 0.25</a:t>
                       </a:r>
                       <a:endParaRPr lang="en-US" sz="1400" dirty="0">
                         <a:latin typeface="Arial" charset="0"/>
@@ -18465,7 +20177,7 @@
                           <a:ea typeface="Arial" pitchFamily="34" charset="-122"/>
                           <a:cs typeface="Arial" pitchFamily="34" charset="-120"/>
                         </a:rPr>
-                        <a:t>93.56 ± 0.52</a:t>
+                        <a:t>94.68 ± 0.51</a:t>
                       </a:r>
                       <a:endParaRPr lang="en-US" sz="1400" dirty="0">
                         <a:latin typeface="Arial" charset="0"/>
@@ -18533,7 +20245,7 @@
                           <a:ea typeface="Arial" pitchFamily="34" charset="-122"/>
                           <a:cs typeface="Arial" pitchFamily="34" charset="-120"/>
                         </a:rPr>
-                        <a:t>4.89 ± 0.20</a:t>
+                        <a:t>5.49 ± 0.17</a:t>
                       </a:r>
                       <a:endParaRPr lang="en-US" sz="1400" dirty="0">
                         <a:latin typeface="Arial" charset="0"/>
@@ -18601,7 +20313,7 @@
                           <a:ea typeface="Arial" pitchFamily="34" charset="-122"/>
                           <a:cs typeface="Arial" pitchFamily="34" charset="-120"/>
                         </a:rPr>
-                        <a:t>98.96 ± 0.03</a:t>
+                        <a:t>98.95 ± 0.06</a:t>
                       </a:r>
                       <a:endParaRPr lang="en-US" sz="1400" dirty="0">
                         <a:latin typeface="Arial" charset="0"/>
@@ -18778,7 +20490,7 @@
                 <a:ea typeface="Arial" pitchFamily="34" charset="-122"/>
                 <a:cs typeface="Arial" pitchFamily="34" charset="-120"/>
               </a:rPr>
-              <a:t>Tied on F1</a:t>
+              <a:t>OR hybrid: no gain</a:t>
             </a:r>
             <a:endParaRPr lang="en-US" sz="1500" dirty="0"/>
           </a:p>
@@ -18817,7 +20529,7 @@
                 <a:ea typeface="Arial" pitchFamily="34" charset="-122"/>
                 <a:cs typeface="Arial" pitchFamily="34" charset="-120"/>
               </a:rPr>
-              <a:t>89.1–89.5% for all four; the differences are within run-to-run noise</a:t>
+              <a:t>F1 88.82% vs Random Forest 89.00% and XGBoost 89.01%</a:t>
             </a:r>
             <a:endParaRPr lang="en-US" sz="1250" dirty="0"/>
           </a:p>
@@ -18838,11 +20550,11 @@
             <a:avLst/>
           </a:prstGeom>
           <a:solidFill>
-            <a:srgbClr val="E0533A"/>
-          </a:solidFill>
-          <a:ln w="12700">
-            <a:solidFill>
-              <a:srgbClr val="E0533A"/>
+            <a:srgbClr val="1E8A5F"/>
+          </a:solidFill>
+          <a:ln w="12700">
+            <a:solidFill>
+              <a:srgbClr val="1E8A5F"/>
             </a:solidFill>
             <a:prstDash val="solid"/>
           </a:ln>
@@ -18881,6 +20593,133 @@
         <p:spPr>
           <a:xfrm>
             <a:off x="5115458" y="4983480"/>
+            <a:ext cx="2646578" cy="365760"/>
+          </a:xfrm>
+          <a:prstGeom prst="rect">
+            <a:avLst/>
+          </a:prstGeom>
+          <a:noFill/>
+          <a:ln/>
+        </p:spPr>
+        <p:txBody>
+          <a:bodyPr wrap="square" lIns="0" tIns="0" rIns="0" bIns="0" rtlCol="0" anchor="t"/>
+          <a:lstStyle/>
+          <a:p>
+            <a:pPr indent="0" marL="0">
+              <a:buNone/>
+            </a:pPr>
+            <a:r>
+              <a:rPr lang="en-US" sz="1500" b="1" dirty="0">
+                <a:solidFill>
+                  <a:srgbClr val="0F1B2D"/>
+                </a:solidFill>
+                <a:latin typeface="Arial" pitchFamily="34" charset="0"/>
+                <a:ea typeface="Arial" pitchFamily="34" charset="-122"/>
+                <a:cs typeface="Arial" pitchFamily="34" charset="-120"/>
+              </a:rPr>
+              <a:t>Soft vote edges ahead</a:t>
+            </a:r>
+            <a:endParaRPr lang="en-US" sz="1500" dirty="0"/>
+          </a:p>
+        </p:txBody>
+      </p:sp>
+      <p:sp>
+        <p:nvSpPr>
+          <p:cNvPr id="29" name="Text 24"/>
+          <p:cNvSpPr txBox="1"/>
+          <p:nvPr/>
+        </p:nvSpPr>
+        <p:spPr>
+          <a:xfrm>
+            <a:off x="5115458" y="5367528"/>
+            <a:ext cx="2646578" cy="914400"/>
+          </a:xfrm>
+          <a:prstGeom prst="rect">
+            <a:avLst/>
+          </a:prstGeom>
+          <a:noFill/>
+          <a:ln/>
+        </p:spPr>
+        <p:txBody>
+          <a:bodyPr wrap="square" lIns="0" tIns="0" rIns="0" bIns="0" rtlCol="0" anchor="t"/>
+          <a:lstStyle/>
+          <a:p>
+            <a:pPr indent="0" marL="0">
+              <a:buNone/>
+            </a:pPr>
+            <a:r>
+              <a:rPr lang="en-US" sz="1250" dirty="0">
+                <a:solidFill>
+                  <a:srgbClr val="55606E"/>
+                </a:solidFill>
+                <a:latin typeface="Arial" pitchFamily="34" charset="0"/>
+                <a:ea typeface="Arial" pitchFamily="34" charset="-122"/>
+                <a:cs typeface="Arial" pitchFamily="34" charset="-120"/>
+              </a:rPr>
+              <a:t>Best mean F1 (89.21%); ahead of XGBoost and the OR hybrid on 5/5 seeds, Random Forest on 4/5</a:t>
+            </a:r>
+            <a:endParaRPr lang="en-US" sz="1250" dirty="0"/>
+          </a:p>
+        </p:txBody>
+      </p:sp>
+      <p:sp>
+        <p:nvSpPr>
+          <p:cNvPr id="30" name="Shape 25"/>
+          <p:cNvSpPr/>
+          <p:nvPr/>
+        </p:nvSpPr>
+        <p:spPr>
+          <a:xfrm>
+            <a:off x="8082077" y="4937760"/>
+            <a:ext cx="530352" cy="530352"/>
+          </a:xfrm>
+          <a:prstGeom prst="ellipse">
+            <a:avLst/>
+          </a:prstGeom>
+          <a:solidFill>
+            <a:srgbClr val="E0533A"/>
+          </a:solidFill>
+          <a:ln w="12700">
+            <a:solidFill>
+              <a:srgbClr val="E0533A"/>
+            </a:solidFill>
+            <a:prstDash val="solid"/>
+          </a:ln>
+        </p:spPr>
+      </p:sp>
+      <p:pic>
+        <p:nvPicPr>
+          <p:cNvPr id="31" name="Image 2" descr="preencoded.png">    </p:cNvPr>
+          <p:cNvPicPr>
+            <a:picLocks noChangeAspect="1"/>
+          </p:cNvPicPr>
+          <p:nvPr/>
+        </p:nvPicPr>
+        <p:blipFill>
+          <a:blip r:embed="rId3"/>
+          <a:stretch>
+            <a:fillRect/>
+          </a:stretch>
+        </p:blipFill>
+        <p:spPr>
+          <a:xfrm>
+            <a:off x="8225272" y="5080955"/>
+            <a:ext cx="243962" cy="243962"/>
+          </a:xfrm>
+          <a:prstGeom prst="rect">
+            <a:avLst/>
+          </a:prstGeom>
+        </p:spPr>
+      </p:pic>
+      <p:sp>
+        <p:nvSpPr>
+          <p:cNvPr id="32" name="Text 26"/>
+          <p:cNvSpPr txBox="1"/>
+          <p:nvPr/>
+        </p:nvSpPr>
+        <p:spPr>
+          <a:xfrm>
+            <a:off x="8813597" y="4983480"/>
             <a:ext cx="2646578" cy="365760"/>
           </a:xfrm>
           <a:prstGeom prst="rect">
@@ -18913,13 +20752,13 @@
       </p:sp>
       <p:sp>
         <p:nvSpPr>
-          <p:cNvPr id="29" name="Text 24"/>
+          <p:cNvPr id="33" name="Text 27"/>
           <p:cNvSpPr txBox="1"/>
           <p:nvPr/>
         </p:nvSpPr>
         <p:spPr>
           <a:xfrm>
-            <a:off x="5115458" y="5367528"/>
+            <a:off x="8813597" y="5367528"/>
             <a:ext cx="2646578" cy="914400"/>
           </a:xfrm>
           <a:prstGeom prst="rect">
@@ -18944,134 +20783,7 @@
                 <a:ea typeface="Arial" pitchFamily="34" charset="-122"/>
                 <a:cs typeface="Arial" pitchFamily="34" charset="-120"/>
               </a:rPr>
-              <a:t>Highest recall (96.0% vs ≈ 93%), but FPR 5.9% vs ≈ 4.8%</a:t>
-            </a:r>
-            <a:endParaRPr lang="en-US" sz="1250" dirty="0"/>
-          </a:p>
-        </p:txBody>
-      </p:sp>
-      <p:sp>
-        <p:nvSpPr>
-          <p:cNvPr id="30" name="Shape 25"/>
-          <p:cNvSpPr/>
-          <p:nvPr/>
-        </p:nvSpPr>
-        <p:spPr>
-          <a:xfrm>
-            <a:off x="8082077" y="4937760"/>
-            <a:ext cx="530352" cy="530352"/>
-          </a:xfrm>
-          <a:prstGeom prst="ellipse">
-            <a:avLst/>
-          </a:prstGeom>
-          <a:solidFill>
-            <a:srgbClr val="2A78D6"/>
-          </a:solidFill>
-          <a:ln w="12700">
-            <a:solidFill>
-              <a:srgbClr val="2A78D6"/>
-            </a:solidFill>
-            <a:prstDash val="solid"/>
-          </a:ln>
-        </p:spPr>
-      </p:sp>
-      <p:pic>
-        <p:nvPicPr>
-          <p:cNvPr id="31" name="Image 2" descr="preencoded.png">    </p:cNvPr>
-          <p:cNvPicPr>
-            <a:picLocks noChangeAspect="1"/>
-          </p:cNvPicPr>
-          <p:nvPr/>
-        </p:nvPicPr>
-        <p:blipFill>
-          <a:blip r:embed="rId3"/>
-          <a:stretch>
-            <a:fillRect/>
-          </a:stretch>
-        </p:blipFill>
-        <p:spPr>
-          <a:xfrm>
-            <a:off x="8225272" y="5080955"/>
-            <a:ext cx="243962" cy="243962"/>
-          </a:xfrm>
-          <a:prstGeom prst="rect">
-            <a:avLst/>
-          </a:prstGeom>
-        </p:spPr>
-      </p:pic>
-      <p:sp>
-        <p:nvSpPr>
-          <p:cNvPr id="32" name="Text 26"/>
-          <p:cNvSpPr txBox="1"/>
-          <p:nvPr/>
-        </p:nvSpPr>
-        <p:spPr>
-          <a:xfrm>
-            <a:off x="8813597" y="4983480"/>
-            <a:ext cx="2646578" cy="365760"/>
-          </a:xfrm>
-          <a:prstGeom prst="rect">
-            <a:avLst/>
-          </a:prstGeom>
-          <a:noFill/>
-          <a:ln/>
-        </p:spPr>
-        <p:txBody>
-          <a:bodyPr wrap="square" lIns="0" tIns="0" rIns="0" bIns="0" rtlCol="0" anchor="t"/>
-          <a:lstStyle/>
-          <a:p>
-            <a:pPr indent="0" marL="0">
-              <a:buNone/>
-            </a:pPr>
-            <a:r>
-              <a:rPr lang="en-US" sz="1500" b="1" dirty="0">
-                <a:solidFill>
-                  <a:srgbClr val="0F1B2D"/>
-                </a:solidFill>
-                <a:latin typeface="Arial" pitchFamily="34" charset="0"/>
-                <a:ea typeface="Arial" pitchFamily="34" charset="-122"/>
-                <a:cs typeface="Arial" pitchFamily="34" charset="-120"/>
-              </a:rPr>
-              <a:t>Best ranking</a:t>
-            </a:r>
-            <a:endParaRPr lang="en-US" sz="1500" dirty="0"/>
-          </a:p>
-        </p:txBody>
-      </p:sp>
-      <p:sp>
-        <p:nvSpPr>
-          <p:cNvPr id="33" name="Text 27"/>
-          <p:cNvSpPr txBox="1"/>
-          <p:nvPr/>
-        </p:nvSpPr>
-        <p:spPr>
-          <a:xfrm>
-            <a:off x="8813597" y="5367528"/>
-            <a:ext cx="2646578" cy="914400"/>
-          </a:xfrm>
-          <a:prstGeom prst="rect">
-            <a:avLst/>
-          </a:prstGeom>
-          <a:noFill/>
-          <a:ln/>
-        </p:spPr>
-        <p:txBody>
-          <a:bodyPr wrap="square" lIns="0" tIns="0" rIns="0" bIns="0" rtlCol="0" anchor="t"/>
-          <a:lstStyle/>
-          <a:p>
-            <a:pPr indent="0" marL="0">
-              <a:buNone/>
-            </a:pPr>
-            <a:r>
-              <a:rPr lang="en-US" sz="1250" dirty="0">
-                <a:solidFill>
-                  <a:srgbClr val="55606E"/>
-                </a:solidFill>
-                <a:latin typeface="Arial" pitchFamily="34" charset="0"/>
-                <a:ea typeface="Arial" pitchFamily="34" charset="-122"/>
-                <a:cs typeface="Arial" pitchFamily="34" charset="-120"/>
-              </a:rPr>
-              <a:t>Highest AUC: 99.04% vs 98.86% (RF) and 98.96% (XGBoost)</a:t>
+              <a:t>Highest recall (96.9%), but FPR 6.5% vs 5.5% for Random Forest</a:t>
             </a:r>
             <a:endParaRPr lang="en-US" sz="1250" dirty="0"/>
           </a:p>
@@ -19119,1444 +20831,6 @@
       <p:sp>
         <p:nvSpPr>
           <p:cNvPr id="35" name="Text 29"/>
-          <p:cNvSpPr txBox="1"/>
-          <p:nvPr/>
-        </p:nvSpPr>
-        <p:spPr>
-          <a:xfrm>
-            <a:off x="10591495" y="6400800"/>
-            <a:ext cx="914400" cy="228600"/>
-          </a:xfrm>
-          <a:prstGeom prst="rect">
-            <a:avLst/>
-          </a:prstGeom>
-          <a:noFill/>
-          <a:ln/>
-        </p:spPr>
-        <p:txBody>
-          <a:bodyPr wrap="square" lIns="0" tIns="0" rIns="0" bIns="0" rtlCol="0" anchor="t"/>
-          <a:lstStyle/>
-          <a:p>
-            <a:pPr algn="r" indent="0" marL="0">
-              <a:buNone/>
-            </a:pPr>
-            <a:r>
-              <a:rPr lang="en-US" sz="900" dirty="0">
-                <a:solidFill>
-                  <a:srgbClr val="8A94A3"/>
-                </a:solidFill>
-                <a:latin typeface="Arial" pitchFamily="34" charset="0"/>
-                <a:ea typeface="Arial" pitchFamily="34" charset="-122"/>
-                <a:cs typeface="Arial" pitchFamily="34" charset="-120"/>
-              </a:rPr>
-              <a:t>17</a:t>
-            </a:r>
-            <a:endParaRPr lang="en-US" sz="900" dirty="0"/>
-          </a:p>
-        </p:txBody>
-      </p:sp>
-    </p:spTree>
-  </p:cSld>
-  <p:clrMapOvr>
-    <a:masterClrMapping/>
-  </p:clrMapOvr>
-</p:sld>
-</file>
-
-<file path=ppt/slides/slide18.xml><?xml version="1.0" encoding="utf-8"?>
-<p:sld xmlns:a="http://schemas.openxmlformats.org/drawingml/2006/main" xmlns:r="http://schemas.openxmlformats.org/officeDocument/2006/relationships" xmlns:p="http://schemas.openxmlformats.org/presentationml/2006/main">
-  <p:cSld name="Slide 18">
-    <p:bg>
-      <p:bgPr>
-        <a:solidFill>
-          <a:srgbClr val="FFFFFF"/>
-        </a:solidFill>
-      </p:bgPr>
-    </p:bg>
-    <p:spTree>
-      <p:nvGrpSpPr>
-        <p:cNvPr id="1" name=""/>
-        <p:cNvGrpSpPr/>
-        <p:nvPr/>
-      </p:nvGrpSpPr>
-      <p:grpSpPr>
-        <a:xfrm>
-          <a:off x="0" y="0"/>
-          <a:ext cx="0" cy="0"/>
-          <a:chOff x="0" y="0"/>
-          <a:chExt cx="0" cy="0"/>
-        </a:xfrm>
-      </p:grpSpPr>
-      <p:sp>
-        <p:nvSpPr>
-          <p:cNvPr id="2" name="Shape 0"/>
-          <p:cNvSpPr/>
-          <p:nvPr/>
-        </p:nvSpPr>
-        <p:spPr>
-          <a:xfrm flipV="1">
-            <a:off x="10087295" y="470002"/>
-            <a:ext cx="288950" cy="416966"/>
-          </a:xfrm>
-          <a:prstGeom prst="line">
-            <a:avLst/>
-          </a:prstGeom>
-          <a:noFill/>
-          <a:ln w="9525">
-            <a:solidFill>
-              <a:srgbClr val="DCE2EA"/>
-            </a:solidFill>
-            <a:prstDash val="solid"/>
-          </a:ln>
-        </p:spPr>
-      </p:sp>
-      <p:sp>
-        <p:nvSpPr>
-          <p:cNvPr id="3" name="Shape 1"/>
-          <p:cNvSpPr/>
-          <p:nvPr/>
-        </p:nvSpPr>
-        <p:spPr>
-          <a:xfrm>
-            <a:off x="10087295" y="886968"/>
-            <a:ext cx="549006" cy="69494"/>
-          </a:xfrm>
-          <a:prstGeom prst="line">
-            <a:avLst/>
-          </a:prstGeom>
-          <a:noFill/>
-          <a:ln w="9525">
-            <a:solidFill>
-              <a:srgbClr val="DCE2EA"/>
-            </a:solidFill>
-            <a:prstDash val="solid"/>
-          </a:ln>
-        </p:spPr>
-      </p:sp>
-      <p:sp>
-        <p:nvSpPr>
-          <p:cNvPr id="4" name="Shape 2"/>
-          <p:cNvSpPr/>
-          <p:nvPr/>
-        </p:nvSpPr>
-        <p:spPr>
-          <a:xfrm>
-            <a:off x="10376245" y="470002"/>
-            <a:ext cx="549006" cy="156362"/>
-          </a:xfrm>
-          <a:prstGeom prst="line">
-            <a:avLst/>
-          </a:prstGeom>
-          <a:noFill/>
-          <a:ln w="9525">
-            <a:solidFill>
-              <a:srgbClr val="F2B7A8"/>
-            </a:solidFill>
-            <a:prstDash val="solid"/>
-          </a:ln>
-        </p:spPr>
-      </p:sp>
-      <p:sp>
-        <p:nvSpPr>
-          <p:cNvPr id="5" name="Shape 3"/>
-          <p:cNvSpPr/>
-          <p:nvPr/>
-        </p:nvSpPr>
-        <p:spPr>
-          <a:xfrm flipV="1">
-            <a:off x="10636301" y="626364"/>
-            <a:ext cx="288950" cy="330098"/>
-          </a:xfrm>
-          <a:prstGeom prst="line">
-            <a:avLst/>
-          </a:prstGeom>
-          <a:noFill/>
-          <a:ln w="9525">
-            <a:solidFill>
-              <a:srgbClr val="F2B7A8"/>
-            </a:solidFill>
-            <a:prstDash val="solid"/>
-          </a:ln>
-        </p:spPr>
-      </p:sp>
-      <p:sp>
-        <p:nvSpPr>
-          <p:cNvPr id="6" name="Shape 4"/>
-          <p:cNvSpPr/>
-          <p:nvPr/>
-        </p:nvSpPr>
-        <p:spPr>
-          <a:xfrm flipV="1">
-            <a:off x="10925251" y="522122"/>
-            <a:ext cx="534558" cy="104242"/>
-          </a:xfrm>
-          <a:prstGeom prst="line">
-            <a:avLst/>
-          </a:prstGeom>
-          <a:noFill/>
-          <a:ln w="9525">
-            <a:solidFill>
-              <a:srgbClr val="F2B7A8"/>
-            </a:solidFill>
-            <a:prstDash val="solid"/>
-          </a:ln>
-        </p:spPr>
-      </p:sp>
-      <p:sp>
-        <p:nvSpPr>
-          <p:cNvPr id="7" name="Shape 5"/>
-          <p:cNvSpPr/>
-          <p:nvPr/>
-        </p:nvSpPr>
-        <p:spPr>
-          <a:xfrm>
-            <a:off x="10636301" y="956462"/>
-            <a:ext cx="549006" cy="121615"/>
-          </a:xfrm>
-          <a:prstGeom prst="line">
-            <a:avLst/>
-          </a:prstGeom>
-          <a:noFill/>
-          <a:ln w="9525">
-            <a:solidFill>
-              <a:srgbClr val="DCE2EA"/>
-            </a:solidFill>
-            <a:prstDash val="solid"/>
-          </a:ln>
-        </p:spPr>
-      </p:sp>
-      <p:sp>
-        <p:nvSpPr>
-          <p:cNvPr id="8" name="Shape 6"/>
-          <p:cNvSpPr/>
-          <p:nvPr/>
-        </p:nvSpPr>
-        <p:spPr>
-          <a:xfrm flipV="1">
-            <a:off x="11185307" y="843534"/>
-            <a:ext cx="173370" cy="234544"/>
-          </a:xfrm>
-          <a:prstGeom prst="line">
-            <a:avLst/>
-          </a:prstGeom>
-          <a:noFill/>
-          <a:ln w="9525">
-            <a:solidFill>
-              <a:srgbClr val="DCE2EA"/>
-            </a:solidFill>
-            <a:prstDash val="solid"/>
-          </a:ln>
-        </p:spPr>
-      </p:sp>
-      <p:sp>
-        <p:nvSpPr>
-          <p:cNvPr id="9" name="Shape 7"/>
-          <p:cNvSpPr/>
-          <p:nvPr/>
-        </p:nvSpPr>
-        <p:spPr>
-          <a:xfrm flipH="1">
-            <a:off x="11358677" y="522122"/>
-            <a:ext cx="101133" cy="321412"/>
-          </a:xfrm>
-          <a:prstGeom prst="line">
-            <a:avLst/>
-          </a:prstGeom>
-          <a:noFill/>
-          <a:ln w="9525">
-            <a:solidFill>
-              <a:srgbClr val="DCE2EA"/>
-            </a:solidFill>
-            <a:prstDash val="solid"/>
-          </a:ln>
-        </p:spPr>
-      </p:sp>
-      <p:sp>
-        <p:nvSpPr>
-          <p:cNvPr id="10" name="Shape 8"/>
-          <p:cNvSpPr/>
-          <p:nvPr/>
-        </p:nvSpPr>
-        <p:spPr>
-          <a:xfrm>
-            <a:off x="10055291" y="854964"/>
-            <a:ext cx="64008" cy="64008"/>
-          </a:xfrm>
-          <a:prstGeom prst="ellipse">
-            <a:avLst/>
-          </a:prstGeom>
-          <a:solidFill>
-            <a:srgbClr val="C3CCD9"/>
-          </a:solidFill>
-          <a:ln w="12700">
-            <a:solidFill>
-              <a:srgbClr val="C3CCD9"/>
-            </a:solidFill>
-            <a:prstDash val="solid"/>
-          </a:ln>
-        </p:spPr>
-      </p:sp>
-      <p:sp>
-        <p:nvSpPr>
-          <p:cNvPr id="11" name="Shape 9"/>
-          <p:cNvSpPr/>
-          <p:nvPr/>
-        </p:nvSpPr>
-        <p:spPr>
-          <a:xfrm>
-            <a:off x="10335097" y="428854"/>
-            <a:ext cx="82296" cy="82296"/>
-          </a:xfrm>
-          <a:prstGeom prst="ellipse">
-            <a:avLst/>
-          </a:prstGeom>
-          <a:solidFill>
-            <a:srgbClr val="C3CCD9"/>
-          </a:solidFill>
-          <a:ln w="12700">
-            <a:solidFill>
-              <a:srgbClr val="C3CCD9"/>
-            </a:solidFill>
-            <a:prstDash val="solid"/>
-          </a:ln>
-        </p:spPr>
-      </p:sp>
-      <p:sp>
-        <p:nvSpPr>
-          <p:cNvPr id="12" name="Shape 10"/>
-          <p:cNvSpPr/>
-          <p:nvPr/>
-        </p:nvSpPr>
-        <p:spPr>
-          <a:xfrm>
-            <a:off x="10599725" y="919886"/>
-            <a:ext cx="73152" cy="73152"/>
-          </a:xfrm>
-          <a:prstGeom prst="ellipse">
-            <a:avLst/>
-          </a:prstGeom>
-          <a:solidFill>
-            <a:srgbClr val="C3CCD9"/>
-          </a:solidFill>
-          <a:ln w="12700">
-            <a:solidFill>
-              <a:srgbClr val="C3CCD9"/>
-            </a:solidFill>
-            <a:prstDash val="solid"/>
-          </a:ln>
-        </p:spPr>
-      </p:sp>
-      <p:sp>
-        <p:nvSpPr>
-          <p:cNvPr id="13" name="Shape 11"/>
-          <p:cNvSpPr/>
-          <p:nvPr/>
-        </p:nvSpPr>
-        <p:spPr>
-          <a:xfrm>
-            <a:off x="10806379" y="507492"/>
-            <a:ext cx="237744" cy="237744"/>
-          </a:xfrm>
-          <a:prstGeom prst="ellipse">
-            <a:avLst/>
-          </a:prstGeom>
-          <a:solidFill>
-            <a:srgbClr val="E0533A">
-              <a:alpha val="18000"/>
-            </a:srgbClr>
-          </a:solidFill>
-          <a:ln w="12700">
-            <a:solidFill>
-              <a:srgbClr val="E0533A">
-                <a:alpha val="18000"/>
-              </a:srgbClr>
-            </a:solidFill>
-            <a:prstDash val="solid"/>
-          </a:ln>
-        </p:spPr>
-      </p:sp>
-      <p:sp>
-        <p:nvSpPr>
-          <p:cNvPr id="14" name="Shape 12"/>
-          <p:cNvSpPr/>
-          <p:nvPr/>
-        </p:nvSpPr>
-        <p:spPr>
-          <a:xfrm>
-            <a:off x="10874959" y="576072"/>
-            <a:ext cx="100584" cy="100584"/>
-          </a:xfrm>
-          <a:prstGeom prst="ellipse">
-            <a:avLst/>
-          </a:prstGeom>
-          <a:solidFill>
-            <a:srgbClr val="E0533A"/>
-          </a:solidFill>
-          <a:ln w="12700">
-            <a:solidFill>
-              <a:srgbClr val="E0533A"/>
-            </a:solidFill>
-            <a:prstDash val="solid"/>
-          </a:ln>
-        </p:spPr>
-      </p:sp>
-      <p:sp>
-        <p:nvSpPr>
-          <p:cNvPr id="15" name="Shape 13"/>
-          <p:cNvSpPr/>
-          <p:nvPr/>
-        </p:nvSpPr>
-        <p:spPr>
-          <a:xfrm>
-            <a:off x="11144159" y="1036930"/>
-            <a:ext cx="82296" cy="82296"/>
-          </a:xfrm>
-          <a:prstGeom prst="ellipse">
-            <a:avLst/>
-          </a:prstGeom>
-          <a:solidFill>
-            <a:srgbClr val="C3CCD9"/>
-          </a:solidFill>
-          <a:ln w="12700">
-            <a:solidFill>
-              <a:srgbClr val="C3CCD9"/>
-            </a:solidFill>
-            <a:prstDash val="solid"/>
-          </a:ln>
-        </p:spPr>
-      </p:sp>
-      <p:sp>
-        <p:nvSpPr>
-          <p:cNvPr id="16" name="Shape 14"/>
-          <p:cNvSpPr/>
-          <p:nvPr/>
-        </p:nvSpPr>
-        <p:spPr>
-          <a:xfrm>
-            <a:off x="11427805" y="490118"/>
-            <a:ext cx="64008" cy="64008"/>
-          </a:xfrm>
-          <a:prstGeom prst="ellipse">
-            <a:avLst/>
-          </a:prstGeom>
-          <a:solidFill>
-            <a:srgbClr val="C3CCD9"/>
-          </a:solidFill>
-          <a:ln w="12700">
-            <a:solidFill>
-              <a:srgbClr val="C3CCD9"/>
-            </a:solidFill>
-            <a:prstDash val="solid"/>
-          </a:ln>
-        </p:spPr>
-      </p:sp>
-      <p:sp>
-        <p:nvSpPr>
-          <p:cNvPr id="17" name="Shape 15"/>
-          <p:cNvSpPr/>
-          <p:nvPr/>
-        </p:nvSpPr>
-        <p:spPr>
-          <a:xfrm>
-            <a:off x="11331245" y="816102"/>
-            <a:ext cx="54864" cy="54864"/>
-          </a:xfrm>
-          <a:prstGeom prst="ellipse">
-            <a:avLst/>
-          </a:prstGeom>
-          <a:solidFill>
-            <a:srgbClr val="C3CCD9"/>
-          </a:solidFill>
-          <a:ln w="12700">
-            <a:solidFill>
-              <a:srgbClr val="C3CCD9"/>
-            </a:solidFill>
-            <a:prstDash val="solid"/>
-          </a:ln>
-        </p:spPr>
-      </p:sp>
-      <p:sp>
-        <p:nvSpPr>
-          <p:cNvPr id="18" name="Text 16"/>
-          <p:cNvSpPr txBox="1"/>
-          <p:nvPr/>
-        </p:nvSpPr>
-        <p:spPr>
-          <a:xfrm>
-            <a:off x="685800" y="475488"/>
-            <a:ext cx="10820095" cy="256032"/>
-          </a:xfrm>
-          <a:prstGeom prst="rect">
-            <a:avLst/>
-          </a:prstGeom>
-          <a:noFill/>
-          <a:ln/>
-        </p:spPr>
-        <p:txBody>
-          <a:bodyPr wrap="square" lIns="0" tIns="0" rIns="0" bIns="0" rtlCol="0" anchor="t"/>
-          <a:lstStyle/>
-          <a:p>
-            <a:pPr indent="0" marL="0">
-              <a:buNone/>
-            </a:pPr>
-            <a:r>
-              <a:rPr lang="en-US" sz="1100" b="1" dirty="0">
-                <a:solidFill>
-                  <a:srgbClr val="E0533A"/>
-                </a:solidFill>
-                <a:latin typeface="Arial" pitchFamily="34" charset="0"/>
-                <a:ea typeface="Arial" pitchFamily="34" charset="-122"/>
-                <a:cs typeface="Arial" pitchFamily="34" charset="-120"/>
-              </a:rPr>
-              <a:t>03 · RESULTS</a:t>
-            </a:r>
-            <a:endParaRPr lang="en-US" sz="1100" dirty="0"/>
-          </a:p>
-        </p:txBody>
-      </p:sp>
-      <p:sp>
-        <p:nvSpPr>
-          <p:cNvPr id="19" name="Text 17"/>
-          <p:cNvSpPr txBox="1"/>
-          <p:nvPr/>
-        </p:nvSpPr>
-        <p:spPr>
-          <a:xfrm>
-            <a:off x="685800" y="768096"/>
-            <a:ext cx="10820095" cy="822960"/>
-          </a:xfrm>
-          <a:prstGeom prst="rect">
-            <a:avLst/>
-          </a:prstGeom>
-          <a:noFill/>
-          <a:ln/>
-        </p:spPr>
-        <p:txBody>
-          <a:bodyPr wrap="square" lIns="0" tIns="0" rIns="0" bIns="0" rtlCol="0" anchor="t"/>
-          <a:lstStyle/>
-          <a:p>
-            <a:pPr indent="0" marL="0">
-              <a:buNone/>
-            </a:pPr>
-            <a:r>
-              <a:rPr lang="en-US" sz="3000" dirty="0">
-                <a:solidFill>
-                  <a:srgbClr val="0F1B2D"/>
-                </a:solidFill>
-                <a:latin typeface="Georgia" pitchFamily="34" charset="0"/>
-                <a:ea typeface="Georgia" pitchFamily="34" charset="-122"/>
-                <a:cs typeface="Georgia" pitchFamily="34" charset="-120"/>
-              </a:rPr>
-              <a:t>APT stages can be told apart, except exfiltration</a:t>
-            </a:r>
-            <a:endParaRPr lang="en-US" sz="3000" dirty="0"/>
-          </a:p>
-        </p:txBody>
-      </p:sp>
-      <p:pic>
-        <p:nvPicPr>
-          <p:cNvPr id="20" name="Image 0" descr="/private/tmp/claude-501/-Users-ashishjain-Documents-RIS-Mid-Eval/4e14a31e-25f5-4016-81db-47057b986f0d/scratchpad/deck/charts/stage_confusion.png">    </p:cNvPr>
-          <p:cNvPicPr>
-            <a:picLocks noChangeAspect="1"/>
-          </p:cNvPicPr>
-          <p:nvPr/>
-        </p:nvPicPr>
-        <p:blipFill>
-          <a:blip r:embed="rId1"/>
-          <a:stretch>
-            <a:fillRect/>
-          </a:stretch>
-        </p:blipFill>
-        <p:spPr>
-          <a:xfrm>
-            <a:off x="685800" y="1691640"/>
-            <a:ext cx="4754880" cy="4480560"/>
-          </a:xfrm>
-          <a:prstGeom prst="rect">
-            <a:avLst/>
-          </a:prstGeom>
-        </p:spPr>
-      </p:pic>
-      <p:sp>
-        <p:nvSpPr>
-          <p:cNvPr id="21" name="Text 18"/>
-          <p:cNvSpPr txBox="1"/>
-          <p:nvPr/>
-        </p:nvSpPr>
-        <p:spPr>
-          <a:xfrm>
-            <a:off x="5897880" y="1783080"/>
-            <a:ext cx="5608015" cy="320040"/>
-          </a:xfrm>
-          <a:prstGeom prst="rect">
-            <a:avLst/>
-          </a:prstGeom>
-          <a:noFill/>
-          <a:ln/>
-        </p:spPr>
-        <p:txBody>
-          <a:bodyPr wrap="square" lIns="0" tIns="0" rIns="0" bIns="0" rtlCol="0" anchor="t"/>
-          <a:lstStyle/>
-          <a:p>
-            <a:pPr indent="0" marL="0">
-              <a:buNone/>
-            </a:pPr>
-            <a:r>
-              <a:rPr lang="en-US" sz="1400" b="1" dirty="0">
-                <a:solidFill>
-                  <a:srgbClr val="0F1B2D"/>
-                </a:solidFill>
-                <a:latin typeface="Arial" pitchFamily="34" charset="0"/>
-                <a:ea typeface="Arial" pitchFamily="34" charset="-122"/>
-                <a:cs typeface="Arial" pitchFamily="34" charset="-120"/>
-              </a:rPr>
-              <a:t>Recall per stage  ·  hybrid, soft vote</a:t>
-            </a:r>
-            <a:endParaRPr lang="en-US" sz="1400" dirty="0"/>
-          </a:p>
-        </p:txBody>
-      </p:sp>
-      <p:sp>
-        <p:nvSpPr>
-          <p:cNvPr id="22" name="Shape 19"/>
-          <p:cNvSpPr/>
-          <p:nvPr/>
-        </p:nvSpPr>
-        <p:spPr>
-          <a:xfrm>
-            <a:off x="5897880" y="2304288"/>
-            <a:ext cx="502920" cy="502920"/>
-          </a:xfrm>
-          <a:prstGeom prst="ellipse">
-            <a:avLst/>
-          </a:prstGeom>
-          <a:solidFill>
-            <a:srgbClr val="0B1526"/>
-          </a:solidFill>
-          <a:ln w="12700">
-            <a:solidFill>
-              <a:srgbClr val="0B1526"/>
-            </a:solidFill>
-            <a:prstDash val="solid"/>
-          </a:ln>
-        </p:spPr>
-      </p:sp>
-      <p:pic>
-        <p:nvPicPr>
-          <p:cNvPr id="23" name="Image 1" descr="preencoded.png">    </p:cNvPr>
-          <p:cNvPicPr>
-            <a:picLocks noChangeAspect="1"/>
-          </p:cNvPicPr>
-          <p:nvPr/>
-        </p:nvPicPr>
-        <p:blipFill>
-          <a:blip r:embed="rId2"/>
-          <a:stretch>
-            <a:fillRect/>
-          </a:stretch>
-        </p:blipFill>
-        <p:spPr>
-          <a:xfrm>
-            <a:off x="6033668" y="2440076"/>
-            <a:ext cx="231343" cy="231343"/>
-          </a:xfrm>
-          <a:prstGeom prst="rect">
-            <a:avLst/>
-          </a:prstGeom>
-        </p:spPr>
-      </p:pic>
-      <p:sp>
-        <p:nvSpPr>
-          <p:cNvPr id="24" name="Text 20"/>
-          <p:cNvSpPr txBox="1"/>
-          <p:nvPr/>
-        </p:nvSpPr>
-        <p:spPr>
-          <a:xfrm>
-            <a:off x="6611112" y="2304288"/>
-            <a:ext cx="2743200" cy="292608"/>
-          </a:xfrm>
-          <a:prstGeom prst="rect">
-            <a:avLst/>
-          </a:prstGeom>
-          <a:noFill/>
-          <a:ln/>
-        </p:spPr>
-        <p:txBody>
-          <a:bodyPr wrap="square" lIns="0" tIns="0" rIns="0" bIns="0" rtlCol="0" anchor="t"/>
-          <a:lstStyle/>
-          <a:p>
-            <a:pPr indent="0" marL="0">
-              <a:buNone/>
-            </a:pPr>
-            <a:r>
-              <a:rPr lang="en-US" sz="1450" b="1" dirty="0">
-                <a:solidFill>
-                  <a:srgbClr val="0F1B2D"/>
-                </a:solidFill>
-                <a:latin typeface="Arial" pitchFamily="34" charset="0"/>
-                <a:ea typeface="Arial" pitchFamily="34" charset="-122"/>
-                <a:cs typeface="Arial" pitchFamily="34" charset="-120"/>
-              </a:rPr>
-              <a:t>Reconnaissance</a:t>
-            </a:r>
-            <a:endParaRPr lang="en-US" sz="1450" dirty="0"/>
-          </a:p>
-        </p:txBody>
-      </p:sp>
-      <p:sp>
-        <p:nvSpPr>
-          <p:cNvPr id="25" name="Text 21"/>
-          <p:cNvSpPr txBox="1"/>
-          <p:nvPr/>
-        </p:nvSpPr>
-        <p:spPr>
-          <a:xfrm>
-            <a:off x="6611112" y="2596896"/>
-            <a:ext cx="2926080" cy="256032"/>
-          </a:xfrm>
-          <a:prstGeom prst="rect">
-            <a:avLst/>
-          </a:prstGeom>
-          <a:noFill/>
-          <a:ln/>
-        </p:spPr>
-        <p:txBody>
-          <a:bodyPr wrap="square" lIns="0" tIns="0" rIns="0" bIns="0" rtlCol="0" anchor="t"/>
-          <a:lstStyle/>
-          <a:p>
-            <a:pPr indent="0" marL="0">
-              <a:buNone/>
-            </a:pPr>
-            <a:r>
-              <a:rPr lang="en-US" sz="1150" dirty="0">
-                <a:solidFill>
-                  <a:srgbClr val="55606E"/>
-                </a:solidFill>
-                <a:latin typeface="Arial" pitchFamily="34" charset="0"/>
-                <a:ea typeface="Arial" pitchFamily="34" charset="-122"/>
-                <a:cs typeface="Arial" pitchFamily="34" charset="-120"/>
-              </a:rPr>
-              <a:t>3,083 of 3,195 test flows</a:t>
-            </a:r>
-            <a:endParaRPr lang="en-US" sz="1150" dirty="0"/>
-          </a:p>
-        </p:txBody>
-      </p:sp>
-      <p:sp>
-        <p:nvSpPr>
-          <p:cNvPr id="26" name="Text 22"/>
-          <p:cNvSpPr txBox="1"/>
-          <p:nvPr/>
-        </p:nvSpPr>
-        <p:spPr>
-          <a:xfrm>
-            <a:off x="9464040" y="2286000"/>
-            <a:ext cx="2041855" cy="548640"/>
-          </a:xfrm>
-          <a:prstGeom prst="rect">
-            <a:avLst/>
-          </a:prstGeom>
-          <a:noFill/>
-          <a:ln/>
-        </p:spPr>
-        <p:txBody>
-          <a:bodyPr wrap="square" lIns="0" tIns="0" rIns="0" bIns="0" rtlCol="0" anchor="ctr"/>
-          <a:lstStyle/>
-          <a:p>
-            <a:pPr algn="r" indent="0" marL="0">
-              <a:buNone/>
-            </a:pPr>
-            <a:r>
-              <a:rPr lang="en-US" sz="2600" dirty="0">
-                <a:solidFill>
-                  <a:srgbClr val="0B1526"/>
-                </a:solidFill>
-                <a:latin typeface="Georgia" pitchFamily="34" charset="0"/>
-                <a:ea typeface="Georgia" pitchFamily="34" charset="-122"/>
-                <a:cs typeface="Georgia" pitchFamily="34" charset="-120"/>
-              </a:rPr>
-              <a:t>96.5%</a:t>
-            </a:r>
-            <a:endParaRPr lang="en-US" sz="2600" dirty="0"/>
-          </a:p>
-        </p:txBody>
-      </p:sp>
-      <p:sp>
-        <p:nvSpPr>
-          <p:cNvPr id="27" name="Shape 23"/>
-          <p:cNvSpPr/>
-          <p:nvPr/>
-        </p:nvSpPr>
-        <p:spPr>
-          <a:xfrm>
-            <a:off x="5897880" y="2944368"/>
-            <a:ext cx="5608015" cy="914"/>
-          </a:xfrm>
-          <a:prstGeom prst="line">
-            <a:avLst/>
-          </a:prstGeom>
-          <a:noFill/>
-          <a:ln w="9525">
-            <a:solidFill>
-              <a:srgbClr val="E2E6EC"/>
-            </a:solidFill>
-            <a:prstDash val="solid"/>
-          </a:ln>
-        </p:spPr>
-      </p:sp>
-      <p:sp>
-        <p:nvSpPr>
-          <p:cNvPr id="28" name="Shape 24"/>
-          <p:cNvSpPr/>
-          <p:nvPr/>
-        </p:nvSpPr>
-        <p:spPr>
-          <a:xfrm>
-            <a:off x="5897880" y="3081528"/>
-            <a:ext cx="502920" cy="502920"/>
-          </a:xfrm>
-          <a:prstGeom prst="ellipse">
-            <a:avLst/>
-          </a:prstGeom>
-          <a:solidFill>
-            <a:srgbClr val="0B1526"/>
-          </a:solidFill>
-          <a:ln w="12700">
-            <a:solidFill>
-              <a:srgbClr val="0B1526"/>
-            </a:solidFill>
-            <a:prstDash val="solid"/>
-          </a:ln>
-        </p:spPr>
-      </p:sp>
-      <p:pic>
-        <p:nvPicPr>
-          <p:cNvPr id="29" name="Image 2" descr="preencoded.png">    </p:cNvPr>
-          <p:cNvPicPr>
-            <a:picLocks noChangeAspect="1"/>
-          </p:cNvPicPr>
-          <p:nvPr/>
-        </p:nvPicPr>
-        <p:blipFill>
-          <a:blip r:embed="rId3"/>
-          <a:stretch>
-            <a:fillRect/>
-          </a:stretch>
-        </p:blipFill>
-        <p:spPr>
-          <a:xfrm>
-            <a:off x="6033668" y="3217316"/>
-            <a:ext cx="231343" cy="231343"/>
-          </a:xfrm>
-          <a:prstGeom prst="rect">
-            <a:avLst/>
-          </a:prstGeom>
-        </p:spPr>
-      </p:pic>
-      <p:sp>
-        <p:nvSpPr>
-          <p:cNvPr id="30" name="Text 25"/>
-          <p:cNvSpPr txBox="1"/>
-          <p:nvPr/>
-        </p:nvSpPr>
-        <p:spPr>
-          <a:xfrm>
-            <a:off x="6611112" y="3081528"/>
-            <a:ext cx="2743200" cy="292608"/>
-          </a:xfrm>
-          <a:prstGeom prst="rect">
-            <a:avLst/>
-          </a:prstGeom>
-          <a:noFill/>
-          <a:ln/>
-        </p:spPr>
-        <p:txBody>
-          <a:bodyPr wrap="square" lIns="0" tIns="0" rIns="0" bIns="0" rtlCol="0" anchor="t"/>
-          <a:lstStyle/>
-          <a:p>
-            <a:pPr indent="0" marL="0">
-              <a:buNone/>
-            </a:pPr>
-            <a:r>
-              <a:rPr lang="en-US" sz="1450" b="1" dirty="0">
-                <a:solidFill>
-                  <a:srgbClr val="0F1B2D"/>
-                </a:solidFill>
-                <a:latin typeface="Arial" pitchFamily="34" charset="0"/>
-                <a:ea typeface="Arial" pitchFamily="34" charset="-122"/>
-                <a:cs typeface="Arial" pitchFamily="34" charset="-120"/>
-              </a:rPr>
-              <a:t>Establish foothold</a:t>
-            </a:r>
-            <a:endParaRPr lang="en-US" sz="1450" dirty="0"/>
-          </a:p>
-        </p:txBody>
-      </p:sp>
-      <p:sp>
-        <p:nvSpPr>
-          <p:cNvPr id="31" name="Text 26"/>
-          <p:cNvSpPr txBox="1"/>
-          <p:nvPr/>
-        </p:nvSpPr>
-        <p:spPr>
-          <a:xfrm>
-            <a:off x="6611112" y="3374136"/>
-            <a:ext cx="2926080" cy="256032"/>
-          </a:xfrm>
-          <a:prstGeom prst="rect">
-            <a:avLst/>
-          </a:prstGeom>
-          <a:noFill/>
-          <a:ln/>
-        </p:spPr>
-        <p:txBody>
-          <a:bodyPr wrap="square" lIns="0" tIns="0" rIns="0" bIns="0" rtlCol="0" anchor="t"/>
-          <a:lstStyle/>
-          <a:p>
-            <a:pPr indent="0" marL="0">
-              <a:buNone/>
-            </a:pPr>
-            <a:r>
-              <a:rPr lang="en-US" sz="1150" dirty="0">
-                <a:solidFill>
-                  <a:srgbClr val="55606E"/>
-                </a:solidFill>
-                <a:latin typeface="Arial" pitchFamily="34" charset="0"/>
-                <a:ea typeface="Arial" pitchFamily="34" charset="-122"/>
-                <a:cs typeface="Arial" pitchFamily="34" charset="-120"/>
-              </a:rPr>
-              <a:t>1,816 of 1,850</a:t>
-            </a:r>
-            <a:endParaRPr lang="en-US" sz="1150" dirty="0"/>
-          </a:p>
-        </p:txBody>
-      </p:sp>
-      <p:sp>
-        <p:nvSpPr>
-          <p:cNvPr id="32" name="Text 27"/>
-          <p:cNvSpPr txBox="1"/>
-          <p:nvPr/>
-        </p:nvSpPr>
-        <p:spPr>
-          <a:xfrm>
-            <a:off x="9464040" y="3063240"/>
-            <a:ext cx="2041855" cy="548640"/>
-          </a:xfrm>
-          <a:prstGeom prst="rect">
-            <a:avLst/>
-          </a:prstGeom>
-          <a:noFill/>
-          <a:ln/>
-        </p:spPr>
-        <p:txBody>
-          <a:bodyPr wrap="square" lIns="0" tIns="0" rIns="0" bIns="0" rtlCol="0" anchor="ctr"/>
-          <a:lstStyle/>
-          <a:p>
-            <a:pPr algn="r" indent="0" marL="0">
-              <a:buNone/>
-            </a:pPr>
-            <a:r>
-              <a:rPr lang="en-US" sz="2600" dirty="0">
-                <a:solidFill>
-                  <a:srgbClr val="0B1526"/>
-                </a:solidFill>
-                <a:latin typeface="Georgia" pitchFamily="34" charset="0"/>
-                <a:ea typeface="Georgia" pitchFamily="34" charset="-122"/>
-                <a:cs typeface="Georgia" pitchFamily="34" charset="-120"/>
-              </a:rPr>
-              <a:t>98.2%</a:t>
-            </a:r>
-            <a:endParaRPr lang="en-US" sz="2600" dirty="0"/>
-          </a:p>
-        </p:txBody>
-      </p:sp>
-      <p:sp>
-        <p:nvSpPr>
-          <p:cNvPr id="33" name="Shape 28"/>
-          <p:cNvSpPr/>
-          <p:nvPr/>
-        </p:nvSpPr>
-        <p:spPr>
-          <a:xfrm>
-            <a:off x="5897880" y="3721608"/>
-            <a:ext cx="5608015" cy="914"/>
-          </a:xfrm>
-          <a:prstGeom prst="line">
-            <a:avLst/>
-          </a:prstGeom>
-          <a:noFill/>
-          <a:ln w="9525">
-            <a:solidFill>
-              <a:srgbClr val="E2E6EC"/>
-            </a:solidFill>
-            <a:prstDash val="solid"/>
-          </a:ln>
-        </p:spPr>
-      </p:sp>
-      <p:sp>
-        <p:nvSpPr>
-          <p:cNvPr id="34" name="Shape 29"/>
-          <p:cNvSpPr/>
-          <p:nvPr/>
-        </p:nvSpPr>
-        <p:spPr>
-          <a:xfrm>
-            <a:off x="5897880" y="3858768"/>
-            <a:ext cx="502920" cy="502920"/>
-          </a:xfrm>
-          <a:prstGeom prst="ellipse">
-            <a:avLst/>
-          </a:prstGeom>
-          <a:solidFill>
-            <a:srgbClr val="0B1526"/>
-          </a:solidFill>
-          <a:ln w="12700">
-            <a:solidFill>
-              <a:srgbClr val="0B1526"/>
-            </a:solidFill>
-            <a:prstDash val="solid"/>
-          </a:ln>
-        </p:spPr>
-      </p:sp>
-      <p:pic>
-        <p:nvPicPr>
-          <p:cNvPr id="35" name="Image 3" descr="preencoded.png">    </p:cNvPr>
-          <p:cNvPicPr>
-            <a:picLocks noChangeAspect="1"/>
-          </p:cNvPicPr>
-          <p:nvPr/>
-        </p:nvPicPr>
-        <p:blipFill>
-          <a:blip r:embed="rId4"/>
-          <a:stretch>
-            <a:fillRect/>
-          </a:stretch>
-        </p:blipFill>
-        <p:spPr>
-          <a:xfrm>
-            <a:off x="6033668" y="3994556"/>
-            <a:ext cx="231343" cy="231343"/>
-          </a:xfrm>
-          <a:prstGeom prst="rect">
-            <a:avLst/>
-          </a:prstGeom>
-        </p:spPr>
-      </p:pic>
-      <p:sp>
-        <p:nvSpPr>
-          <p:cNvPr id="36" name="Text 30"/>
-          <p:cNvSpPr txBox="1"/>
-          <p:nvPr/>
-        </p:nvSpPr>
-        <p:spPr>
-          <a:xfrm>
-            <a:off x="6611112" y="3858768"/>
-            <a:ext cx="2743200" cy="292608"/>
-          </a:xfrm>
-          <a:prstGeom prst="rect">
-            <a:avLst/>
-          </a:prstGeom>
-          <a:noFill/>
-          <a:ln/>
-        </p:spPr>
-        <p:txBody>
-          <a:bodyPr wrap="square" lIns="0" tIns="0" rIns="0" bIns="0" rtlCol="0" anchor="t"/>
-          <a:lstStyle/>
-          <a:p>
-            <a:pPr indent="0" marL="0">
-              <a:buNone/>
-            </a:pPr>
-            <a:r>
-              <a:rPr lang="en-US" sz="1450" b="1" dirty="0">
-                <a:solidFill>
-                  <a:srgbClr val="0F1B2D"/>
-                </a:solidFill>
-                <a:latin typeface="Arial" pitchFamily="34" charset="0"/>
-                <a:ea typeface="Arial" pitchFamily="34" charset="-122"/>
-                <a:cs typeface="Arial" pitchFamily="34" charset="-120"/>
-              </a:rPr>
-              <a:t>Lateral movement</a:t>
-            </a:r>
-            <a:endParaRPr lang="en-US" sz="1450" dirty="0"/>
-          </a:p>
-        </p:txBody>
-      </p:sp>
-      <p:sp>
-        <p:nvSpPr>
-          <p:cNvPr id="37" name="Text 31"/>
-          <p:cNvSpPr txBox="1"/>
-          <p:nvPr/>
-        </p:nvSpPr>
-        <p:spPr>
-          <a:xfrm>
-            <a:off x="6611112" y="4151376"/>
-            <a:ext cx="2926080" cy="256032"/>
-          </a:xfrm>
-          <a:prstGeom prst="rect">
-            <a:avLst/>
-          </a:prstGeom>
-          <a:noFill/>
-          <a:ln/>
-        </p:spPr>
-        <p:txBody>
-          <a:bodyPr wrap="square" lIns="0" tIns="0" rIns="0" bIns="0" rtlCol="0" anchor="t"/>
-          <a:lstStyle/>
-          <a:p>
-            <a:pPr indent="0" marL="0">
-              <a:buNone/>
-            </a:pPr>
-            <a:r>
-              <a:rPr lang="en-US" sz="1150" dirty="0">
-                <a:solidFill>
-                  <a:srgbClr val="55606E"/>
-                </a:solidFill>
-                <a:latin typeface="Arial" pitchFamily="34" charset="0"/>
-                <a:ea typeface="Arial" pitchFamily="34" charset="-122"/>
-                <a:cs typeface="Arial" pitchFamily="34" charset="-120"/>
-              </a:rPr>
-              <a:t>580 of 644</a:t>
-            </a:r>
-            <a:endParaRPr lang="en-US" sz="1150" dirty="0"/>
-          </a:p>
-        </p:txBody>
-      </p:sp>
-      <p:sp>
-        <p:nvSpPr>
-          <p:cNvPr id="38" name="Text 32"/>
-          <p:cNvSpPr txBox="1"/>
-          <p:nvPr/>
-        </p:nvSpPr>
-        <p:spPr>
-          <a:xfrm>
-            <a:off x="9464040" y="3840480"/>
-            <a:ext cx="2041855" cy="548640"/>
-          </a:xfrm>
-          <a:prstGeom prst="rect">
-            <a:avLst/>
-          </a:prstGeom>
-          <a:noFill/>
-          <a:ln/>
-        </p:spPr>
-        <p:txBody>
-          <a:bodyPr wrap="square" lIns="0" tIns="0" rIns="0" bIns="0" rtlCol="0" anchor="ctr"/>
-          <a:lstStyle/>
-          <a:p>
-            <a:pPr algn="r" indent="0" marL="0">
-              <a:buNone/>
-            </a:pPr>
-            <a:r>
-              <a:rPr lang="en-US" sz="2600" dirty="0">
-                <a:solidFill>
-                  <a:srgbClr val="0B1526"/>
-                </a:solidFill>
-                <a:latin typeface="Georgia" pitchFamily="34" charset="0"/>
-                <a:ea typeface="Georgia" pitchFamily="34" charset="-122"/>
-                <a:cs typeface="Georgia" pitchFamily="34" charset="-120"/>
-              </a:rPr>
-              <a:t>90.1%</a:t>
-            </a:r>
-            <a:endParaRPr lang="en-US" sz="2600" dirty="0"/>
-          </a:p>
-        </p:txBody>
-      </p:sp>
-      <p:sp>
-        <p:nvSpPr>
-          <p:cNvPr id="39" name="Shape 33"/>
-          <p:cNvSpPr/>
-          <p:nvPr/>
-        </p:nvSpPr>
-        <p:spPr>
-          <a:xfrm>
-            <a:off x="5897880" y="4498848"/>
-            <a:ext cx="5608015" cy="914"/>
-          </a:xfrm>
-          <a:prstGeom prst="line">
-            <a:avLst/>
-          </a:prstGeom>
-          <a:noFill/>
-          <a:ln w="9525">
-            <a:solidFill>
-              <a:srgbClr val="E2E6EC"/>
-            </a:solidFill>
-            <a:prstDash val="solid"/>
-          </a:ln>
-        </p:spPr>
-      </p:sp>
-      <p:sp>
-        <p:nvSpPr>
-          <p:cNvPr id="40" name="Shape 34"/>
-          <p:cNvSpPr/>
-          <p:nvPr/>
-        </p:nvSpPr>
-        <p:spPr>
-          <a:xfrm>
-            <a:off x="5897880" y="4636008"/>
-            <a:ext cx="502920" cy="502920"/>
-          </a:xfrm>
-          <a:prstGeom prst="ellipse">
-            <a:avLst/>
-          </a:prstGeom>
-          <a:solidFill>
-            <a:srgbClr val="E0533A"/>
-          </a:solidFill>
-          <a:ln w="12700">
-            <a:solidFill>
-              <a:srgbClr val="E0533A"/>
-            </a:solidFill>
-            <a:prstDash val="solid"/>
-          </a:ln>
-        </p:spPr>
-      </p:sp>
-      <p:pic>
-        <p:nvPicPr>
-          <p:cNvPr id="41" name="Image 4" descr="preencoded.png">    </p:cNvPr>
-          <p:cNvPicPr>
-            <a:picLocks noChangeAspect="1"/>
-          </p:cNvPicPr>
-          <p:nvPr/>
-        </p:nvPicPr>
-        <p:blipFill>
-          <a:blip r:embed="rId5"/>
-          <a:stretch>
-            <a:fillRect/>
-          </a:stretch>
-        </p:blipFill>
-        <p:spPr>
-          <a:xfrm>
-            <a:off x="6033668" y="4771796"/>
-            <a:ext cx="231343" cy="231343"/>
-          </a:xfrm>
-          <a:prstGeom prst="rect">
-            <a:avLst/>
-          </a:prstGeom>
-        </p:spPr>
-      </p:pic>
-      <p:sp>
-        <p:nvSpPr>
-          <p:cNvPr id="42" name="Text 35"/>
-          <p:cNvSpPr txBox="1"/>
-          <p:nvPr/>
-        </p:nvSpPr>
-        <p:spPr>
-          <a:xfrm>
-            <a:off x="6611112" y="4636008"/>
-            <a:ext cx="2743200" cy="292608"/>
-          </a:xfrm>
-          <a:prstGeom prst="rect">
-            <a:avLst/>
-          </a:prstGeom>
-          <a:noFill/>
-          <a:ln/>
-        </p:spPr>
-        <p:txBody>
-          <a:bodyPr wrap="square" lIns="0" tIns="0" rIns="0" bIns="0" rtlCol="0" anchor="t"/>
-          <a:lstStyle/>
-          <a:p>
-            <a:pPr indent="0" marL="0">
-              <a:buNone/>
-            </a:pPr>
-            <a:r>
-              <a:rPr lang="en-US" sz="1450" b="1" dirty="0">
-                <a:solidFill>
-                  <a:srgbClr val="0F1B2D"/>
-                </a:solidFill>
-                <a:latin typeface="Arial" pitchFamily="34" charset="0"/>
-                <a:ea typeface="Arial" pitchFamily="34" charset="-122"/>
-                <a:cs typeface="Arial" pitchFamily="34" charset="-120"/>
-              </a:rPr>
-              <a:t>Data exfiltration</a:t>
-            </a:r>
-            <a:endParaRPr lang="en-US" sz="1450" dirty="0"/>
-          </a:p>
-        </p:txBody>
-      </p:sp>
-      <p:sp>
-        <p:nvSpPr>
-          <p:cNvPr id="43" name="Text 36"/>
-          <p:cNvSpPr txBox="1"/>
-          <p:nvPr/>
-        </p:nvSpPr>
-        <p:spPr>
-          <a:xfrm>
-            <a:off x="6611112" y="4928616"/>
-            <a:ext cx="2926080" cy="256032"/>
-          </a:xfrm>
-          <a:prstGeom prst="rect">
-            <a:avLst/>
-          </a:prstGeom>
-          <a:noFill/>
-          <a:ln/>
-        </p:spPr>
-        <p:txBody>
-          <a:bodyPr wrap="square" lIns="0" tIns="0" rIns="0" bIns="0" rtlCol="0" anchor="t"/>
-          <a:lstStyle/>
-          <a:p>
-            <a:pPr indent="0" marL="0">
-              <a:buNone/>
-            </a:pPr>
-            <a:r>
-              <a:rPr lang="en-US" sz="1150" dirty="0">
-                <a:solidFill>
-                  <a:srgbClr val="55606E"/>
-                </a:solidFill>
-                <a:latin typeface="Arial" pitchFamily="34" charset="0"/>
-                <a:ea typeface="Arial" pitchFamily="34" charset="-122"/>
-                <a:cs typeface="Arial" pitchFamily="34" charset="-120"/>
-              </a:rPr>
-              <a:t>only 15 flows in the whole dataset</a:t>
-            </a:r>
-            <a:endParaRPr lang="en-US" sz="1150" dirty="0"/>
-          </a:p>
-        </p:txBody>
-      </p:sp>
-      <p:sp>
-        <p:nvSpPr>
-          <p:cNvPr id="44" name="Text 37"/>
-          <p:cNvSpPr txBox="1"/>
-          <p:nvPr/>
-        </p:nvSpPr>
-        <p:spPr>
-          <a:xfrm>
-            <a:off x="9464040" y="4617720"/>
-            <a:ext cx="2041855" cy="548640"/>
-          </a:xfrm>
-          <a:prstGeom prst="rect">
-            <a:avLst/>
-          </a:prstGeom>
-          <a:noFill/>
-          <a:ln/>
-        </p:spPr>
-        <p:txBody>
-          <a:bodyPr wrap="square" lIns="0" tIns="0" rIns="0" bIns="0" rtlCol="0" anchor="ctr"/>
-          <a:lstStyle/>
-          <a:p>
-            <a:pPr algn="r" indent="0" marL="0">
-              <a:buNone/>
-            </a:pPr>
-            <a:r>
-              <a:rPr lang="en-US" sz="2600" dirty="0">
-                <a:solidFill>
-                  <a:srgbClr val="E0533A"/>
-                </a:solidFill>
-                <a:latin typeface="Georgia" pitchFamily="34" charset="0"/>
-                <a:ea typeface="Georgia" pitchFamily="34" charset="-122"/>
-                <a:cs typeface="Georgia" pitchFamily="34" charset="-120"/>
-              </a:rPr>
-              <a:t>2 of 5</a:t>
-            </a:r>
-            <a:endParaRPr lang="en-US" sz="2600" dirty="0"/>
-          </a:p>
-        </p:txBody>
-      </p:sp>
-      <p:sp>
-        <p:nvSpPr>
-          <p:cNvPr id="45" name="Shape 38"/>
-          <p:cNvSpPr/>
-          <p:nvPr/>
-        </p:nvSpPr>
-        <p:spPr>
-          <a:xfrm>
-            <a:off x="5897880" y="5486400"/>
-            <a:ext cx="5608015" cy="658368"/>
-          </a:xfrm>
-          <a:prstGeom prst="roundRect">
-            <a:avLst>
-              <a:gd name="adj" fmla="val 8333"/>
-            </a:avLst>
-          </a:prstGeom>
-          <a:solidFill>
-            <a:srgbClr val="EAF1FB"/>
-          </a:solidFill>
-          <a:ln w="12700">
-            <a:solidFill>
-              <a:srgbClr val="EAF1FB"/>
-            </a:solidFill>
-            <a:prstDash val="solid"/>
-          </a:ln>
-        </p:spPr>
-      </p:sp>
-      <p:sp>
-        <p:nvSpPr>
-          <p:cNvPr id="46" name="Text 39"/>
-          <p:cNvSpPr txBox="1"/>
-          <p:nvPr/>
-        </p:nvSpPr>
-        <p:spPr>
-          <a:xfrm>
-            <a:off x="6126480" y="5486400"/>
-            <a:ext cx="5150815" cy="658368"/>
-          </a:xfrm>
-          <a:prstGeom prst="rect">
-            <a:avLst/>
-          </a:prstGeom>
-          <a:noFill/>
-          <a:ln/>
-        </p:spPr>
-        <p:txBody>
-          <a:bodyPr wrap="square" lIns="0" tIns="0" rIns="0" bIns="0" rtlCol="0" anchor="ctr"/>
-          <a:lstStyle/>
-          <a:p>
-            <a:pPr indent="0" marL="0">
-              <a:buNone/>
-            </a:pPr>
-            <a:r>
-              <a:rPr lang="en-US" sz="1200" dirty="0">
-                <a:solidFill>
-                  <a:srgbClr val="0F1B2D"/>
-                </a:solidFill>
-                <a:latin typeface="Arial" pitchFamily="34" charset="0"/>
-                <a:ea typeface="Arial" pitchFamily="34" charset="-122"/>
-                <a:cs typeface="Arial" pitchFamily="34" charset="-120"/>
-              </a:rPr>
-              <a:t>Best macro F1: Random Forest 78.9%, hybrid (soft vote) 77.9%. 96.9% of APT flows are flagged as some stage.</a:t>
-            </a:r>
-            <a:endParaRPr lang="en-US" sz="1200" dirty="0"/>
-          </a:p>
-        </p:txBody>
-      </p:sp>
-      <p:sp>
-        <p:nvSpPr>
-          <p:cNvPr id="47" name="Text 40"/>
-          <p:cNvSpPr txBox="1"/>
-          <p:nvPr/>
-        </p:nvSpPr>
-        <p:spPr>
-          <a:xfrm>
-            <a:off x="685800" y="6400800"/>
-            <a:ext cx="7315200" cy="228600"/>
-          </a:xfrm>
-          <a:prstGeom prst="rect">
-            <a:avLst/>
-          </a:prstGeom>
-          <a:noFill/>
-          <a:ln/>
-        </p:spPr>
-        <p:txBody>
-          <a:bodyPr wrap="square" lIns="0" tIns="0" rIns="0" bIns="0" rtlCol="0" anchor="t"/>
-          <a:lstStyle/>
-          <a:p>
-            <a:pPr indent="0" marL="0">
-              <a:buNone/>
-            </a:pPr>
-            <a:r>
-              <a:rPr lang="en-US" sz="900" dirty="0">
-                <a:solidFill>
-                  <a:srgbClr val="8A94A3"/>
-                </a:solidFill>
-                <a:latin typeface="Arial" pitchFamily="34" charset="0"/>
-                <a:ea typeface="Arial" pitchFamily="34" charset="-122"/>
-                <a:cs typeface="Arial" pitchFamily="34" charset="-120"/>
-              </a:rPr>
-              <a:t>Anomaly detection for Advanced Persistent Threats   |   Mid-term evaluation</a:t>
-            </a:r>
-            <a:endParaRPr lang="en-US" sz="900" dirty="0"/>
-          </a:p>
-        </p:txBody>
-      </p:sp>
-      <p:sp>
-        <p:nvSpPr>
-          <p:cNvPr id="48" name="Text 41"/>
           <p:cNvSpPr txBox="1"/>
           <p:nvPr/>
         </p:nvSpPr>
@@ -21085,232 +21359,46 @@
                 <a:ea typeface="Georgia" pitchFamily="34" charset="-122"/>
                 <a:cs typeface="Georgia" pitchFamily="34" charset="-120"/>
               </a:rPr>
-              <a:t>About half the false alarms point to label noise</a:t>
+              <a:t>APT stages can be told apart, except exfiltration</a:t>
             </a:r>
             <a:endParaRPr lang="en-US" sz="3000" dirty="0"/>
           </a:p>
         </p:txBody>
       </p:sp>
-      <p:sp>
-        <p:nvSpPr>
-          <p:cNvPr id="20" name="Shape 18"/>
-          <p:cNvSpPr/>
-          <p:nvPr/>
-        </p:nvSpPr>
-        <p:spPr>
-          <a:xfrm>
-            <a:off x="685800" y="1783080"/>
-            <a:ext cx="4983480" cy="2103120"/>
-          </a:xfrm>
-          <a:prstGeom prst="roundRect">
-            <a:avLst>
-              <a:gd name="adj" fmla="val 2609"/>
-            </a:avLst>
-          </a:prstGeom>
-          <a:solidFill>
-            <a:srgbClr val="FDEEEA"/>
-          </a:solidFill>
-          <a:ln w="12700">
-            <a:solidFill>
-              <a:srgbClr val="FDEEEA"/>
-            </a:solidFill>
-            <a:prstDash val="solid"/>
-          </a:ln>
-        </p:spPr>
-      </p:sp>
-      <p:sp>
-        <p:nvSpPr>
-          <p:cNvPr id="21" name="Text 19"/>
+      <p:pic>
+        <p:nvPicPr>
+          <p:cNvPr id="20" name="Image 0" descr="/private/tmp/claude-501/-Users-ashishjain-Documents-RIS-Mid-Eval/4e14a31e-25f5-4016-81db-47057b986f0d/scratchpad/deck/charts/stage_confusion.png">    </p:cNvPr>
+          <p:cNvPicPr>
+            <a:picLocks noChangeAspect="1"/>
+          </p:cNvPicPr>
+          <p:nvPr/>
+        </p:nvPicPr>
+        <p:blipFill>
+          <a:blip r:embed="rId1"/>
+          <a:stretch>
+            <a:fillRect/>
+          </a:stretch>
+        </p:blipFill>
+        <p:spPr>
+          <a:xfrm>
+            <a:off x="685800" y="1691640"/>
+            <a:ext cx="4754880" cy="4480560"/>
+          </a:xfrm>
+          <a:prstGeom prst="rect">
+            <a:avLst/>
+          </a:prstGeom>
+        </p:spPr>
+      </p:pic>
+      <p:sp>
+        <p:nvSpPr>
+          <p:cNvPr id="21" name="Text 18"/>
           <p:cNvSpPr txBox="1"/>
           <p:nvPr/>
         </p:nvSpPr>
         <p:spPr>
           <a:xfrm>
-            <a:off x="1051560" y="1965960"/>
-            <a:ext cx="2743200" cy="777240"/>
-          </a:xfrm>
-          <a:prstGeom prst="rect">
-            <a:avLst/>
-          </a:prstGeom>
-          <a:noFill/>
-          <a:ln/>
-        </p:spPr>
-        <p:txBody>
-          <a:bodyPr wrap="square" lIns="0" tIns="0" rIns="0" bIns="0" rtlCol="0" anchor="t"/>
-          <a:lstStyle/>
-          <a:p>
-            <a:pPr indent="0" marL="0">
-              <a:buNone/>
-            </a:pPr>
-            <a:r>
-              <a:rPr lang="en-US" sz="4400" dirty="0">
-                <a:solidFill>
-                  <a:srgbClr val="E0533A"/>
-                </a:solidFill>
-                <a:latin typeface="Georgia" pitchFamily="34" charset="0"/>
-                <a:ea typeface="Georgia" pitchFamily="34" charset="-122"/>
-                <a:cs typeface="Georgia" pitchFamily="34" charset="-120"/>
-              </a:rPr>
-              <a:t>54.9%</a:t>
-            </a:r>
-            <a:endParaRPr lang="en-US" sz="4400" dirty="0"/>
-          </a:p>
-        </p:txBody>
-      </p:sp>
-      <p:sp>
-        <p:nvSpPr>
-          <p:cNvPr id="22" name="Text 20"/>
-          <p:cNvSpPr txBox="1"/>
-          <p:nvPr/>
-        </p:nvSpPr>
-        <p:spPr>
-          <a:xfrm>
-            <a:off x="1051560" y="2788920"/>
-            <a:ext cx="4297680" cy="914400"/>
-          </a:xfrm>
-          <a:prstGeom prst="rect">
-            <a:avLst/>
-          </a:prstGeom>
-          <a:noFill/>
-          <a:ln/>
-        </p:spPr>
-        <p:txBody>
-          <a:bodyPr wrap="square" lIns="0" tIns="0" rIns="0" bIns="0" rtlCol="0" anchor="t"/>
-          <a:lstStyle/>
-          <a:p>
-            <a:pPr indent="0" marL="0">
-              <a:buNone/>
-            </a:pPr>
-            <a:r>
-              <a:rPr lang="en-US" sz="1300" dirty="0">
-                <a:solidFill>
-                  <a:srgbClr val="0F1B2D"/>
-                </a:solidFill>
-                <a:latin typeface="Arial" pitchFamily="34" charset="0"/>
-                <a:ea typeface="Arial" pitchFamily="34" charset="-122"/>
-                <a:cs typeface="Arial" pitchFamily="34" charset="-120"/>
-              </a:rPr>
-              <a:t>of the hybrid's false alarms are 'benign'-labelled flows to or from the attacker's own hosts, mostly in the reconnaissance capture</a:t>
-            </a:r>
-            <a:endParaRPr lang="en-US" sz="1300" dirty="0"/>
-          </a:p>
-        </p:txBody>
-      </p:sp>
-      <p:sp>
-        <p:nvSpPr>
-          <p:cNvPr id="23" name="Shape 21"/>
-          <p:cNvSpPr/>
-          <p:nvPr/>
-        </p:nvSpPr>
-        <p:spPr>
-          <a:xfrm>
-            <a:off x="685800" y="4069080"/>
-            <a:ext cx="4983480" cy="2057400"/>
-          </a:xfrm>
-          <a:prstGeom prst="roundRect">
-            <a:avLst>
-              <a:gd name="adj" fmla="val 2667"/>
-            </a:avLst>
-          </a:prstGeom>
-          <a:solidFill>
-            <a:srgbClr val="EAF1FB"/>
-          </a:solidFill>
-          <a:ln w="12700">
-            <a:solidFill>
-              <a:srgbClr val="EAF1FB"/>
-            </a:solidFill>
-            <a:prstDash val="solid"/>
-          </a:ln>
-        </p:spPr>
-      </p:sp>
-      <p:sp>
-        <p:nvSpPr>
-          <p:cNvPr id="24" name="Text 22"/>
-          <p:cNvSpPr txBox="1"/>
-          <p:nvPr/>
-        </p:nvSpPr>
-        <p:spPr>
-          <a:xfrm>
-            <a:off x="1051560" y="4251960"/>
-            <a:ext cx="2743200" cy="777240"/>
-          </a:xfrm>
-          <a:prstGeom prst="rect">
-            <a:avLst/>
-          </a:prstGeom>
-          <a:noFill/>
-          <a:ln/>
-        </p:spPr>
-        <p:txBody>
-          <a:bodyPr wrap="square" lIns="0" tIns="0" rIns="0" bIns="0" rtlCol="0" anchor="t"/>
-          <a:lstStyle/>
-          <a:p>
-            <a:pPr indent="0" marL="0">
-              <a:buNone/>
-            </a:pPr>
-            <a:r>
-              <a:rPr lang="en-US" sz="4400" dirty="0">
-                <a:solidFill>
-                  <a:srgbClr val="2A78D6"/>
-                </a:solidFill>
-                <a:latin typeface="Georgia" pitchFamily="34" charset="0"/>
-                <a:ea typeface="Georgia" pitchFamily="34" charset="-122"/>
-                <a:cs typeface="Georgia" pitchFamily="34" charset="-120"/>
-              </a:rPr>
-              <a:t>3.07%</a:t>
-            </a:r>
-            <a:endParaRPr lang="en-US" sz="4400" dirty="0"/>
-          </a:p>
-        </p:txBody>
-      </p:sp>
-      <p:sp>
-        <p:nvSpPr>
-          <p:cNvPr id="25" name="Text 23"/>
-          <p:cNvSpPr txBox="1"/>
-          <p:nvPr/>
-        </p:nvSpPr>
-        <p:spPr>
-          <a:xfrm>
-            <a:off x="1051560" y="5074920"/>
-            <a:ext cx="4297680" cy="868680"/>
-          </a:xfrm>
-          <a:prstGeom prst="rect">
-            <a:avLst/>
-          </a:prstGeom>
-          <a:noFill/>
-          <a:ln/>
-        </p:spPr>
-        <p:txBody>
-          <a:bodyPr wrap="square" lIns="0" tIns="0" rIns="0" bIns="0" rtlCol="0" anchor="t"/>
-          <a:lstStyle/>
-          <a:p>
-            <a:pPr indent="0" marL="0">
-              <a:buNone/>
-            </a:pPr>
-            <a:r>
-              <a:rPr lang="en-US" sz="1300" dirty="0">
-                <a:solidFill>
-                  <a:srgbClr val="0F1B2D"/>
-                </a:solidFill>
-                <a:latin typeface="Arial" pitchFamily="34" charset="0"/>
-                <a:ea typeface="Arial" pitchFamily="34" charset="-122"/>
-                <a:cs typeface="Arial" pitchFamily="34" charset="-120"/>
-              </a:rPr>
-              <a:t>false positive rate on benign traffic that does not involve an attacker host (5.99% overall)</a:t>
-            </a:r>
-            <a:endParaRPr lang="en-US" sz="1300" dirty="0"/>
-          </a:p>
-        </p:txBody>
-      </p:sp>
-      <p:sp>
-        <p:nvSpPr>
-          <p:cNvPr id="26" name="Text 24"/>
-          <p:cNvSpPr txBox="1"/>
-          <p:nvPr/>
-        </p:nvSpPr>
-        <p:spPr>
-          <a:xfrm>
-            <a:off x="6016752" y="1783080"/>
-            <a:ext cx="5489143" cy="320040"/>
+            <a:off x="5897880" y="1783080"/>
+            <a:ext cx="5608015" cy="320040"/>
           </a:xfrm>
           <a:prstGeom prst="rect">
             <a:avLst/>
@@ -21334,44 +21422,244 @@
                 <a:ea typeface="Arial" pitchFamily="34" charset="-122"/>
                 <a:cs typeface="Arial" pitchFamily="34" charset="-120"/>
               </a:rPr>
-              <a:t>Missed APT flows by activity</a:t>
+              <a:t>Recall per stage  ·  hybrid, soft vote</a:t>
             </a:r>
+            <a:endParaRPr lang="en-US" sz="1400" dirty="0"/>
+          </a:p>
+        </p:txBody>
+      </p:sp>
+      <p:sp>
+        <p:nvSpPr>
+          <p:cNvPr id="22" name="Shape 19"/>
+          <p:cNvSpPr/>
+          <p:nvPr/>
+        </p:nvSpPr>
+        <p:spPr>
+          <a:xfrm>
+            <a:off x="5897880" y="2304288"/>
+            <a:ext cx="502920" cy="502920"/>
+          </a:xfrm>
+          <a:prstGeom prst="ellipse">
+            <a:avLst/>
+          </a:prstGeom>
+          <a:solidFill>
+            <a:srgbClr val="0B1526"/>
+          </a:solidFill>
+          <a:ln w="12700">
+            <a:solidFill>
+              <a:srgbClr val="0B1526"/>
+            </a:solidFill>
+            <a:prstDash val="solid"/>
+          </a:ln>
+        </p:spPr>
+      </p:sp>
+      <p:pic>
+        <p:nvPicPr>
+          <p:cNvPr id="23" name="Image 1" descr="preencoded.png">    </p:cNvPr>
+          <p:cNvPicPr>
+            <a:picLocks noChangeAspect="1"/>
+          </p:cNvPicPr>
+          <p:nvPr/>
+        </p:nvPicPr>
+        <p:blipFill>
+          <a:blip r:embed="rId2"/>
+          <a:stretch>
+            <a:fillRect/>
+          </a:stretch>
+        </p:blipFill>
+        <p:spPr>
+          <a:xfrm>
+            <a:off x="6033668" y="2440076"/>
+            <a:ext cx="231343" cy="231343"/>
+          </a:xfrm>
+          <a:prstGeom prst="rect">
+            <a:avLst/>
+          </a:prstGeom>
+        </p:spPr>
+      </p:pic>
+      <p:sp>
+        <p:nvSpPr>
+          <p:cNvPr id="24" name="Text 20"/>
+          <p:cNvSpPr txBox="1"/>
+          <p:nvPr/>
+        </p:nvSpPr>
+        <p:spPr>
+          <a:xfrm>
+            <a:off x="6611112" y="2304288"/>
+            <a:ext cx="2743200" cy="292608"/>
+          </a:xfrm>
+          <a:prstGeom prst="rect">
+            <a:avLst/>
+          </a:prstGeom>
+          <a:noFill/>
+          <a:ln/>
+        </p:spPr>
+        <p:txBody>
+          <a:bodyPr wrap="square" lIns="0" tIns="0" rIns="0" bIns="0" rtlCol="0" anchor="t"/>
+          <a:lstStyle/>
+          <a:p>
+            <a:pPr indent="0" marL="0">
+              <a:buNone/>
+            </a:pPr>
+            <a:r>
+              <a:rPr lang="en-US" sz="1450" b="1" dirty="0">
+                <a:solidFill>
+                  <a:srgbClr val="0F1B2D"/>
+                </a:solidFill>
+                <a:latin typeface="Arial" pitchFamily="34" charset="0"/>
+                <a:ea typeface="Arial" pitchFamily="34" charset="-122"/>
+                <a:cs typeface="Arial" pitchFamily="34" charset="-120"/>
+              </a:rPr>
+              <a:t>Reconnaissance</a:t>
+            </a:r>
+            <a:endParaRPr lang="en-US" sz="1450" dirty="0"/>
+          </a:p>
+        </p:txBody>
+      </p:sp>
+      <p:sp>
+        <p:nvSpPr>
+          <p:cNvPr id="25" name="Text 21"/>
+          <p:cNvSpPr txBox="1"/>
+          <p:nvPr/>
+        </p:nvSpPr>
+        <p:spPr>
+          <a:xfrm>
+            <a:off x="6611112" y="2596896"/>
+            <a:ext cx="2926080" cy="256032"/>
+          </a:xfrm>
+          <a:prstGeom prst="rect">
+            <a:avLst/>
+          </a:prstGeom>
+          <a:noFill/>
+          <a:ln/>
+        </p:spPr>
+        <p:txBody>
+          <a:bodyPr wrap="square" lIns="0" tIns="0" rIns="0" bIns="0" rtlCol="0" anchor="t"/>
+          <a:lstStyle/>
+          <a:p>
             <a:pPr indent="0" marL="0">
               <a:buNone/>
             </a:pPr>
             <a:r>
               <a:rPr lang="en-US" sz="1150" dirty="0">
                 <a:solidFill>
-                  <a:srgbClr val="8A94A3"/>
+                  <a:srgbClr val="55606E"/>
                 </a:solidFill>
                 <a:latin typeface="Arial" pitchFamily="34" charset="0"/>
                 <a:ea typeface="Arial" pitchFamily="34" charset="-122"/>
                 <a:cs typeface="Arial" pitchFamily="34" charset="-120"/>
               </a:rPr>
-              <a:t>   ·   red = rare, low-volume steps</a:t>
+              <a:t>3,118 of 3,195 test flows</a:t>
             </a:r>
-            <a:endParaRPr lang="en-US" sz="1400" dirty="0"/>
+            <a:endParaRPr lang="en-US" sz="1150" dirty="0"/>
           </a:p>
         </p:txBody>
       </p:sp>
+      <p:sp>
+        <p:nvSpPr>
+          <p:cNvPr id="26" name="Text 22"/>
+          <p:cNvSpPr txBox="1"/>
+          <p:nvPr/>
+        </p:nvSpPr>
+        <p:spPr>
+          <a:xfrm>
+            <a:off x="9464040" y="2286000"/>
+            <a:ext cx="2041855" cy="548640"/>
+          </a:xfrm>
+          <a:prstGeom prst="rect">
+            <a:avLst/>
+          </a:prstGeom>
+          <a:noFill/>
+          <a:ln/>
+        </p:spPr>
+        <p:txBody>
+          <a:bodyPr wrap="square" lIns="0" tIns="0" rIns="0" bIns="0" rtlCol="0" anchor="ctr"/>
+          <a:lstStyle/>
+          <a:p>
+            <a:pPr algn="r" indent="0" marL="0">
+              <a:buNone/>
+            </a:pPr>
+            <a:r>
+              <a:rPr lang="en-US" sz="2600" dirty="0">
+                <a:solidFill>
+                  <a:srgbClr val="0B1526"/>
+                </a:solidFill>
+                <a:latin typeface="Georgia" pitchFamily="34" charset="0"/>
+                <a:ea typeface="Georgia" pitchFamily="34" charset="-122"/>
+                <a:cs typeface="Georgia" pitchFamily="34" charset="-120"/>
+              </a:rPr>
+              <a:t>97.6%</a:t>
+            </a:r>
+            <a:endParaRPr lang="en-US" sz="2600" dirty="0"/>
+          </a:p>
+        </p:txBody>
+      </p:sp>
+      <p:sp>
+        <p:nvSpPr>
+          <p:cNvPr id="27" name="Shape 23"/>
+          <p:cNvSpPr/>
+          <p:nvPr/>
+        </p:nvSpPr>
+        <p:spPr>
+          <a:xfrm>
+            <a:off x="5897880" y="2944368"/>
+            <a:ext cx="5608015" cy="914"/>
+          </a:xfrm>
+          <a:prstGeom prst="line">
+            <a:avLst/>
+          </a:prstGeom>
+          <a:noFill/>
+          <a:ln w="9525">
+            <a:solidFill>
+              <a:srgbClr val="E2E6EC"/>
+            </a:solidFill>
+            <a:prstDash val="solid"/>
+          </a:ln>
+        </p:spPr>
+      </p:sp>
+      <p:sp>
+        <p:nvSpPr>
+          <p:cNvPr id="28" name="Shape 24"/>
+          <p:cNvSpPr/>
+          <p:nvPr/>
+        </p:nvSpPr>
+        <p:spPr>
+          <a:xfrm>
+            <a:off x="5897880" y="3081528"/>
+            <a:ext cx="502920" cy="502920"/>
+          </a:xfrm>
+          <a:prstGeom prst="ellipse">
+            <a:avLst/>
+          </a:prstGeom>
+          <a:solidFill>
+            <a:srgbClr val="0B1526"/>
+          </a:solidFill>
+          <a:ln w="12700">
+            <a:solidFill>
+              <a:srgbClr val="0B1526"/>
+            </a:solidFill>
+            <a:prstDash val="solid"/>
+          </a:ln>
+        </p:spPr>
+      </p:sp>
       <p:pic>
         <p:nvPicPr>
-          <p:cNvPr id="27" name="Image 0" descr="/private/tmp/claude-501/-Users-ashishjain-Documents-RIS-Mid-Eval/4e14a31e-25f5-4016-81db-47057b986f0d/scratchpad/deck/charts/missed_by_activity.png">    </p:cNvPr>
+          <p:cNvPr id="29" name="Image 2" descr="preencoded.png">    </p:cNvPr>
           <p:cNvPicPr>
             <a:picLocks noChangeAspect="1"/>
           </p:cNvPicPr>
           <p:nvPr/>
         </p:nvPicPr>
         <p:blipFill>
-          <a:blip r:embed="rId1"/>
+          <a:blip r:embed="rId3"/>
           <a:stretch>
             <a:fillRect/>
           </a:stretch>
         </p:blipFill>
         <p:spPr>
           <a:xfrm>
-            <a:off x="6016752" y="2148840"/>
-            <a:ext cx="5486400" cy="4023360"/>
+            <a:off x="6033668" y="3217316"/>
+            <a:ext cx="231343" cy="231343"/>
           </a:xfrm>
           <a:prstGeom prst="rect">
             <a:avLst/>
@@ -21380,7 +21668,568 @@
       </p:pic>
       <p:sp>
         <p:nvSpPr>
-          <p:cNvPr id="28" name="Text 25"/>
+          <p:cNvPr id="30" name="Text 25"/>
+          <p:cNvSpPr txBox="1"/>
+          <p:nvPr/>
+        </p:nvSpPr>
+        <p:spPr>
+          <a:xfrm>
+            <a:off x="6611112" y="3081528"/>
+            <a:ext cx="2743200" cy="292608"/>
+          </a:xfrm>
+          <a:prstGeom prst="rect">
+            <a:avLst/>
+          </a:prstGeom>
+          <a:noFill/>
+          <a:ln/>
+        </p:spPr>
+        <p:txBody>
+          <a:bodyPr wrap="square" lIns="0" tIns="0" rIns="0" bIns="0" rtlCol="0" anchor="t"/>
+          <a:lstStyle/>
+          <a:p>
+            <a:pPr indent="0" marL="0">
+              <a:buNone/>
+            </a:pPr>
+            <a:r>
+              <a:rPr lang="en-US" sz="1450" b="1" dirty="0">
+                <a:solidFill>
+                  <a:srgbClr val="0F1B2D"/>
+                </a:solidFill>
+                <a:latin typeface="Arial" pitchFamily="34" charset="0"/>
+                <a:ea typeface="Arial" pitchFamily="34" charset="-122"/>
+                <a:cs typeface="Arial" pitchFamily="34" charset="-120"/>
+              </a:rPr>
+              <a:t>Establish foothold</a:t>
+            </a:r>
+            <a:endParaRPr lang="en-US" sz="1450" dirty="0"/>
+          </a:p>
+        </p:txBody>
+      </p:sp>
+      <p:sp>
+        <p:nvSpPr>
+          <p:cNvPr id="31" name="Text 26"/>
+          <p:cNvSpPr txBox="1"/>
+          <p:nvPr/>
+        </p:nvSpPr>
+        <p:spPr>
+          <a:xfrm>
+            <a:off x="6611112" y="3374136"/>
+            <a:ext cx="2926080" cy="256032"/>
+          </a:xfrm>
+          <a:prstGeom prst="rect">
+            <a:avLst/>
+          </a:prstGeom>
+          <a:noFill/>
+          <a:ln/>
+        </p:spPr>
+        <p:txBody>
+          <a:bodyPr wrap="square" lIns="0" tIns="0" rIns="0" bIns="0" rtlCol="0" anchor="t"/>
+          <a:lstStyle/>
+          <a:p>
+            <a:pPr indent="0" marL="0">
+              <a:buNone/>
+            </a:pPr>
+            <a:r>
+              <a:rPr lang="en-US" sz="1150" dirty="0">
+                <a:solidFill>
+                  <a:srgbClr val="55606E"/>
+                </a:solidFill>
+                <a:latin typeface="Arial" pitchFamily="34" charset="0"/>
+                <a:ea typeface="Arial" pitchFamily="34" charset="-122"/>
+                <a:cs typeface="Arial" pitchFamily="34" charset="-120"/>
+              </a:rPr>
+              <a:t>1,819 of 1,850</a:t>
+            </a:r>
+            <a:endParaRPr lang="en-US" sz="1150" dirty="0"/>
+          </a:p>
+        </p:txBody>
+      </p:sp>
+      <p:sp>
+        <p:nvSpPr>
+          <p:cNvPr id="32" name="Text 27"/>
+          <p:cNvSpPr txBox="1"/>
+          <p:nvPr/>
+        </p:nvSpPr>
+        <p:spPr>
+          <a:xfrm>
+            <a:off x="9464040" y="3063240"/>
+            <a:ext cx="2041855" cy="548640"/>
+          </a:xfrm>
+          <a:prstGeom prst="rect">
+            <a:avLst/>
+          </a:prstGeom>
+          <a:noFill/>
+          <a:ln/>
+        </p:spPr>
+        <p:txBody>
+          <a:bodyPr wrap="square" lIns="0" tIns="0" rIns="0" bIns="0" rtlCol="0" anchor="ctr"/>
+          <a:lstStyle/>
+          <a:p>
+            <a:pPr algn="r" indent="0" marL="0">
+              <a:buNone/>
+            </a:pPr>
+            <a:r>
+              <a:rPr lang="en-US" sz="2600" dirty="0">
+                <a:solidFill>
+                  <a:srgbClr val="0B1526"/>
+                </a:solidFill>
+                <a:latin typeface="Georgia" pitchFamily="34" charset="0"/>
+                <a:ea typeface="Georgia" pitchFamily="34" charset="-122"/>
+                <a:cs typeface="Georgia" pitchFamily="34" charset="-120"/>
+              </a:rPr>
+              <a:t>98.3%</a:t>
+            </a:r>
+            <a:endParaRPr lang="en-US" sz="2600" dirty="0"/>
+          </a:p>
+        </p:txBody>
+      </p:sp>
+      <p:sp>
+        <p:nvSpPr>
+          <p:cNvPr id="33" name="Shape 28"/>
+          <p:cNvSpPr/>
+          <p:nvPr/>
+        </p:nvSpPr>
+        <p:spPr>
+          <a:xfrm>
+            <a:off x="5897880" y="3721608"/>
+            <a:ext cx="5608015" cy="914"/>
+          </a:xfrm>
+          <a:prstGeom prst="line">
+            <a:avLst/>
+          </a:prstGeom>
+          <a:noFill/>
+          <a:ln w="9525">
+            <a:solidFill>
+              <a:srgbClr val="E2E6EC"/>
+            </a:solidFill>
+            <a:prstDash val="solid"/>
+          </a:ln>
+        </p:spPr>
+      </p:sp>
+      <p:sp>
+        <p:nvSpPr>
+          <p:cNvPr id="34" name="Shape 29"/>
+          <p:cNvSpPr/>
+          <p:nvPr/>
+        </p:nvSpPr>
+        <p:spPr>
+          <a:xfrm>
+            <a:off x="5897880" y="3858768"/>
+            <a:ext cx="502920" cy="502920"/>
+          </a:xfrm>
+          <a:prstGeom prst="ellipse">
+            <a:avLst/>
+          </a:prstGeom>
+          <a:solidFill>
+            <a:srgbClr val="0B1526"/>
+          </a:solidFill>
+          <a:ln w="12700">
+            <a:solidFill>
+              <a:srgbClr val="0B1526"/>
+            </a:solidFill>
+            <a:prstDash val="solid"/>
+          </a:ln>
+        </p:spPr>
+      </p:sp>
+      <p:pic>
+        <p:nvPicPr>
+          <p:cNvPr id="35" name="Image 3" descr="preencoded.png">    </p:cNvPr>
+          <p:cNvPicPr>
+            <a:picLocks noChangeAspect="1"/>
+          </p:cNvPicPr>
+          <p:nvPr/>
+        </p:nvPicPr>
+        <p:blipFill>
+          <a:blip r:embed="rId4"/>
+          <a:stretch>
+            <a:fillRect/>
+          </a:stretch>
+        </p:blipFill>
+        <p:spPr>
+          <a:xfrm>
+            <a:off x="6033668" y="3994556"/>
+            <a:ext cx="231343" cy="231343"/>
+          </a:xfrm>
+          <a:prstGeom prst="rect">
+            <a:avLst/>
+          </a:prstGeom>
+        </p:spPr>
+      </p:pic>
+      <p:sp>
+        <p:nvSpPr>
+          <p:cNvPr id="36" name="Text 30"/>
+          <p:cNvSpPr txBox="1"/>
+          <p:nvPr/>
+        </p:nvSpPr>
+        <p:spPr>
+          <a:xfrm>
+            <a:off x="6611112" y="3858768"/>
+            <a:ext cx="2743200" cy="292608"/>
+          </a:xfrm>
+          <a:prstGeom prst="rect">
+            <a:avLst/>
+          </a:prstGeom>
+          <a:noFill/>
+          <a:ln/>
+        </p:spPr>
+        <p:txBody>
+          <a:bodyPr wrap="square" lIns="0" tIns="0" rIns="0" bIns="0" rtlCol="0" anchor="t"/>
+          <a:lstStyle/>
+          <a:p>
+            <a:pPr indent="0" marL="0">
+              <a:buNone/>
+            </a:pPr>
+            <a:r>
+              <a:rPr lang="en-US" sz="1450" b="1" dirty="0">
+                <a:solidFill>
+                  <a:srgbClr val="0F1B2D"/>
+                </a:solidFill>
+                <a:latin typeface="Arial" pitchFamily="34" charset="0"/>
+                <a:ea typeface="Arial" pitchFamily="34" charset="-122"/>
+                <a:cs typeface="Arial" pitchFamily="34" charset="-120"/>
+              </a:rPr>
+              <a:t>Lateral movement</a:t>
+            </a:r>
+            <a:endParaRPr lang="en-US" sz="1450" dirty="0"/>
+          </a:p>
+        </p:txBody>
+      </p:sp>
+      <p:sp>
+        <p:nvSpPr>
+          <p:cNvPr id="37" name="Text 31"/>
+          <p:cNvSpPr txBox="1"/>
+          <p:nvPr/>
+        </p:nvSpPr>
+        <p:spPr>
+          <a:xfrm>
+            <a:off x="6611112" y="4151376"/>
+            <a:ext cx="2926080" cy="256032"/>
+          </a:xfrm>
+          <a:prstGeom prst="rect">
+            <a:avLst/>
+          </a:prstGeom>
+          <a:noFill/>
+          <a:ln/>
+        </p:spPr>
+        <p:txBody>
+          <a:bodyPr wrap="square" lIns="0" tIns="0" rIns="0" bIns="0" rtlCol="0" anchor="t"/>
+          <a:lstStyle/>
+          <a:p>
+            <a:pPr indent="0" marL="0">
+              <a:buNone/>
+            </a:pPr>
+            <a:r>
+              <a:rPr lang="en-US" sz="1150" dirty="0">
+                <a:solidFill>
+                  <a:srgbClr val="55606E"/>
+                </a:solidFill>
+                <a:latin typeface="Arial" pitchFamily="34" charset="0"/>
+                <a:ea typeface="Arial" pitchFamily="34" charset="-122"/>
+                <a:cs typeface="Arial" pitchFamily="34" charset="-120"/>
+              </a:rPr>
+              <a:t>590 of 644</a:t>
+            </a:r>
+            <a:endParaRPr lang="en-US" sz="1150" dirty="0"/>
+          </a:p>
+        </p:txBody>
+      </p:sp>
+      <p:sp>
+        <p:nvSpPr>
+          <p:cNvPr id="38" name="Text 32"/>
+          <p:cNvSpPr txBox="1"/>
+          <p:nvPr/>
+        </p:nvSpPr>
+        <p:spPr>
+          <a:xfrm>
+            <a:off x="9464040" y="3840480"/>
+            <a:ext cx="2041855" cy="548640"/>
+          </a:xfrm>
+          <a:prstGeom prst="rect">
+            <a:avLst/>
+          </a:prstGeom>
+          <a:noFill/>
+          <a:ln/>
+        </p:spPr>
+        <p:txBody>
+          <a:bodyPr wrap="square" lIns="0" tIns="0" rIns="0" bIns="0" rtlCol="0" anchor="ctr"/>
+          <a:lstStyle/>
+          <a:p>
+            <a:pPr algn="r" indent="0" marL="0">
+              <a:buNone/>
+            </a:pPr>
+            <a:r>
+              <a:rPr lang="en-US" sz="2600" dirty="0">
+                <a:solidFill>
+                  <a:srgbClr val="0B1526"/>
+                </a:solidFill>
+                <a:latin typeface="Georgia" pitchFamily="34" charset="0"/>
+                <a:ea typeface="Georgia" pitchFamily="34" charset="-122"/>
+                <a:cs typeface="Georgia" pitchFamily="34" charset="-120"/>
+              </a:rPr>
+              <a:t>91.6%</a:t>
+            </a:r>
+            <a:endParaRPr lang="en-US" sz="2600" dirty="0"/>
+          </a:p>
+        </p:txBody>
+      </p:sp>
+      <p:sp>
+        <p:nvSpPr>
+          <p:cNvPr id="39" name="Shape 33"/>
+          <p:cNvSpPr/>
+          <p:nvPr/>
+        </p:nvSpPr>
+        <p:spPr>
+          <a:xfrm>
+            <a:off x="5897880" y="4498848"/>
+            <a:ext cx="5608015" cy="914"/>
+          </a:xfrm>
+          <a:prstGeom prst="line">
+            <a:avLst/>
+          </a:prstGeom>
+          <a:noFill/>
+          <a:ln w="9525">
+            <a:solidFill>
+              <a:srgbClr val="E2E6EC"/>
+            </a:solidFill>
+            <a:prstDash val="solid"/>
+          </a:ln>
+        </p:spPr>
+      </p:sp>
+      <p:sp>
+        <p:nvSpPr>
+          <p:cNvPr id="40" name="Shape 34"/>
+          <p:cNvSpPr/>
+          <p:nvPr/>
+        </p:nvSpPr>
+        <p:spPr>
+          <a:xfrm>
+            <a:off x="5897880" y="4636008"/>
+            <a:ext cx="502920" cy="502920"/>
+          </a:xfrm>
+          <a:prstGeom prst="ellipse">
+            <a:avLst/>
+          </a:prstGeom>
+          <a:solidFill>
+            <a:srgbClr val="E0533A"/>
+          </a:solidFill>
+          <a:ln w="12700">
+            <a:solidFill>
+              <a:srgbClr val="E0533A"/>
+            </a:solidFill>
+            <a:prstDash val="solid"/>
+          </a:ln>
+        </p:spPr>
+      </p:sp>
+      <p:pic>
+        <p:nvPicPr>
+          <p:cNvPr id="41" name="Image 4" descr="preencoded.png">    </p:cNvPr>
+          <p:cNvPicPr>
+            <a:picLocks noChangeAspect="1"/>
+          </p:cNvPicPr>
+          <p:nvPr/>
+        </p:nvPicPr>
+        <p:blipFill>
+          <a:blip r:embed="rId5"/>
+          <a:stretch>
+            <a:fillRect/>
+          </a:stretch>
+        </p:blipFill>
+        <p:spPr>
+          <a:xfrm>
+            <a:off x="6033668" y="4771796"/>
+            <a:ext cx="231343" cy="231343"/>
+          </a:xfrm>
+          <a:prstGeom prst="rect">
+            <a:avLst/>
+          </a:prstGeom>
+        </p:spPr>
+      </p:pic>
+      <p:sp>
+        <p:nvSpPr>
+          <p:cNvPr id="42" name="Text 35"/>
+          <p:cNvSpPr txBox="1"/>
+          <p:nvPr/>
+        </p:nvSpPr>
+        <p:spPr>
+          <a:xfrm>
+            <a:off x="6611112" y="4636008"/>
+            <a:ext cx="2743200" cy="292608"/>
+          </a:xfrm>
+          <a:prstGeom prst="rect">
+            <a:avLst/>
+          </a:prstGeom>
+          <a:noFill/>
+          <a:ln/>
+        </p:spPr>
+        <p:txBody>
+          <a:bodyPr wrap="square" lIns="0" tIns="0" rIns="0" bIns="0" rtlCol="0" anchor="t"/>
+          <a:lstStyle/>
+          <a:p>
+            <a:pPr indent="0" marL="0">
+              <a:buNone/>
+            </a:pPr>
+            <a:r>
+              <a:rPr lang="en-US" sz="1450" b="1" dirty="0">
+                <a:solidFill>
+                  <a:srgbClr val="0F1B2D"/>
+                </a:solidFill>
+                <a:latin typeface="Arial" pitchFamily="34" charset="0"/>
+                <a:ea typeface="Arial" pitchFamily="34" charset="-122"/>
+                <a:cs typeface="Arial" pitchFamily="34" charset="-120"/>
+              </a:rPr>
+              <a:t>Data exfiltration</a:t>
+            </a:r>
+            <a:endParaRPr lang="en-US" sz="1450" dirty="0"/>
+          </a:p>
+        </p:txBody>
+      </p:sp>
+      <p:sp>
+        <p:nvSpPr>
+          <p:cNvPr id="43" name="Text 36"/>
+          <p:cNvSpPr txBox="1"/>
+          <p:nvPr/>
+        </p:nvSpPr>
+        <p:spPr>
+          <a:xfrm>
+            <a:off x="6611112" y="4928616"/>
+            <a:ext cx="2926080" cy="256032"/>
+          </a:xfrm>
+          <a:prstGeom prst="rect">
+            <a:avLst/>
+          </a:prstGeom>
+          <a:noFill/>
+          <a:ln/>
+        </p:spPr>
+        <p:txBody>
+          <a:bodyPr wrap="square" lIns="0" tIns="0" rIns="0" bIns="0" rtlCol="0" anchor="t"/>
+          <a:lstStyle/>
+          <a:p>
+            <a:pPr indent="0" marL="0">
+              <a:buNone/>
+            </a:pPr>
+            <a:r>
+              <a:rPr lang="en-US" sz="1150" dirty="0">
+                <a:solidFill>
+                  <a:srgbClr val="55606E"/>
+                </a:solidFill>
+                <a:latin typeface="Arial" pitchFamily="34" charset="0"/>
+                <a:ea typeface="Arial" pitchFamily="34" charset="-122"/>
+                <a:cs typeface="Arial" pitchFamily="34" charset="-120"/>
+              </a:rPr>
+              <a:t>only 15 flows in the whole dataset</a:t>
+            </a:r>
+            <a:endParaRPr lang="en-US" sz="1150" dirty="0"/>
+          </a:p>
+        </p:txBody>
+      </p:sp>
+      <p:sp>
+        <p:nvSpPr>
+          <p:cNvPr id="44" name="Text 37"/>
+          <p:cNvSpPr txBox="1"/>
+          <p:nvPr/>
+        </p:nvSpPr>
+        <p:spPr>
+          <a:xfrm>
+            <a:off x="9464040" y="4617720"/>
+            <a:ext cx="2041855" cy="548640"/>
+          </a:xfrm>
+          <a:prstGeom prst="rect">
+            <a:avLst/>
+          </a:prstGeom>
+          <a:noFill/>
+          <a:ln/>
+        </p:spPr>
+        <p:txBody>
+          <a:bodyPr wrap="square" lIns="0" tIns="0" rIns="0" bIns="0" rtlCol="0" anchor="ctr"/>
+          <a:lstStyle/>
+          <a:p>
+            <a:pPr algn="r" indent="0" marL="0">
+              <a:buNone/>
+            </a:pPr>
+            <a:r>
+              <a:rPr lang="en-US" sz="2600" dirty="0">
+                <a:solidFill>
+                  <a:srgbClr val="E0533A"/>
+                </a:solidFill>
+                <a:latin typeface="Georgia" pitchFamily="34" charset="0"/>
+                <a:ea typeface="Georgia" pitchFamily="34" charset="-122"/>
+                <a:cs typeface="Georgia" pitchFamily="34" charset="-120"/>
+              </a:rPr>
+              <a:t>2 of 5</a:t>
+            </a:r>
+            <a:endParaRPr lang="en-US" sz="2600" dirty="0"/>
+          </a:p>
+        </p:txBody>
+      </p:sp>
+      <p:sp>
+        <p:nvSpPr>
+          <p:cNvPr id="45" name="Shape 38"/>
+          <p:cNvSpPr/>
+          <p:nvPr/>
+        </p:nvSpPr>
+        <p:spPr>
+          <a:xfrm>
+            <a:off x="5897880" y="5486400"/>
+            <a:ext cx="5608015" cy="658368"/>
+          </a:xfrm>
+          <a:prstGeom prst="roundRect">
+            <a:avLst>
+              <a:gd name="adj" fmla="val 8333"/>
+            </a:avLst>
+          </a:prstGeom>
+          <a:solidFill>
+            <a:srgbClr val="EAF1FB"/>
+          </a:solidFill>
+          <a:ln w="12700">
+            <a:solidFill>
+              <a:srgbClr val="EAF1FB"/>
+            </a:solidFill>
+            <a:prstDash val="solid"/>
+          </a:ln>
+        </p:spPr>
+      </p:sp>
+      <p:sp>
+        <p:nvSpPr>
+          <p:cNvPr id="46" name="Text 39"/>
+          <p:cNvSpPr txBox="1"/>
+          <p:nvPr/>
+        </p:nvSpPr>
+        <p:spPr>
+          <a:xfrm>
+            <a:off x="6126480" y="5486400"/>
+            <a:ext cx="5150815" cy="658368"/>
+          </a:xfrm>
+          <a:prstGeom prst="rect">
+            <a:avLst/>
+          </a:prstGeom>
+          <a:noFill/>
+          <a:ln/>
+        </p:spPr>
+        <p:txBody>
+          <a:bodyPr wrap="square" lIns="0" tIns="0" rIns="0" bIns="0" rtlCol="0" anchor="ctr"/>
+          <a:lstStyle/>
+          <a:p>
+            <a:pPr indent="0" marL="0">
+              <a:buNone/>
+            </a:pPr>
+            <a:r>
+              <a:rPr lang="en-US" sz="1200" dirty="0">
+                <a:solidFill>
+                  <a:srgbClr val="0F1B2D"/>
+                </a:solidFill>
+                <a:latin typeface="Arial" pitchFamily="34" charset="0"/>
+                <a:ea typeface="Arial" pitchFamily="34" charset="-122"/>
+                <a:cs typeface="Arial" pitchFamily="34" charset="-120"/>
+              </a:rPr>
+              <a:t>Don't rank models on macro F1 here: one exfiltration flow moves it by several points. Without that class: RF 86.1%, XGBoost 86.2%, soft vote 86.3%.</a:t>
+            </a:r>
+            <a:endParaRPr lang="en-US" sz="1200" dirty="0"/>
+          </a:p>
+        </p:txBody>
+      </p:sp>
+      <p:sp>
+        <p:nvSpPr>
+          <p:cNvPr id="47" name="Text 40"/>
           <p:cNvSpPr txBox="1"/>
           <p:nvPr/>
         </p:nvSpPr>
@@ -21419,7 +22268,7 @@
       </p:sp>
       <p:sp>
         <p:nvSpPr>
-          <p:cNvPr id="29" name="Text 26"/>
+          <p:cNvPr id="48" name="Text 41"/>
           <p:cNvSpPr txBox="1"/>
           <p:nvPr/>
         </p:nvSpPr>
@@ -21957,7 +22806,7 @@
                 <a:ea typeface="Arial" pitchFamily="34" charset="-122"/>
                 <a:cs typeface="Arial" pitchFamily="34" charset="-120"/>
               </a:rPr>
-              <a:t>Five results on real APT traffic, including 15 models and 5 random seeds</a:t>
+              <a:t>Six results on real APT traffic, including 15 models and 5 random seeds</a:t>
             </a:r>
             <a:endParaRPr lang="en-US" sz="1300" dirty="0"/>
           </a:p>
@@ -22192,6 +23041,869 @@
 <file path=ppt/slides/slide20.xml><?xml version="1.0" encoding="utf-8"?>
 <p:sld xmlns:a="http://schemas.openxmlformats.org/drawingml/2006/main" xmlns:r="http://schemas.openxmlformats.org/officeDocument/2006/relationships" xmlns:p="http://schemas.openxmlformats.org/presentationml/2006/main">
   <p:cSld name="Slide 20">
+    <p:bg>
+      <p:bgPr>
+        <a:solidFill>
+          <a:srgbClr val="FFFFFF"/>
+        </a:solidFill>
+      </p:bgPr>
+    </p:bg>
+    <p:spTree>
+      <p:nvGrpSpPr>
+        <p:cNvPr id="1" name=""/>
+        <p:cNvGrpSpPr/>
+        <p:nvPr/>
+      </p:nvGrpSpPr>
+      <p:grpSpPr>
+        <a:xfrm>
+          <a:off x="0" y="0"/>
+          <a:ext cx="0" cy="0"/>
+          <a:chOff x="0" y="0"/>
+          <a:chExt cx="0" cy="0"/>
+        </a:xfrm>
+      </p:grpSpPr>
+      <p:sp>
+        <p:nvSpPr>
+          <p:cNvPr id="2" name="Shape 0"/>
+          <p:cNvSpPr/>
+          <p:nvPr/>
+        </p:nvSpPr>
+        <p:spPr>
+          <a:xfrm flipV="1">
+            <a:off x="10087295" y="470002"/>
+            <a:ext cx="288950" cy="416966"/>
+          </a:xfrm>
+          <a:prstGeom prst="line">
+            <a:avLst/>
+          </a:prstGeom>
+          <a:noFill/>
+          <a:ln w="9525">
+            <a:solidFill>
+              <a:srgbClr val="DCE2EA"/>
+            </a:solidFill>
+            <a:prstDash val="solid"/>
+          </a:ln>
+        </p:spPr>
+      </p:sp>
+      <p:sp>
+        <p:nvSpPr>
+          <p:cNvPr id="3" name="Shape 1"/>
+          <p:cNvSpPr/>
+          <p:nvPr/>
+        </p:nvSpPr>
+        <p:spPr>
+          <a:xfrm>
+            <a:off x="10087295" y="886968"/>
+            <a:ext cx="549006" cy="69494"/>
+          </a:xfrm>
+          <a:prstGeom prst="line">
+            <a:avLst/>
+          </a:prstGeom>
+          <a:noFill/>
+          <a:ln w="9525">
+            <a:solidFill>
+              <a:srgbClr val="DCE2EA"/>
+            </a:solidFill>
+            <a:prstDash val="solid"/>
+          </a:ln>
+        </p:spPr>
+      </p:sp>
+      <p:sp>
+        <p:nvSpPr>
+          <p:cNvPr id="4" name="Shape 2"/>
+          <p:cNvSpPr/>
+          <p:nvPr/>
+        </p:nvSpPr>
+        <p:spPr>
+          <a:xfrm>
+            <a:off x="10376245" y="470002"/>
+            <a:ext cx="549006" cy="156362"/>
+          </a:xfrm>
+          <a:prstGeom prst="line">
+            <a:avLst/>
+          </a:prstGeom>
+          <a:noFill/>
+          <a:ln w="9525">
+            <a:solidFill>
+              <a:srgbClr val="F2B7A8"/>
+            </a:solidFill>
+            <a:prstDash val="solid"/>
+          </a:ln>
+        </p:spPr>
+      </p:sp>
+      <p:sp>
+        <p:nvSpPr>
+          <p:cNvPr id="5" name="Shape 3"/>
+          <p:cNvSpPr/>
+          <p:nvPr/>
+        </p:nvSpPr>
+        <p:spPr>
+          <a:xfrm flipV="1">
+            <a:off x="10636301" y="626364"/>
+            <a:ext cx="288950" cy="330098"/>
+          </a:xfrm>
+          <a:prstGeom prst="line">
+            <a:avLst/>
+          </a:prstGeom>
+          <a:noFill/>
+          <a:ln w="9525">
+            <a:solidFill>
+              <a:srgbClr val="F2B7A8"/>
+            </a:solidFill>
+            <a:prstDash val="solid"/>
+          </a:ln>
+        </p:spPr>
+      </p:sp>
+      <p:sp>
+        <p:nvSpPr>
+          <p:cNvPr id="6" name="Shape 4"/>
+          <p:cNvSpPr/>
+          <p:nvPr/>
+        </p:nvSpPr>
+        <p:spPr>
+          <a:xfrm flipV="1">
+            <a:off x="10925251" y="522122"/>
+            <a:ext cx="534558" cy="104242"/>
+          </a:xfrm>
+          <a:prstGeom prst="line">
+            <a:avLst/>
+          </a:prstGeom>
+          <a:noFill/>
+          <a:ln w="9525">
+            <a:solidFill>
+              <a:srgbClr val="F2B7A8"/>
+            </a:solidFill>
+            <a:prstDash val="solid"/>
+          </a:ln>
+        </p:spPr>
+      </p:sp>
+      <p:sp>
+        <p:nvSpPr>
+          <p:cNvPr id="7" name="Shape 5"/>
+          <p:cNvSpPr/>
+          <p:nvPr/>
+        </p:nvSpPr>
+        <p:spPr>
+          <a:xfrm>
+            <a:off x="10636301" y="956462"/>
+            <a:ext cx="549006" cy="121615"/>
+          </a:xfrm>
+          <a:prstGeom prst="line">
+            <a:avLst/>
+          </a:prstGeom>
+          <a:noFill/>
+          <a:ln w="9525">
+            <a:solidFill>
+              <a:srgbClr val="DCE2EA"/>
+            </a:solidFill>
+            <a:prstDash val="solid"/>
+          </a:ln>
+        </p:spPr>
+      </p:sp>
+      <p:sp>
+        <p:nvSpPr>
+          <p:cNvPr id="8" name="Shape 6"/>
+          <p:cNvSpPr/>
+          <p:nvPr/>
+        </p:nvSpPr>
+        <p:spPr>
+          <a:xfrm flipV="1">
+            <a:off x="11185307" y="843534"/>
+            <a:ext cx="173370" cy="234544"/>
+          </a:xfrm>
+          <a:prstGeom prst="line">
+            <a:avLst/>
+          </a:prstGeom>
+          <a:noFill/>
+          <a:ln w="9525">
+            <a:solidFill>
+              <a:srgbClr val="DCE2EA"/>
+            </a:solidFill>
+            <a:prstDash val="solid"/>
+          </a:ln>
+        </p:spPr>
+      </p:sp>
+      <p:sp>
+        <p:nvSpPr>
+          <p:cNvPr id="9" name="Shape 7"/>
+          <p:cNvSpPr/>
+          <p:nvPr/>
+        </p:nvSpPr>
+        <p:spPr>
+          <a:xfrm flipH="1">
+            <a:off x="11358677" y="522122"/>
+            <a:ext cx="101133" cy="321412"/>
+          </a:xfrm>
+          <a:prstGeom prst="line">
+            <a:avLst/>
+          </a:prstGeom>
+          <a:noFill/>
+          <a:ln w="9525">
+            <a:solidFill>
+              <a:srgbClr val="DCE2EA"/>
+            </a:solidFill>
+            <a:prstDash val="solid"/>
+          </a:ln>
+        </p:spPr>
+      </p:sp>
+      <p:sp>
+        <p:nvSpPr>
+          <p:cNvPr id="10" name="Shape 8"/>
+          <p:cNvSpPr/>
+          <p:nvPr/>
+        </p:nvSpPr>
+        <p:spPr>
+          <a:xfrm>
+            <a:off x="10055291" y="854964"/>
+            <a:ext cx="64008" cy="64008"/>
+          </a:xfrm>
+          <a:prstGeom prst="ellipse">
+            <a:avLst/>
+          </a:prstGeom>
+          <a:solidFill>
+            <a:srgbClr val="C3CCD9"/>
+          </a:solidFill>
+          <a:ln w="12700">
+            <a:solidFill>
+              <a:srgbClr val="C3CCD9"/>
+            </a:solidFill>
+            <a:prstDash val="solid"/>
+          </a:ln>
+        </p:spPr>
+      </p:sp>
+      <p:sp>
+        <p:nvSpPr>
+          <p:cNvPr id="11" name="Shape 9"/>
+          <p:cNvSpPr/>
+          <p:nvPr/>
+        </p:nvSpPr>
+        <p:spPr>
+          <a:xfrm>
+            <a:off x="10335097" y="428854"/>
+            <a:ext cx="82296" cy="82296"/>
+          </a:xfrm>
+          <a:prstGeom prst="ellipse">
+            <a:avLst/>
+          </a:prstGeom>
+          <a:solidFill>
+            <a:srgbClr val="C3CCD9"/>
+          </a:solidFill>
+          <a:ln w="12700">
+            <a:solidFill>
+              <a:srgbClr val="C3CCD9"/>
+            </a:solidFill>
+            <a:prstDash val="solid"/>
+          </a:ln>
+        </p:spPr>
+      </p:sp>
+      <p:sp>
+        <p:nvSpPr>
+          <p:cNvPr id="12" name="Shape 10"/>
+          <p:cNvSpPr/>
+          <p:nvPr/>
+        </p:nvSpPr>
+        <p:spPr>
+          <a:xfrm>
+            <a:off x="10599725" y="919886"/>
+            <a:ext cx="73152" cy="73152"/>
+          </a:xfrm>
+          <a:prstGeom prst="ellipse">
+            <a:avLst/>
+          </a:prstGeom>
+          <a:solidFill>
+            <a:srgbClr val="C3CCD9"/>
+          </a:solidFill>
+          <a:ln w="12700">
+            <a:solidFill>
+              <a:srgbClr val="C3CCD9"/>
+            </a:solidFill>
+            <a:prstDash val="solid"/>
+          </a:ln>
+        </p:spPr>
+      </p:sp>
+      <p:sp>
+        <p:nvSpPr>
+          <p:cNvPr id="13" name="Shape 11"/>
+          <p:cNvSpPr/>
+          <p:nvPr/>
+        </p:nvSpPr>
+        <p:spPr>
+          <a:xfrm>
+            <a:off x="10806379" y="507492"/>
+            <a:ext cx="237744" cy="237744"/>
+          </a:xfrm>
+          <a:prstGeom prst="ellipse">
+            <a:avLst/>
+          </a:prstGeom>
+          <a:solidFill>
+            <a:srgbClr val="E0533A">
+              <a:alpha val="18000"/>
+            </a:srgbClr>
+          </a:solidFill>
+          <a:ln w="12700">
+            <a:solidFill>
+              <a:srgbClr val="E0533A">
+                <a:alpha val="18000"/>
+              </a:srgbClr>
+            </a:solidFill>
+            <a:prstDash val="solid"/>
+          </a:ln>
+        </p:spPr>
+      </p:sp>
+      <p:sp>
+        <p:nvSpPr>
+          <p:cNvPr id="14" name="Shape 12"/>
+          <p:cNvSpPr/>
+          <p:nvPr/>
+        </p:nvSpPr>
+        <p:spPr>
+          <a:xfrm>
+            <a:off x="10874959" y="576072"/>
+            <a:ext cx="100584" cy="100584"/>
+          </a:xfrm>
+          <a:prstGeom prst="ellipse">
+            <a:avLst/>
+          </a:prstGeom>
+          <a:solidFill>
+            <a:srgbClr val="E0533A"/>
+          </a:solidFill>
+          <a:ln w="12700">
+            <a:solidFill>
+              <a:srgbClr val="E0533A"/>
+            </a:solidFill>
+            <a:prstDash val="solid"/>
+          </a:ln>
+        </p:spPr>
+      </p:sp>
+      <p:sp>
+        <p:nvSpPr>
+          <p:cNvPr id="15" name="Shape 13"/>
+          <p:cNvSpPr/>
+          <p:nvPr/>
+        </p:nvSpPr>
+        <p:spPr>
+          <a:xfrm>
+            <a:off x="11144159" y="1036930"/>
+            <a:ext cx="82296" cy="82296"/>
+          </a:xfrm>
+          <a:prstGeom prst="ellipse">
+            <a:avLst/>
+          </a:prstGeom>
+          <a:solidFill>
+            <a:srgbClr val="C3CCD9"/>
+          </a:solidFill>
+          <a:ln w="12700">
+            <a:solidFill>
+              <a:srgbClr val="C3CCD9"/>
+            </a:solidFill>
+            <a:prstDash val="solid"/>
+          </a:ln>
+        </p:spPr>
+      </p:sp>
+      <p:sp>
+        <p:nvSpPr>
+          <p:cNvPr id="16" name="Shape 14"/>
+          <p:cNvSpPr/>
+          <p:nvPr/>
+        </p:nvSpPr>
+        <p:spPr>
+          <a:xfrm>
+            <a:off x="11427805" y="490118"/>
+            <a:ext cx="64008" cy="64008"/>
+          </a:xfrm>
+          <a:prstGeom prst="ellipse">
+            <a:avLst/>
+          </a:prstGeom>
+          <a:solidFill>
+            <a:srgbClr val="C3CCD9"/>
+          </a:solidFill>
+          <a:ln w="12700">
+            <a:solidFill>
+              <a:srgbClr val="C3CCD9"/>
+            </a:solidFill>
+            <a:prstDash val="solid"/>
+          </a:ln>
+        </p:spPr>
+      </p:sp>
+      <p:sp>
+        <p:nvSpPr>
+          <p:cNvPr id="17" name="Shape 15"/>
+          <p:cNvSpPr/>
+          <p:nvPr/>
+        </p:nvSpPr>
+        <p:spPr>
+          <a:xfrm>
+            <a:off x="11331245" y="816102"/>
+            <a:ext cx="54864" cy="54864"/>
+          </a:xfrm>
+          <a:prstGeom prst="ellipse">
+            <a:avLst/>
+          </a:prstGeom>
+          <a:solidFill>
+            <a:srgbClr val="C3CCD9"/>
+          </a:solidFill>
+          <a:ln w="12700">
+            <a:solidFill>
+              <a:srgbClr val="C3CCD9"/>
+            </a:solidFill>
+            <a:prstDash val="solid"/>
+          </a:ln>
+        </p:spPr>
+      </p:sp>
+      <p:sp>
+        <p:nvSpPr>
+          <p:cNvPr id="18" name="Text 16"/>
+          <p:cNvSpPr txBox="1"/>
+          <p:nvPr/>
+        </p:nvSpPr>
+        <p:spPr>
+          <a:xfrm>
+            <a:off x="685800" y="475488"/>
+            <a:ext cx="10820095" cy="256032"/>
+          </a:xfrm>
+          <a:prstGeom prst="rect">
+            <a:avLst/>
+          </a:prstGeom>
+          <a:noFill/>
+          <a:ln/>
+        </p:spPr>
+        <p:txBody>
+          <a:bodyPr wrap="square" lIns="0" tIns="0" rIns="0" bIns="0" rtlCol="0" anchor="t"/>
+          <a:lstStyle/>
+          <a:p>
+            <a:pPr indent="0" marL="0">
+              <a:buNone/>
+            </a:pPr>
+            <a:r>
+              <a:rPr lang="en-US" sz="1100" b="1" dirty="0">
+                <a:solidFill>
+                  <a:srgbClr val="E0533A"/>
+                </a:solidFill>
+                <a:latin typeface="Arial" pitchFamily="34" charset="0"/>
+                <a:ea typeface="Arial" pitchFamily="34" charset="-122"/>
+                <a:cs typeface="Arial" pitchFamily="34" charset="-120"/>
+              </a:rPr>
+              <a:t>03 · RESULTS</a:t>
+            </a:r>
+            <a:endParaRPr lang="en-US" sz="1100" dirty="0"/>
+          </a:p>
+        </p:txBody>
+      </p:sp>
+      <p:sp>
+        <p:nvSpPr>
+          <p:cNvPr id="19" name="Text 17"/>
+          <p:cNvSpPr txBox="1"/>
+          <p:nvPr/>
+        </p:nvSpPr>
+        <p:spPr>
+          <a:xfrm>
+            <a:off x="685800" y="768096"/>
+            <a:ext cx="10820095" cy="822960"/>
+          </a:xfrm>
+          <a:prstGeom prst="rect">
+            <a:avLst/>
+          </a:prstGeom>
+          <a:noFill/>
+          <a:ln/>
+        </p:spPr>
+        <p:txBody>
+          <a:bodyPr wrap="square" lIns="0" tIns="0" rIns="0" bIns="0" rtlCol="0" anchor="t"/>
+          <a:lstStyle/>
+          <a:p>
+            <a:pPr indent="0" marL="0">
+              <a:buNone/>
+            </a:pPr>
+            <a:r>
+              <a:rPr lang="en-US" sz="3000" dirty="0">
+                <a:solidFill>
+                  <a:srgbClr val="0F1B2D"/>
+                </a:solidFill>
+                <a:latin typeface="Georgia" pitchFamily="34" charset="0"/>
+                <a:ea typeface="Georgia" pitchFamily="34" charset="-122"/>
+                <a:cs typeface="Georgia" pitchFamily="34" charset="-120"/>
+              </a:rPr>
+              <a:t>Errors: possible label noise, and real weak spots</a:t>
+            </a:r>
+            <a:endParaRPr lang="en-US" sz="3000" dirty="0"/>
+          </a:p>
+        </p:txBody>
+      </p:sp>
+      <p:sp>
+        <p:nvSpPr>
+          <p:cNvPr id="20" name="Shape 18"/>
+          <p:cNvSpPr/>
+          <p:nvPr/>
+        </p:nvSpPr>
+        <p:spPr>
+          <a:xfrm>
+            <a:off x="685800" y="1783080"/>
+            <a:ext cx="4983480" cy="2103120"/>
+          </a:xfrm>
+          <a:prstGeom prst="roundRect">
+            <a:avLst>
+              <a:gd name="adj" fmla="val 2609"/>
+            </a:avLst>
+          </a:prstGeom>
+          <a:solidFill>
+            <a:srgbClr val="FDEEEA"/>
+          </a:solidFill>
+          <a:ln w="12700">
+            <a:solidFill>
+              <a:srgbClr val="FDEEEA"/>
+            </a:solidFill>
+            <a:prstDash val="solid"/>
+          </a:ln>
+        </p:spPr>
+      </p:sp>
+      <p:sp>
+        <p:nvSpPr>
+          <p:cNvPr id="21" name="Text 19"/>
+          <p:cNvSpPr txBox="1"/>
+          <p:nvPr/>
+        </p:nvSpPr>
+        <p:spPr>
+          <a:xfrm>
+            <a:off x="1051560" y="1965960"/>
+            <a:ext cx="2743200" cy="777240"/>
+          </a:xfrm>
+          <a:prstGeom prst="rect">
+            <a:avLst/>
+          </a:prstGeom>
+          <a:noFill/>
+          <a:ln/>
+        </p:spPr>
+        <p:txBody>
+          <a:bodyPr wrap="square" lIns="0" tIns="0" rIns="0" bIns="0" rtlCol="0" anchor="t"/>
+          <a:lstStyle/>
+          <a:p>
+            <a:pPr indent="0" marL="0">
+              <a:buNone/>
+            </a:pPr>
+            <a:r>
+              <a:rPr lang="en-US" sz="4400" dirty="0">
+                <a:solidFill>
+                  <a:srgbClr val="E0533A"/>
+                </a:solidFill>
+                <a:latin typeface="Georgia" pitchFamily="34" charset="0"/>
+                <a:ea typeface="Georgia" pitchFamily="34" charset="-122"/>
+                <a:cs typeface="Georgia" pitchFamily="34" charset="-120"/>
+              </a:rPr>
+              <a:t>50.6%</a:t>
+            </a:r>
+            <a:endParaRPr lang="en-US" sz="4400" dirty="0"/>
+          </a:p>
+        </p:txBody>
+      </p:sp>
+      <p:sp>
+        <p:nvSpPr>
+          <p:cNvPr id="22" name="Text 20"/>
+          <p:cNvSpPr txBox="1"/>
+          <p:nvPr/>
+        </p:nvSpPr>
+        <p:spPr>
+          <a:xfrm>
+            <a:off x="1051560" y="2788920"/>
+            <a:ext cx="4297680" cy="914400"/>
+          </a:xfrm>
+          <a:prstGeom prst="rect">
+            <a:avLst/>
+          </a:prstGeom>
+          <a:noFill/>
+          <a:ln/>
+        </p:spPr>
+        <p:txBody>
+          <a:bodyPr wrap="square" lIns="0" tIns="0" rIns="0" bIns="0" rtlCol="0" anchor="t"/>
+          <a:lstStyle/>
+          <a:p>
+            <a:pPr indent="0" marL="0">
+              <a:buNone/>
+            </a:pPr>
+            <a:r>
+              <a:rPr lang="en-US" sz="1300" dirty="0">
+                <a:solidFill>
+                  <a:srgbClr val="0F1B2D"/>
+                </a:solidFill>
+                <a:latin typeface="Arial" pitchFamily="34" charset="0"/>
+                <a:ea typeface="Arial" pitchFamily="34" charset="-122"/>
+                <a:cs typeface="Arial" pitchFamily="34" charset="-120"/>
+              </a:rPr>
+              <a:t>of false alarms are benign-labelled flows involving the attacker's hosts: possible label noise, but not proof, since those hosts also appear on attack-free Monday</a:t>
+            </a:r>
+            <a:endParaRPr lang="en-US" sz="1300" dirty="0"/>
+          </a:p>
+        </p:txBody>
+      </p:sp>
+      <p:sp>
+        <p:nvSpPr>
+          <p:cNvPr id="23" name="Shape 21"/>
+          <p:cNvSpPr/>
+          <p:nvPr/>
+        </p:nvSpPr>
+        <p:spPr>
+          <a:xfrm>
+            <a:off x="685800" y="4069080"/>
+            <a:ext cx="4983480" cy="2057400"/>
+          </a:xfrm>
+          <a:prstGeom prst="roundRect">
+            <a:avLst>
+              <a:gd name="adj" fmla="val 2667"/>
+            </a:avLst>
+          </a:prstGeom>
+          <a:solidFill>
+            <a:srgbClr val="EAF1FB"/>
+          </a:solidFill>
+          <a:ln w="12700">
+            <a:solidFill>
+              <a:srgbClr val="EAF1FB"/>
+            </a:solidFill>
+            <a:prstDash val="solid"/>
+          </a:ln>
+        </p:spPr>
+      </p:sp>
+      <p:sp>
+        <p:nvSpPr>
+          <p:cNvPr id="24" name="Text 22"/>
+          <p:cNvSpPr txBox="1"/>
+          <p:nvPr/>
+        </p:nvSpPr>
+        <p:spPr>
+          <a:xfrm>
+            <a:off x="1051560" y="4251960"/>
+            <a:ext cx="2743200" cy="777240"/>
+          </a:xfrm>
+          <a:prstGeom prst="rect">
+            <a:avLst/>
+          </a:prstGeom>
+          <a:noFill/>
+          <a:ln/>
+        </p:spPr>
+        <p:txBody>
+          <a:bodyPr wrap="square" lIns="0" tIns="0" rIns="0" bIns="0" rtlCol="0" anchor="t"/>
+          <a:lstStyle/>
+          <a:p>
+            <a:pPr indent="0" marL="0">
+              <a:buNone/>
+            </a:pPr>
+            <a:r>
+              <a:rPr lang="en-US" sz="4400" dirty="0">
+                <a:solidFill>
+                  <a:srgbClr val="2A78D6"/>
+                </a:solidFill>
+                <a:latin typeface="Georgia" pitchFamily="34" charset="0"/>
+                <a:ea typeface="Georgia" pitchFamily="34" charset="-122"/>
+                <a:cs typeface="Georgia" pitchFamily="34" charset="-120"/>
+              </a:rPr>
+              <a:t>42.2%</a:t>
+            </a:r>
+            <a:endParaRPr lang="en-US" sz="4400" dirty="0"/>
+          </a:p>
+        </p:txBody>
+      </p:sp>
+      <p:sp>
+        <p:nvSpPr>
+          <p:cNvPr id="25" name="Text 23"/>
+          <p:cNvSpPr txBox="1"/>
+          <p:nvPr/>
+        </p:nvSpPr>
+        <p:spPr>
+          <a:xfrm>
+            <a:off x="1051560" y="5074920"/>
+            <a:ext cx="4297680" cy="868680"/>
+          </a:xfrm>
+          <a:prstGeom prst="rect">
+            <a:avLst/>
+          </a:prstGeom>
+          <a:noFill/>
+          <a:ln/>
+        </p:spPr>
+        <p:txBody>
+          <a:bodyPr wrap="square" lIns="0" tIns="0" rIns="0" bIns="0" rtlCol="0" anchor="t"/>
+          <a:lstStyle/>
+          <a:p>
+            <a:pPr indent="0" marL="0">
+              <a:buNone/>
+            </a:pPr>
+            <a:r>
+              <a:rPr lang="en-US" sz="1300" dirty="0">
+                <a:solidFill>
+                  <a:srgbClr val="0F1B2D"/>
+                </a:solidFill>
+                <a:latin typeface="Arial" pitchFamily="34" charset="0"/>
+                <a:ea typeface="Arial" pitchFamily="34" charset="-122"/>
+                <a:cs typeface="Arial" pitchFamily="34" charset="-120"/>
+              </a:rPr>
+              <a:t>of false alarms fall on Monday, when no attacks are labelled at all: genuine false alarms on normal traffic</a:t>
+            </a:r>
+            <a:endParaRPr lang="en-US" sz="1300" dirty="0"/>
+          </a:p>
+        </p:txBody>
+      </p:sp>
+      <p:sp>
+        <p:nvSpPr>
+          <p:cNvPr id="26" name="Text 24"/>
+          <p:cNvSpPr txBox="1"/>
+          <p:nvPr/>
+        </p:nvSpPr>
+        <p:spPr>
+          <a:xfrm>
+            <a:off x="6016752" y="1783080"/>
+            <a:ext cx="5489143" cy="320040"/>
+          </a:xfrm>
+          <a:prstGeom prst="rect">
+            <a:avLst/>
+          </a:prstGeom>
+          <a:noFill/>
+          <a:ln/>
+        </p:spPr>
+        <p:txBody>
+          <a:bodyPr wrap="square" lIns="0" tIns="0" rIns="0" bIns="0" rtlCol="0" anchor="t"/>
+          <a:lstStyle/>
+          <a:p>
+            <a:pPr indent="0" marL="0">
+              <a:buNone/>
+            </a:pPr>
+            <a:r>
+              <a:rPr lang="en-US" sz="1400" b="1" dirty="0">
+                <a:solidFill>
+                  <a:srgbClr val="0F1B2D"/>
+                </a:solidFill>
+                <a:latin typeface="Arial" pitchFamily="34" charset="0"/>
+                <a:ea typeface="Arial" pitchFamily="34" charset="-122"/>
+                <a:cs typeface="Arial" pitchFamily="34" charset="-120"/>
+              </a:rPr>
+              <a:t>Missed APT flows by activity</a:t>
+            </a:r>
+            <a:pPr indent="0" marL="0">
+              <a:buNone/>
+            </a:pPr>
+            <a:r>
+              <a:rPr lang="en-US" sz="1150" dirty="0">
+                <a:solidFill>
+                  <a:srgbClr val="8A94A3"/>
+                </a:solidFill>
+                <a:latin typeface="Arial" pitchFamily="34" charset="0"/>
+                <a:ea typeface="Arial" pitchFamily="34" charset="-122"/>
+                <a:cs typeface="Arial" pitchFamily="34" charset="-120"/>
+              </a:rPr>
+              <a:t>   ·   most misses: Account Discovery (57 of 127)</a:t>
+            </a:r>
+            <a:endParaRPr lang="en-US" sz="1400" dirty="0"/>
+          </a:p>
+        </p:txBody>
+      </p:sp>
+      <p:pic>
+        <p:nvPicPr>
+          <p:cNvPr id="27" name="Image 0" descr="/private/tmp/claude-501/-Users-ashishjain-Documents-RIS-Mid-Eval/4e14a31e-25f5-4016-81db-47057b986f0d/scratchpad/deck/charts/missed_by_activity.png">    </p:cNvPr>
+          <p:cNvPicPr>
+            <a:picLocks noChangeAspect="1"/>
+          </p:cNvPicPr>
+          <p:nvPr/>
+        </p:nvPicPr>
+        <p:blipFill>
+          <a:blip r:embed="rId1"/>
+          <a:stretch>
+            <a:fillRect/>
+          </a:stretch>
+        </p:blipFill>
+        <p:spPr>
+          <a:xfrm>
+            <a:off x="6016752" y="2148840"/>
+            <a:ext cx="5486400" cy="4023360"/>
+          </a:xfrm>
+          <a:prstGeom prst="rect">
+            <a:avLst/>
+          </a:prstGeom>
+        </p:spPr>
+      </p:pic>
+      <p:sp>
+        <p:nvSpPr>
+          <p:cNvPr id="28" name="Text 25"/>
+          <p:cNvSpPr txBox="1"/>
+          <p:nvPr/>
+        </p:nvSpPr>
+        <p:spPr>
+          <a:xfrm>
+            <a:off x="685800" y="6400800"/>
+            <a:ext cx="7315200" cy="228600"/>
+          </a:xfrm>
+          <a:prstGeom prst="rect">
+            <a:avLst/>
+          </a:prstGeom>
+          <a:noFill/>
+          <a:ln/>
+        </p:spPr>
+        <p:txBody>
+          <a:bodyPr wrap="square" lIns="0" tIns="0" rIns="0" bIns="0" rtlCol="0" anchor="t"/>
+          <a:lstStyle/>
+          <a:p>
+            <a:pPr indent="0" marL="0">
+              <a:buNone/>
+            </a:pPr>
+            <a:r>
+              <a:rPr lang="en-US" sz="900" dirty="0">
+                <a:solidFill>
+                  <a:srgbClr val="8A94A3"/>
+                </a:solidFill>
+                <a:latin typeface="Arial" pitchFamily="34" charset="0"/>
+                <a:ea typeface="Arial" pitchFamily="34" charset="-122"/>
+                <a:cs typeface="Arial" pitchFamily="34" charset="-120"/>
+              </a:rPr>
+              <a:t>Anomaly detection for Advanced Persistent Threats   |   Mid-term evaluation</a:t>
+            </a:r>
+            <a:endParaRPr lang="en-US" sz="900" dirty="0"/>
+          </a:p>
+        </p:txBody>
+      </p:sp>
+      <p:sp>
+        <p:nvSpPr>
+          <p:cNvPr id="29" name="Text 26"/>
+          <p:cNvSpPr txBox="1"/>
+          <p:nvPr/>
+        </p:nvSpPr>
+        <p:spPr>
+          <a:xfrm>
+            <a:off x="10591495" y="6400800"/>
+            <a:ext cx="914400" cy="228600"/>
+          </a:xfrm>
+          <a:prstGeom prst="rect">
+            <a:avLst/>
+          </a:prstGeom>
+          <a:noFill/>
+          <a:ln/>
+        </p:spPr>
+        <p:txBody>
+          <a:bodyPr wrap="square" lIns="0" tIns="0" rIns="0" bIns="0" rtlCol="0" anchor="t"/>
+          <a:lstStyle/>
+          <a:p>
+            <a:pPr algn="r" indent="0" marL="0">
+              <a:buNone/>
+            </a:pPr>
+            <a:r>
+              <a:rPr lang="en-US" sz="900" dirty="0">
+                <a:solidFill>
+                  <a:srgbClr val="8A94A3"/>
+                </a:solidFill>
+                <a:latin typeface="Arial" pitchFamily="34" charset="0"/>
+                <a:ea typeface="Arial" pitchFamily="34" charset="-122"/>
+                <a:cs typeface="Arial" pitchFamily="34" charset="-120"/>
+              </a:rPr>
+              <a:t>20</a:t>
+            </a:r>
+            <a:endParaRPr lang="en-US" sz="900" dirty="0"/>
+          </a:p>
+        </p:txBody>
+      </p:sp>
+    </p:spTree>
+  </p:cSld>
+  <p:clrMapOvr>
+    <a:masterClrMapping/>
+  </p:clrMapOvr>
+</p:sld>
+</file>
+
+<file path=ppt/slides/slide21.xml><?xml version="1.0" encoding="utf-8"?>
+<p:sld xmlns:a="http://schemas.openxmlformats.org/drawingml/2006/main" xmlns:r="http://schemas.openxmlformats.org/officeDocument/2006/relationships" xmlns:p="http://schemas.openxmlformats.org/presentationml/2006/main">
+  <p:cSld name="Slide 21">
     <p:bg>
       <p:bgPr>
         <a:blipFill dpi="0" rotWithShape="1">
@@ -24350,9 +26062,9 @@
 </p:sld>
 </file>
 
-<file path=ppt/slides/slide21.xml><?xml version="1.0" encoding="utf-8"?>
+<file path=ppt/slides/slide22.xml><?xml version="1.0" encoding="utf-8"?>
 <p:sld xmlns:a="http://schemas.openxmlformats.org/drawingml/2006/main" xmlns:r="http://schemas.openxmlformats.org/officeDocument/2006/relationships" xmlns:p="http://schemas.openxmlformats.org/presentationml/2006/main">
-  <p:cSld name="Slide 21">
+  <p:cSld name="Slide 22">
     <p:bg>
       <p:bgPr>
         <a:solidFill>
@@ -24951,7 +26663,7 @@
                 <a:ea typeface="Arial" pitchFamily="34" charset="-122"/>
                 <a:cs typeface="Arial" pitchFamily="34" charset="-120"/>
               </a:rPr>
-              <a:t>AUC ≈ 99%, but the false positive rate is ≈ 6%, not 0.52%</a:t>
+              <a:t>AUC ≈ 99%, but the false positive rate is ≈ 7%, not 0.52%</a:t>
             </a:r>
             <a:endParaRPr lang="en-US" sz="1250" dirty="0"/>
           </a:p>
@@ -25029,7 +26741,7 @@
                 <a:ea typeface="Arial" pitchFamily="34" charset="-122"/>
                 <a:cs typeface="Arial" pitchFamily="34" charset="-120"/>
               </a:rPr>
-              <a:t>The paper's protocol inflates results</a:t>
+              <a:t>Balancing before splitting inflates scores</a:t>
             </a:r>
             <a:endParaRPr lang="en-US" sz="1550" dirty="0"/>
           </a:p>
@@ -25068,7 +26780,7 @@
                 <a:ea typeface="Arial" pitchFamily="34" charset="-122"/>
                 <a:cs typeface="Arial" pitchFamily="34" charset="-120"/>
               </a:rPr>
-              <a:t>Balancing before splitting: F1 96.5% → 89.5%, missed APT flows ×3</a:t>
+              <a:t>F1 97.1% → 88.9%: 5.6 points from the 50/50 test set, 2.6 from leakage</a:t>
             </a:r>
             <a:endParaRPr lang="en-US" sz="1250" dirty="0"/>
           </a:p>
@@ -25169,7 +26881,7 @@
                 <a:ea typeface="Arial" pitchFamily="34" charset="-122"/>
                 <a:cs typeface="Arial" pitchFamily="34" charset="-120"/>
               </a:rPr>
-              <a:t>The hybrid ≈ its own components</a:t>
+              <a:t>The published hybrid doesn't beat its parts</a:t>
             </a:r>
             <a:endParaRPr lang="en-US" sz="1550" dirty="0"/>
           </a:p>
@@ -25208,7 +26920,7 @@
                 <a:ea typeface="Arial" pitchFamily="34" charset="-122"/>
                 <a:cs typeface="Arial" pitchFamily="34" charset="-120"/>
               </a:rPr>
-              <a:t>Tied with RF and XGBoost on F1; the OR rule trades false alarms for recall</a:t>
+              <a:t>A soft vote does slightly better: best mean F1 over 5 seeds, by about 0.2 points</a:t>
             </a:r>
             <a:endParaRPr lang="en-US" sz="1250" dirty="0"/>
           </a:p>
@@ -25488,7 +27200,7 @@
                 <a:ea typeface="Arial" pitchFamily="34" charset="-122"/>
                 <a:cs typeface="Arial" pitchFamily="34" charset="-120"/>
               </a:rPr>
-              <a:t>Reconnaissance and foothold ≥ 96%, lateral movement 90%</a:t>
+              <a:t>Recon 98%, foothold 98%, lateral 92%; exfiltration has too little data</a:t>
             </a:r>
             <a:endParaRPr lang="en-US" sz="1250" dirty="0"/>
           </a:p>
@@ -25589,7 +27301,7 @@
                 <a:ea typeface="Arial" pitchFamily="34" charset="-122"/>
                 <a:cs typeface="Arial" pitchFamily="34" charset="-120"/>
               </a:rPr>
-              <a:t>Rare, quiet steps remain hard</a:t>
+              <a:t>Weak spots are known</a:t>
             </a:r>
             <a:endParaRPr lang="en-US" sz="1550" dirty="0"/>
           </a:p>
@@ -25628,7 +27340,7 @@
                 <a:ea typeface="Arial" pitchFamily="34" charset="-122"/>
                 <a:cs typeface="Arial" pitchFamily="34" charset="-120"/>
               </a:rPr>
-              <a:t>SQL injection, privilege escalation, exfiltration; plus label noise in DAPT2020</a:t>
+              <a:t>Most misses are account discovery; rare steps (SQLi, CSRF, privilege escalation) are missed most often</a:t>
             </a:r>
             <a:endParaRPr lang="en-US" sz="1250" dirty="0"/>
           </a:p>
@@ -25706,7 +27418,7 @@
                 <a:ea typeface="Arial" pitchFamily="34" charset="-122"/>
                 <a:cs typeface="Arial" pitchFamily="34" charset="-120"/>
               </a:rPr>
-              <a:t>21</a:t>
+              <a:t>22</a:t>
             </a:r>
             <a:endParaRPr lang="en-US" sz="900" dirty="0"/>
           </a:p>
@@ -25720,9 +27432,9 @@
 </p:sld>
 </file>
 
-<file path=ppt/slides/slide22.xml><?xml version="1.0" encoding="utf-8"?>
+<file path=ppt/slides/slide23.xml><?xml version="1.0" encoding="utf-8"?>
 <p:sld xmlns:a="http://schemas.openxmlformats.org/drawingml/2006/main" xmlns:r="http://schemas.openxmlformats.org/officeDocument/2006/relationships" xmlns:p="http://schemas.openxmlformats.org/presentationml/2006/main">
-  <p:cSld name="Slide 22">
+  <p:cSld name="Slide 23">
     <p:bg>
       <p:bgPr>
         <a:solidFill>
@@ -27073,7 +28785,7 @@
                 <a:ea typeface="Arial" pitchFamily="34" charset="-122"/>
                 <a:cs typeface="Arial" pitchFamily="34" charset="-120"/>
               </a:rPr>
-              <a:t>22</a:t>
+              <a:t>23</a:t>
             </a:r>
             <a:endParaRPr lang="en-US" sz="900" dirty="0"/>
           </a:p>
@@ -27087,9 +28799,9 @@
 </p:sld>
 </file>
 
-<file path=ppt/slides/slide23.xml><?xml version="1.0" encoding="utf-8"?>
+<file path=ppt/slides/slide24.xml><?xml version="1.0" encoding="utf-8"?>
 <p:sld xmlns:a="http://schemas.openxmlformats.org/drawingml/2006/main" xmlns:r="http://schemas.openxmlformats.org/officeDocument/2006/relationships" xmlns:p="http://schemas.openxmlformats.org/presentationml/2006/main">
-  <p:cSld name="Slide 23">
+  <p:cSld name="Slide 24">
     <p:bg>
       <p:bgPr>
         <a:solidFill>
@@ -27751,6 +29463,28 @@
             </a:r>
             <a:endParaRPr lang="en-US" sz="1200" dirty="0"/>
           </a:p>
+          <a:p>
+            <a:pPr marL="342900" indent="-342900">
+              <a:spcAft>
+                <a:spcPts val="900"/>
+              </a:spcAft>
+              <a:buSzPct val="100000"/>
+              <a:buFont typeface="+mj-lt"/>
+              <a:buAutoNum type="arabicPeriod" startAt="1"/>
+            </a:pPr>
+            <a:r>
+              <a:rPr lang="en-US" sz="1200" dirty="0">
+                <a:solidFill>
+                  <a:srgbClr val="0F1B2D"/>
+                </a:solidFill>
+                <a:latin typeface="Arial" pitchFamily="34" charset="0"/>
+                <a:ea typeface="Arial" pitchFamily="34" charset="-122"/>
+                <a:cs typeface="Arial" pitchFamily="34" charset="-120"/>
+              </a:rPr>
+              <a:t>DSRL-APT-2023: A new synthetic dataset for advanced persistent threats. The ISC International Journal of Information Security (ISeCure), 17(2):107–116, 2025. (DAPT2020 benign count)</a:t>
+            </a:r>
+            <a:endParaRPr lang="en-US" sz="1200" dirty="0"/>
+          </a:p>
         </p:txBody>
       </p:sp>
       <p:sp>
@@ -27825,7 +29559,7 @@
                 <a:ea typeface="Arial" pitchFamily="34" charset="-122"/>
                 <a:cs typeface="Arial" pitchFamily="34" charset="-120"/>
               </a:rPr>
-              <a:t>23</a:t>
+              <a:t>24</a:t>
             </a:r>
             <a:endParaRPr lang="en-US" sz="900" dirty="0"/>
           </a:p>
@@ -27839,9 +29573,9 @@
 </p:sld>
 </file>
 
-<file path=ppt/slides/slide24.xml><?xml version="1.0" encoding="utf-8"?>
+<file path=ppt/slides/slide25.xml><?xml version="1.0" encoding="utf-8"?>
 <p:sld xmlns:a="http://schemas.openxmlformats.org/drawingml/2006/main" xmlns:r="http://schemas.openxmlformats.org/officeDocument/2006/relationships" xmlns:p="http://schemas.openxmlformats.org/presentationml/2006/main">
-  <p:cSld name="Slide 24">
+  <p:cSld name="Slide 25">
     <p:bg>
       <p:bgPr>
         <a:blipFill dpi="0" rotWithShape="1">
@@ -30055,7 +31789,7 @@
                 <a:ea typeface="Arial" pitchFamily="34" charset="-122"/>
                 <a:cs typeface="Arial" pitchFamily="34" charset="-120"/>
               </a:rPr>
-              <a:t>On real APT traffic the hybrid ranks threats well (AUC ≈ 99%), but raises ≈ 6% false alarms, and the paper's protocol inflates its reported results.</a:t>
+              <a:t>On real APT traffic the hybrid ranks threats well (AUC ≈ 99%), but raises ≈ 7% false alarms, and the paper's protocol inflates its reported results.</a:t>
             </a:r>
             <a:endParaRPr lang="en-US" sz="1300" dirty="0"/>
           </a:p>
@@ -41113,7 +42847,7 @@
                 <a:ea typeface="Georgia" pitchFamily="34" charset="-122"/>
                 <a:cs typeface="Georgia" pitchFamily="34" charset="-120"/>
               </a:rPr>
-              <a:t>5,257</a:t>
+              <a:t>5,248</a:t>
             </a:r>
             <a:endParaRPr lang="en-US" sz="3400" dirty="0"/>
           </a:p>
@@ -41488,7 +43222,7 @@
                 <a:ea typeface="Arial" pitchFamily="34" charset="-122"/>
                 <a:cs typeface="Arial" pitchFamily="34" charset="-120"/>
               </a:rPr>
-              <a:t>after the fix, benign = 63,712 flows, exactly the figure reported for DAPT2020.</a:t>
+              <a:t>after the fix, benign = 63,712 flows, matching the count reported for DAPT2020 in later work (ISeCure, 2025).</a:t>
             </a:r>
             <a:endParaRPr lang="en-US" sz="1350" dirty="0"/>
           </a:p>

--- a/APT_Detection_MidEval.pptx
+++ b/APT_Detection_MidEval.pptx
@@ -17601,7 +17601,7 @@
       </p:sp>
       <p:pic>
         <p:nvPicPr>
-          <p:cNvPr id="20" name="Image 0" descr="/private/tmp/claude-501/-Users-ashishjain-Documents-RIS-Mid-Eval/4e14a31e-25f5-4016-81db-47057b986f0d/scratchpad/deck/charts/f1_protocols.png">    </p:cNvPr>
+          <p:cNvPr id="20" name="Image 0" descr="F1-score of all 15 models under the paper protocol and the leakage-free protocol">    </p:cNvPr>
           <p:cNvPicPr>
             <a:picLocks noChangeAspect="1"/>
           </p:cNvPicPr>
@@ -21367,7 +21367,7 @@
       </p:sp>
       <p:pic>
         <p:nvPicPr>
-          <p:cNvPr id="20" name="Image 0" descr="/private/tmp/claude-501/-Users-ashishjain-Documents-RIS-Mid-Eval/4e14a31e-25f5-4016-81db-47057b986f0d/scratchpad/deck/charts/stage_confusion.png">    </p:cNvPr>
+          <p:cNvPr id="20" name="Image 0" descr="Confusion matrix of APT-stage predictions by the soft-vote hybrid">    </p:cNvPr>
           <p:cNvPicPr>
             <a:picLocks noChangeAspect="1"/>
           </p:cNvPicPr>
@@ -23793,7 +23793,7 @@
       </p:sp>
       <p:pic>
         <p:nvPicPr>
-          <p:cNvPr id="27" name="Image 0" descr="/private/tmp/claude-501/-Users-ashishjain-Documents-RIS-Mid-Eval/4e14a31e-25f5-4016-81db-47057b986f0d/scratchpad/deck/charts/missed_by_activity.png">    </p:cNvPr>
+          <p:cNvPr id="27" name="Image 0" descr="Share of APT flows missed by the hybrid, by attack activity">    </p:cNvPr>
           <p:cNvPicPr>
             <a:picLocks noChangeAspect="1"/>
           </p:cNvPicPr>
@@ -41715,7 +41715,7 @@
       </p:sp>
       <p:pic>
         <p:nvPicPr>
-          <p:cNvPr id="28" name="Image 0" descr="/private/tmp/claude-501/-Users-ashishjain-Documents-RIS-Mid-Eval/4e14a31e-25f5-4016-81db-47057b986f0d/scratchpad/deck/charts/stage_counts.png">    </p:cNvPr>
+          <p:cNvPr id="28" name="Image 0" descr="Bar chart of DAPT2020 flows per APT stage after cleaning, log scale">    </p:cNvPr>
           <p:cNvPicPr>
             <a:picLocks noChangeAspect="1"/>
           </p:cNvPicPr>

--- a/APT_Detection_MidEval.pptx
+++ b/APT_Detection_MidEval.pptx
@@ -527,7 +527,7 @@
             <a:r>
               <a:rPr lang="en-US" dirty="0"/>
               <a:t>[ 0:40 on this slide  |  clock 0:00 -&gt; 0:40 of 20:00 ]
-Good morning. We are presenting Project 16: anomaly detection using machine learning for Advanced Persistent Threats, or APTs.
+Good morning. We are Ashish Jain, Ameya Purohit and Chaitanya Shah, and we are presenting Project 16: anomaly detection using machine learning for Advanced Persistent Threats, or APTs.
 Our reference paper is Saini and colleagues, published in 2023 in Concurrency and Computation: Practice and Experience. It proposes a hybrid Random Forest plus XGBoost model for detecting APT attacks.
 In this mid-term evaluation we will show that we implemented the complete method, moved it to a dataset that genuinely contains APT attacks, and tested whether the paper's claims hold up.
 TRANSITION: Here is how the talk is organised.</a:t>
@@ -900,8 +900,7 @@
               <a:rPr lang="en-US" dirty="0"/>
               <a:t>[ 0:40 on this slide  |  clock 10:45 -&gt; 11:25 of 20:00 ]
 Three experiments. A replication with exactly the paper's protocol. A correction: the same pipeline, leakage-free, repeated over five random seeds for the key models. And an extension the paper's datasets cannot support: predicting the APT stage of each flow.
-Fifteen models in total: the hybrid as published, a soft-vote variant, ten classical models and three deep learning models.
-HAND-OFF POINT (next speaker): results.</a:t>
+Fifteen models in total: the hybrid as published, a soft-vote variant, ten classical models and three deep learning models.</a:t>
             </a:r>
             <a:endParaRPr lang="en-US" dirty="0"/>
           </a:p>
@@ -1175,7 +1174,8 @@
 On the left, as the paper would report it: F1 97.06 percent. Same predictions at the real ratio: 91.49. So 5.6 of the 8.2 points come purely from testing on a fifty-fifty set: precision drops from 94.8 to 84.7 percent.
 The remaining 2.6 points are the leak: 70 percent of the APT flows in the paper's test set are synthetic, and the model misses only 0.34 percent of those, versus 1.12 percent of real ones.
 Both effects come from balancing before splitting; the misleading class ratio accounts for about 68 percent of the gap, leakage for the rest.
-TRANSITION: Is this specific to the hybrid? Here are all fifteen models.</a:t>
+TRANSITION: Is this specific to the hybrid? Here are all fifteen models.
+HAND-OFF POINT (Speaker 3, from 13:50): remaining results, conclusions and Q&amp;A.</a:t>
             </a:r>
             <a:endParaRPr lang="en-US" dirty="0"/>
           </a:p>
@@ -1631,8 +1631,7 @@
               <a:rPr lang="en-US" dirty="0"/>
               <a:t>[ 1:00 on this slide  |  clock 16:55 -&gt; 17:55 of 20:00 ]
 False alarms first. 50.6 percent of them are flows labelled benign that involve the attacker's own hosts. That may be label noise, but it's not proof: those hosts also appear on Monday, when no attacks are labelled. And 42.2 percent of false alarms fall on Monday itself, so they are genuine false alarms on normal traffic.
-Missed attacks, on the right. Rare, low-volume steps such as CSRF, command injection, privilege escalation and SQL injection have the highest miss rates. But by count, most misses are Account Discovery: 57 of 127. That is a clear target for improvement.
-HAND-OFF POINT (next speaker): conclusions.</a:t>
+Missed attacks, on the right. Rare, low-volume steps such as CSRF, command injection, privilege escalation and SQL injection have the highest miss rates. But by count, most misses are Account Discovery: 57 of 127. That is a clear target for improvement.</a:t>
             </a:r>
             <a:endParaRPr lang="en-US" dirty="0"/>
           </a:p>
@@ -2464,8 +2463,7 @@
 This table compares the paper's datasets, on the left, with the one we used, on the right.
 None of the paper's datasets was built around an APT campaign, and none labels flows with an APT stage. Their attacks are generic and isolated: DoS, brute force, botnets, probes, exploits. NSL-KDD is even based on traffic from 1998.
 DAPT2020 was published in 2020 by researchers at Arizona State University specifically for APT research. A red team ran a full campaign over five days, and every flow is labelled with its stage.
-Crucially, it uses the same 76 CICFlowMeter features as CIC-IDS2017 and 2018, the paper's main datasets, so the paper's method runs on it unchanged and our results are directly comparable.
-HAND-OFF POINT (next speaker): data and method.</a:t>
+Crucially, it uses the same 76 CICFlowMeter features as CIC-IDS2017 and 2018, the paper's main datasets, so the paper's method runs on it unchanged and our results are directly comparable.</a:t>
             </a:r>
             <a:endParaRPr lang="en-US" dirty="0"/>
           </a:p>
@@ -2739,7 +2737,8 @@
 The most serious: one of the ten CSV files has no header row. A standard loader treats its first flow as the header, which loses 2,314 flows: 94 percent of all Lateral Movement.
 Second, benign traffic is labelled in three different ways, which we unified. Third, 5,248 duplicate flows and 12 constant columns, removed as the paper prescribes. Fourth, only 15 exfiltration flows.
 Sanity check: after the fix we count 63,712 benign flows, which matches the figure other researchers report for DAPT2020.
-TRANSITION: With clean data, we implemented the paper's pipeline.</a:t>
+TRANSITION: With clean data, we implemented the paper's pipeline.
+HAND-OFF POINT (Speaker 2, from 7:05): pipeline, hybrid model, experiments and the first two results.</a:t>
             </a:r>
             <a:endParaRPr lang="en-US" dirty="0"/>
           </a:p>
@@ -5055,7 +5054,7 @@
         </p:nvSpPr>
         <p:spPr>
           <a:xfrm>
-            <a:off x="685800" y="1097280"/>
+            <a:off x="685800" y="777240"/>
             <a:ext cx="6035040" cy="274320"/>
           </a:xfrm>
           <a:prstGeom prst="rect">
@@ -5094,8 +5093,8 @@
         </p:nvSpPr>
         <p:spPr>
           <a:xfrm>
-            <a:off x="685800" y="1554480"/>
-            <a:ext cx="6035040" cy="2514600"/>
+            <a:off x="685800" y="1188720"/>
+            <a:ext cx="6035040" cy="2377440"/>
           </a:xfrm>
           <a:prstGeom prst="rect">
             <a:avLst/>
@@ -5133,8 +5132,8 @@
         </p:nvSpPr>
         <p:spPr>
           <a:xfrm>
-            <a:off x="685800" y="4206240"/>
-            <a:ext cx="5760720" cy="868680"/>
+            <a:off x="685800" y="3657600"/>
+            <a:ext cx="5760720" cy="777240"/>
           </a:xfrm>
           <a:prstGeom prst="rect">
             <a:avLst/>
@@ -5172,7 +5171,179 @@
         </p:nvSpPr>
         <p:spPr>
           <a:xfrm>
-            <a:off x="685800" y="5715000"/>
+            <a:off x="685800" y="4617720"/>
+            <a:ext cx="3657600" cy="228600"/>
+          </a:xfrm>
+          <a:prstGeom prst="rect">
+            <a:avLst/>
+          </a:prstGeom>
+          <a:noFill/>
+          <a:ln/>
+        </p:spPr>
+        <p:txBody>
+          <a:bodyPr wrap="square" lIns="0" tIns="0" rIns="0" bIns="0" rtlCol="0" anchor="t"/>
+          <a:lstStyle/>
+          <a:p>
+            <a:pPr indent="0" marL="0">
+              <a:buNone/>
+            </a:pPr>
+            <a:r>
+              <a:rPr lang="en-US" sz="1000" b="1" dirty="0">
+                <a:solidFill>
+                  <a:srgbClr val="F08A6E"/>
+                </a:solidFill>
+                <a:latin typeface="Arial" pitchFamily="34" charset="0"/>
+                <a:ea typeface="Arial" pitchFamily="34" charset="-122"/>
+                <a:cs typeface="Arial" pitchFamily="34" charset="-120"/>
+              </a:rPr>
+              <a:t>PRESENTED BY</a:t>
+            </a:r>
+            <a:endParaRPr lang="en-US" sz="1000" dirty="0"/>
+          </a:p>
+        </p:txBody>
+      </p:sp>
+      <p:sp>
+        <p:nvSpPr>
+          <p:cNvPr id="86" name="Text 84"/>
+          <p:cNvSpPr txBox="1"/>
+          <p:nvPr/>
+        </p:nvSpPr>
+        <p:spPr>
+          <a:xfrm>
+            <a:off x="685800" y="4892040"/>
+            <a:ext cx="5486400" cy="868680"/>
+          </a:xfrm>
+          <a:prstGeom prst="rect">
+            <a:avLst/>
+          </a:prstGeom>
+          <a:noFill/>
+          <a:ln/>
+        </p:spPr>
+        <p:txBody>
+          <a:bodyPr wrap="square" lIns="0" tIns="0" rIns="0" bIns="0" rtlCol="0" anchor="t"/>
+          <a:lstStyle/>
+          <a:p>
+            <a:pPr indent="0" marL="0">
+              <a:spcAft>
+                <a:spcPts val="200"/>
+              </a:spcAft>
+              <a:buNone/>
+            </a:pPr>
+            <a:r>
+              <a:rPr lang="en-US" sz="1400" b="1" dirty="0">
+                <a:solidFill>
+                  <a:srgbClr val="FFFFFF"/>
+                </a:solidFill>
+                <a:latin typeface="Arial" pitchFamily="34" charset="0"/>
+                <a:ea typeface="Arial" pitchFamily="34" charset="-122"/>
+                <a:cs typeface="Arial" pitchFamily="34" charset="-120"/>
+              </a:rPr>
+              <a:t>Ashish Jain</a:t>
+            </a:r>
+            <a:pPr indent="0" marL="0">
+              <a:spcAft>
+                <a:spcPts val="200"/>
+              </a:spcAft>
+              <a:buNone/>
+            </a:pPr>
+            <a:r>
+              <a:rPr lang="en-US" sz="1400" dirty="0">
+                <a:solidFill>
+                  <a:srgbClr val="A9B6C8"/>
+                </a:solidFill>
+                <a:latin typeface="Arial" pitchFamily="34" charset="0"/>
+                <a:ea typeface="Arial" pitchFamily="34" charset="-122"/>
+                <a:cs typeface="Arial" pitchFamily="34" charset="-120"/>
+              </a:rPr>
+              <a:t>   (2025202029)</a:t>
+            </a:r>
+            <a:endParaRPr lang="en-US" sz="1400" dirty="0"/>
+          </a:p>
+          <a:p>
+            <a:pPr indent="0" marL="0">
+              <a:spcAft>
+                <a:spcPts val="200"/>
+              </a:spcAft>
+              <a:buNone/>
+            </a:pPr>
+            <a:r>
+              <a:rPr lang="en-US" sz="1400" b="1" dirty="0">
+                <a:solidFill>
+                  <a:srgbClr val="FFFFFF"/>
+                </a:solidFill>
+                <a:latin typeface="Arial" pitchFamily="34" charset="0"/>
+                <a:ea typeface="Arial" pitchFamily="34" charset="-122"/>
+                <a:cs typeface="Arial" pitchFamily="34" charset="-120"/>
+              </a:rPr>
+              <a:t>Ameya Purohit</a:t>
+            </a:r>
+            <a:pPr indent="0" marL="0">
+              <a:spcAft>
+                <a:spcPts val="200"/>
+              </a:spcAft>
+              <a:buNone/>
+            </a:pPr>
+            <a:r>
+              <a:rPr lang="en-US" sz="1400" dirty="0">
+                <a:solidFill>
+                  <a:srgbClr val="A9B6C8"/>
+                </a:solidFill>
+                <a:latin typeface="Arial" pitchFamily="34" charset="0"/>
+                <a:ea typeface="Arial" pitchFamily="34" charset="-122"/>
+                <a:cs typeface="Arial" pitchFamily="34" charset="-120"/>
+              </a:rPr>
+              <a:t>   (2025202006)</a:t>
+            </a:r>
+            <a:endParaRPr lang="en-US" sz="1400" dirty="0"/>
+          </a:p>
+          <a:p>
+            <a:pPr indent="0" marL="0">
+              <a:spcAft>
+                <a:spcPts val="200"/>
+              </a:spcAft>
+              <a:buNone/>
+            </a:pPr>
+            <a:r>
+              <a:rPr lang="en-US" sz="1400" b="1" dirty="0">
+                <a:solidFill>
+                  <a:srgbClr val="FFFFFF"/>
+                </a:solidFill>
+                <a:latin typeface="Arial" pitchFamily="34" charset="0"/>
+                <a:ea typeface="Arial" pitchFamily="34" charset="-122"/>
+                <a:cs typeface="Arial" pitchFamily="34" charset="-120"/>
+              </a:rPr>
+              <a:t>Chaitanya Shah</a:t>
+            </a:r>
+            <a:pPr indent="0" marL="0">
+              <a:spcAft>
+                <a:spcPts val="200"/>
+              </a:spcAft>
+              <a:buNone/>
+            </a:pPr>
+            <a:r>
+              <a:rPr lang="en-US" sz="1400" dirty="0">
+                <a:solidFill>
+                  <a:srgbClr val="A9B6C8"/>
+                </a:solidFill>
+                <a:latin typeface="Arial" pitchFamily="34" charset="0"/>
+                <a:ea typeface="Arial" pitchFamily="34" charset="-122"/>
+                <a:cs typeface="Arial" pitchFamily="34" charset="-120"/>
+              </a:rPr>
+              <a:t>   (2025202033)</a:t>
+            </a:r>
+            <a:endParaRPr lang="en-US" sz="1400" dirty="0"/>
+          </a:p>
+        </p:txBody>
+      </p:sp>
+      <p:sp>
+        <p:nvSpPr>
+          <p:cNvPr id="87" name="Text 85"/>
+          <p:cNvSpPr txBox="1"/>
+          <p:nvPr/>
+        </p:nvSpPr>
+        <p:spPr>
+          <a:xfrm>
+            <a:off x="685800" y="5989320"/>
             <a:ext cx="5852160" cy="502920"/>
           </a:xfrm>
           <a:prstGeom prst="rect">
